--- a/outputs/presentation.pptx
+++ b/outputs/presentation.pptx
@@ -3113,7 +3113,7 @@
           <a:lstStyle/>
           <a:p>
             <a:r>
-              <a:t>Trishuli Flood Mapping — 2026</a:t>
+              <a:t>Trishuli / Bhote Koshi flood: Sentinel-1 analysis</a:t>
             </a:r>
           </a:p>
         </p:txBody>
@@ -3133,18 +3133,27 @@
           <a:bodyPr/>
           <a:lstStyle/>
           <a:p>
-            <a:r>
-              <a:t>Sentinel-1 SAR + Machine Learning</a:t>
-            </a:r>
-          </a:p>
-          <a:p>
-            <a:r>
-              <a:t>P1 · P2 · P3 · P4</a:t>
-            </a:r>
-          </a:p>
-          <a:p>
-            <a:r>
-              <a:t>2026-10-01</a:t>
+            <a:pPr>
+              <a:defRPr sz="2200"/>
+            </a:pPr>
+            <a:r>
+              <a:t>Calibrated, terrain-corrected SAR and OpenStreetMap exposure</a:t>
+            </a:r>
+          </a:p>
+          <a:p>
+            <a:pPr>
+              <a:defRPr sz="2200"/>
+            </a:pPr>
+            <a:r>
+              <a:t>Preliminary and unvalidated</a:t>
+            </a:r>
+          </a:p>
+          <a:p>
+            <a:pPr>
+              <a:defRPr sz="2200"/>
+            </a:pPr>
+            <a:r>
+              <a:t>2026-10-04</a:t>
             </a:r>
           </a:p>
         </p:txBody>
@@ -3183,7 +3192,7 @@
           <a:lstStyle/>
           <a:p>
             <a:r>
-              <a:t>Limitations &amp; Next Steps</a:t>
+              <a:t>Limitations and next steps</a:t>
             </a:r>
           </a:p>
         </p:txBody>
@@ -3203,18 +3212,35 @@
           <a:bodyPr/>
           <a:lstStyle/>
           <a:p>
-            <a:r>
-              <a:t>• Single-event training</a:t>
-            </a:r>
-          </a:p>
-          <a:p>
-            <a:r>
-              <a:t>• 30 m misses sub-pixel urban flooding</a:t>
-            </a:r>
-          </a:p>
-          <a:p>
-            <a:r>
-              <a:t>• Next: dual-orbit fusion, S2 validation</a:t>
+            <a:pPr>
+              <a:defRPr sz="2200"/>
+            </a:pPr>
+            <a:r>
+              <a:t>• Post scene is two days after the event</a:t>
+            </a:r>
+          </a:p>
+          <a:p>
+            <a:pPr>
+              <a:defRPr sz="2200"/>
+            </a:pPr>
+            <a:r>
+              <a:t>• 30 m pixels, steep terrain masked, OSM incomplete in rural Rasuwa</a:t>
+            </a:r>
+          </a:p>
+          <a:p>
+            <a:pPr>
+              <a:defRPr sz="2200"/>
+            </a:pPr>
+            <a:r>
+              <a:t>• Next: Sentinel-2, PlanetScope or high-resolution SAR within 24-72 h</a:t>
+            </a:r>
+          </a:p>
+          <a:p>
+            <a:pPr>
+              <a:defRPr sz="2200"/>
+            </a:pPr>
+            <a:r>
+              <a:t>• Replace the threshold detector before reuse</a:t>
             </a:r>
           </a:p>
         </p:txBody>
@@ -3273,18 +3299,27 @@
           <a:bodyPr/>
           <a:lstStyle/>
           <a:p>
-            <a:r>
-              <a:t>• Trishuli / Bhote Koshi corridor flooding</a:t>
-            </a:r>
-          </a:p>
-          <a:p>
-            <a:r>
-              <a:t>• Need rapid extent + impact mapping</a:t>
-            </a:r>
-          </a:p>
-          <a:p>
-            <a:r>
-              <a:t>• 48-hour SAR-to-decision pipeline</a:t>
+            <a:pPr>
+              <a:defRPr sz="2200"/>
+            </a:pPr>
+            <a:r>
+              <a:t>• Suspected GLOF on 2026-08-26, Rasuwa District, Nepal</a:t>
+            </a:r>
+          </a:p>
+          <a:p>
+            <a:pPr>
+              <a:defRPr sz="2200"/>
+            </a:pPr>
+            <a:r>
+              <a:t>• Can free Sentinel-1 data map flood extent and impact quickly?</a:t>
+            </a:r>
+          </a:p>
+          <a:p>
+            <a:pPr>
+              <a:defRPr sz="2200"/>
+            </a:pPr>
+            <a:r>
+              <a:t>• EMSR927 mapped damaged structures but has no flood-extent layer</a:t>
             </a:r>
           </a:p>
         </p:txBody>
@@ -3343,18 +3378,35 @@
           <a:bodyPr/>
           <a:lstStyle/>
           <a:p>
-            <a:r>
-              <a:t>• Sentinel-1 GRD (VV/VH) — 30 m</a:t>
-            </a:r>
-          </a:p>
-          <a:p>
-            <a:r>
-              <a:t>• Copernicus DEM — 30 m</a:t>
-            </a:r>
-          </a:p>
-          <a:p>
-            <a:r>
-              <a:t>• OpenStreetMap buildings &amp; roads</a:t>
+            <a:pPr>
+              <a:defRPr sz="2200"/>
+            </a:pPr>
+            <a:r>
+              <a:t>• Sentinel-1 GRD VV/VH: 2026-08-16 (pre), 2026-08-28 (post)</a:t>
+            </a:r>
+          </a:p>
+          <a:p>
+            <a:pPr>
+              <a:defRPr sz="2200"/>
+            </a:pPr>
+            <a:r>
+              <a:t>• Copernicus GLO-30 DEM</a:t>
+            </a:r>
+          </a:p>
+          <a:p>
+            <a:pPr>
+              <a:defRPr sz="2200"/>
+            </a:pPr>
+            <a:r>
+              <a:t>• OpenStreetMap snapshot of 2026-07-27 (pre-event)</a:t>
+            </a:r>
+          </a:p>
+          <a:p>
+            <a:pPr>
+              <a:defRPr sz="2200"/>
+            </a:pPr>
+            <a:r>
+              <a:t>• EMSR927 damage points, used only for validation</a:t>
             </a:r>
           </a:p>
         </p:txBody>
@@ -3413,23 +3465,35 @@
           <a:bodyPr/>
           <a:lstStyle/>
           <a:p>
-            <a:r>
-              <a:t>1. Align DEM + S1 to 30 m UTM grid</a:t>
-            </a:r>
-          </a:p>
-          <a:p>
-            <a:r>
-              <a:t>2. Detect flood: Δ VV &lt; -1.5 dB</a:t>
-            </a:r>
-          </a:p>
-          <a:p>
-            <a:r>
-              <a:t>3. Train XGBoost on 9 features</a:t>
-            </a:r>
-          </a:p>
-          <a:p>
-            <a:r>
-              <a:t>4. Overlay on OSM for impact</a:t>
+            <a:pPr>
+              <a:defRPr sz="2200"/>
+            </a:pPr>
+            <a:r>
+              <a:t>1. SNAP: orbit file, noise removal, sigma0, terrain correction</a:t>
+            </a:r>
+          </a:p>
+          <a:p>
+            <a:pPr>
+              <a:defRPr sz="2200"/>
+            </a:pPr>
+            <a:r>
+              <a:t>2. Average to a 30 m grid (UTM 45N)</a:t>
+            </a:r>
+          </a:p>
+          <a:p>
+            <a:pPr>
+              <a:defRPr sz="2200"/>
+            </a:pPr>
+            <a:r>
+              <a:t>3. Detect: mean VV/VH change below a threshold, flat land only</a:t>
+            </a:r>
+          </a:p>
+          <a:p>
+            <a:pPr>
+              <a:defRPr sz="2200"/>
+            </a:pPr>
+            <a:r>
+              <a:t>4. Overlay on OSM and validate against EMSR927</a:t>
             </a:r>
           </a:p>
         </p:txBody>
@@ -3468,7 +3532,7 @@
           <a:lstStyle/>
           <a:p>
             <a:r>
-              <a:t>Flood Detection (P2)</a:t>
+              <a:t>Key finding</a:t>
             </a:r>
           </a:p>
         </p:txBody>
@@ -3488,18 +3552,27 @@
           <a:bodyPr/>
           <a:lstStyle/>
           <a:p>
-            <a:r>
-              <a:t>• 22.66 km² observed flooded</a:t>
-            </a:r>
-          </a:p>
-          <a:p>
-            <a:r>
-              <a:t>• Threshold -1.5 dB (clamped Otsu)</a:t>
-            </a:r>
-          </a:p>
-          <a:p>
-            <a:r>
-              <a:t>• Slope &amp; permanent water masked</a:t>
+            <a:pPr>
+              <a:defRPr sz="2200"/>
+            </a:pPr>
+            <a:r>
+              <a:t>• No detectable flood signal on this Sentinel-1 pair</a:t>
+            </a:r>
+          </a:p>
+          <a:p>
+            <a:pPr>
+              <a:defRPr sz="2200"/>
+            </a:pPr>
+            <a:r>
+              <a:t>• River VV change in the Rasuwa reach is no darker than shifted controls</a:t>
+            </a:r>
+          </a:p>
+          <a:p>
+            <a:pPr>
+              <a:defRPr sz="2200"/>
+            </a:pPr>
+            <a:r>
+              <a:t>• The pair cannot resolve the event; it does not show that no flood occurred</a:t>
             </a:r>
           </a:p>
         </p:txBody>
@@ -3538,7 +3611,7 @@
           <a:lstStyle/>
           <a:p>
             <a:r>
-              <a:t>Susceptibility Model (P3)</a:t>
+              <a:t>Detector mask (unvalidated)</a:t>
             </a:r>
           </a:p>
         </p:txBody>
@@ -3558,18 +3631,27 @@
           <a:bodyPr/>
           <a:lstStyle/>
           <a:p>
-            <a:r>
-              <a:t>• XGBoost, 9 features</a:t>
-            </a:r>
-          </a:p>
-          <a:p>
-            <a:r>
-              <a:t>• AUC 0.998</a:t>
-            </a:r>
-          </a:p>
-          <a:p>
-            <a:r>
-              <a:t>• Predicted 23.11 km² — 1.02× observed</a:t>
+            <a:pPr>
+              <a:defRPr sz="2200"/>
+            </a:pPr>
+            <a:r>
+              <a:t>• 5,802 px (5.22 km²), scattered</a:t>
+            </a:r>
+          </a:p>
+          <a:p>
+            <a:pPr>
+              <a:defRPr sz="2200"/>
+            </a:pPr>
+            <a:r>
+              <a:t>• Threshold clipped to -3.5 to -1.5 dB, slope under 12°, patches of 20+ px</a:t>
+            </a:r>
+          </a:p>
+          <a:p>
+            <a:pPr>
+              <a:defRPr sz="2200"/>
+            </a:pPr>
+            <a:r>
+              <a:t>• Selected from noise-level change, so not a flood extent</a:t>
             </a:r>
           </a:p>
         </p:txBody>
@@ -3608,7 +3690,7 @@
           <a:lstStyle/>
           <a:p>
             <a:r>
-              <a:t>Validation</a:t>
+              <a:t>Exposure to the mask</a:t>
             </a:r>
           </a:p>
         </p:txBody>
@@ -3628,18 +3710,35 @@
           <a:bodyPr/>
           <a:lstStyle/>
           <a:p>
-            <a:r>
-              <a:t>• F1 ~0.91</a:t>
-            </a:r>
-          </a:p>
-          <a:p>
-            <a:r>
-              <a:t>• IoU ~0.84</a:t>
-            </a:r>
-          </a:p>
-          <a:p>
-            <a:r>
-              <a:t>• 90%+ of observed flood captured</a:t>
+            <a:pPr>
+              <a:defRPr sz="2200"/>
+            </a:pPr>
+            <a:r>
+              <a:t>• Buildings: 991 of 189,503 (+102 debris-affected)</a:t>
+            </a:r>
+          </a:p>
+          <a:p>
+            <a:pPr>
+              <a:defRPr sz="2200"/>
+            </a:pPr>
+            <a:r>
+              <a:t>• Road segments: 83 of 14,151</a:t>
+            </a:r>
+          </a:p>
+          <a:p>
+            <a:pPr>
+              <a:defRPr sz="2200"/>
+            </a:pPr>
+            <a:r>
+              <a:t>• Bridges: 21 of 385</a:t>
+            </a:r>
+          </a:p>
+          <a:p>
+            <a:pPr>
+              <a:defRPr sz="2200"/>
+            </a:pPr>
+            <a:r>
+              <a:t>• Settlements cut off: 4 of 446</a:t>
             </a:r>
           </a:p>
         </p:txBody>
@@ -3678,7 +3777,7 @@
           <a:lstStyle/>
           <a:p>
             <a:r>
-              <a:t>Impact (P1)</a:t>
+              <a:t>Validation</a:t>
             </a:r>
           </a:p>
         </p:txBody>
@@ -3698,18 +3797,27 @@
           <a:bodyPr/>
           <a:lstStyle/>
           <a:p>
-            <a:r>
-              <a:t>• Buildings flooded: &lt;FILL IN&gt;</a:t>
-            </a:r>
-          </a:p>
-          <a:p>
-            <a:r>
-              <a:t>• Road segments affected: &lt;FILL IN&gt;</a:t>
-            </a:r>
-          </a:p>
-          <a:p>
-            <a:r>
-              <a:t>• Cut-off settlements: &lt;FILL IN&gt;</a:t>
+            <a:pPr>
+              <a:defRPr sz="2200"/>
+            </a:pPr>
+            <a:r>
+              <a:t>• Mask hit rate on EMSR927 damage points vs a random-mask null</a:t>
+            </a:r>
+          </a:p>
+          <a:p>
+            <a:pPr>
+              <a:defRPr sz="2200"/>
+            </a:pPr>
+            <a:r>
+              <a:t>• No mask pixels in 2 of 4 AOIs: a coverage limit, not a detection error</a:t>
+            </a:r>
+          </a:p>
+          <a:p>
+            <a:pPr>
+              <a:defRPr sz="2200"/>
+            </a:pPr>
+            <a:r>
+              <a:t>• U-Net (Sen1Floods11) cannot separate the two scenes, so it is not independent evidence</a:t>
             </a:r>
           </a:p>
         </p:txBody>
@@ -3768,23 +3876,35 @@
           <a:bodyPr/>
           <a:lstStyle/>
           <a:p>
-            <a:r>
-              <a:t>• flood_dashboard_full.html</a:t>
-            </a:r>
-          </a:p>
-          <a:p>
-            <a:r>
-              <a:t>• flood_model.joblib</a:t>
-            </a:r>
-          </a:p>
-          <a:p>
-            <a:r>
-              <a:t>• FINAL_REPORT.pdf</a:t>
-            </a:r>
-          </a:p>
-          <a:p>
-            <a:r>
-              <a:t>• Reproducible pipeline on GitHub</a:t>
+            <a:pPr>
+              <a:defRPr sz="2200"/>
+            </a:pPr>
+            <a:r>
+              <a:t>• Interactive dashboard (outputs/dashboard.html)</a:t>
+            </a:r>
+          </a:p>
+          <a:p>
+            <a:pPr>
+              <a:defRPr sz="2200"/>
+            </a:pPr>
+            <a:r>
+              <a:t>• Situation report and final report</a:t>
+            </a:r>
+          </a:p>
+          <a:p>
+            <a:pPr>
+              <a:defRPr sz="2200"/>
+            </a:pPr>
+            <a:r>
+              <a:t>• Reproducible pipeline (run_all.sh)</a:t>
+            </a:r>
+          </a:p>
+          <a:p>
+            <a:pPr>
+              <a:defRPr sz="2200"/>
+            </a:pPr>
+            <a:r>
+              <a:t>• Trained U-Net weights (flood_unet.pt)</a:t>
             </a:r>
           </a:p>
         </p:txBody>

--- a/outputs/presentation.pptx
+++ b/outputs/presentation.pptx
@@ -3635,7 +3635,7 @@
               <a:defRPr sz="2200"/>
             </a:pPr>
             <a:r>
-              <a:t>• 5,802 px (5.22 km²), scattered</a:t>
+              <a:t>• 340 px (0.31 km²), scattered</a:t>
             </a:r>
           </a:p>
           <a:p>
@@ -3714,7 +3714,7 @@
               <a:defRPr sz="2200"/>
             </a:pPr>
             <a:r>
-              <a:t>• Buildings: 991 of 189,503 (+102 debris-affected)</a:t>
+              <a:t>• Buildings: 3 of 189,503 (+473 debris-affected)</a:t>
             </a:r>
           </a:p>
           <a:p>
@@ -3722,7 +3722,7 @@
               <a:defRPr sz="2200"/>
             </a:pPr>
             <a:r>
-              <a:t>• Road segments: 83 of 14,151</a:t>
+              <a:t>• Road segments: 0 of 14,151</a:t>
             </a:r>
           </a:p>
           <a:p>
@@ -3730,7 +3730,7 @@
               <a:defRPr sz="2200"/>
             </a:pPr>
             <a:r>
-              <a:t>• Bridges: 21 of 385</a:t>
+              <a:t>• Bridges: 0 of 385</a:t>
             </a:r>
           </a:p>
           <a:p>
@@ -3738,7 +3738,7 @@
               <a:defRPr sz="2200"/>
             </a:pPr>
             <a:r>
-              <a:t>• Settlements cut off: 4 of 446</a:t>
+              <a:t>• Settlements cut off: 0 of 446</a:t>
             </a:r>
           </a:p>
         </p:txBody>

--- a/outputs/presentation.pptx
+++ b/outputs/presentation.pptx
@@ -14,7 +14,6 @@
     <p:sldId id="262" r:id="rId13"/>
     <p:sldId id="263" r:id="rId14"/>
     <p:sldId id="264" r:id="rId15"/>
-    <p:sldId id="265" r:id="rId16"/>
   </p:sldIdLst>
   <p:sldSz cx="9144000" cy="6858000" type="screen4x3"/>
   <p:notesSz cx="6858000" cy="9144000"/>
@@ -3113,7 +3112,7 @@
           <a:lstStyle/>
           <a:p>
             <a:r>
-              <a:t>Trishuli / Bhote Koshi flood: Sentinel-1 analysis</a:t>
+              <a:t>Trishuli / Bhote Koshi flood, 2026-08-26: Sentinel-1 analysis</a:t>
             </a:r>
           </a:p>
         </p:txBody>
@@ -3137,7 +3136,7 @@
               <a:defRPr sz="2200"/>
             </a:pPr>
             <a:r>
-              <a:t>Calibrated, terrain-corrected SAR and OpenStreetMap exposure</a:t>
+              <a:t>Calibrated SAR change detection and OpenStreetMap exposure</a:t>
             </a:r>
           </a:p>
           <a:p>
@@ -3145,7 +3144,7 @@
               <a:defRPr sz="2200"/>
             </a:pPr>
             <a:r>
-              <a:t>Preliminary and unvalidated</a:t>
+              <a:t>Educational prototype, not an operational tool</a:t>
             </a:r>
           </a:p>
           <a:p>
@@ -3153,94 +3152,7 @@
               <a:defRPr sz="2200"/>
             </a:pPr>
             <a:r>
-              <a:t>2026-10-04</a:t>
-            </a:r>
-          </a:p>
-        </p:txBody>
-      </p:sp>
-    </p:spTree>
-  </p:cSld>
-  <p:clrMapOvr>
-    <a:masterClrMapping/>
-  </p:clrMapOvr>
-</p:sld>
-</file>
-
-<file path=ppt/slides/slide10.xml><?xml version="1.0" encoding="utf-8"?>
-<p:sld xmlns:a="http://schemas.openxmlformats.org/drawingml/2006/main" xmlns:p="http://schemas.openxmlformats.org/presentationml/2006/main" xmlns:r="http://schemas.openxmlformats.org/officeDocument/2006/relationships">
-  <p:cSld>
-    <p:spTree>
-      <p:nvGrpSpPr>
-        <p:cNvPr id="1" name=""/>
-        <p:cNvGrpSpPr/>
-        <p:nvPr/>
-      </p:nvGrpSpPr>
-      <p:grpSpPr/>
-      <p:sp>
-        <p:nvSpPr>
-          <p:cNvPr id="2" name="Title 1"/>
-          <p:cNvSpPr>
-            <a:spLocks noGrp="1"/>
-          </p:cNvSpPr>
-          <p:nvPr>
-            <p:ph type="title"/>
-          </p:nvPr>
-        </p:nvSpPr>
-        <p:spPr/>
-        <p:txBody>
-          <a:bodyPr/>
-          <a:lstStyle/>
-          <a:p>
-            <a:r>
-              <a:t>Limitations and next steps</a:t>
-            </a:r>
-          </a:p>
-        </p:txBody>
-      </p:sp>
-      <p:sp>
-        <p:nvSpPr>
-          <p:cNvPr id="3" name="Content Placeholder 2"/>
-          <p:cNvSpPr>
-            <a:spLocks noGrp="1"/>
-          </p:cNvSpPr>
-          <p:nvPr>
-            <p:ph idx="1"/>
-          </p:nvPr>
-        </p:nvSpPr>
-        <p:spPr/>
-        <p:txBody>
-          <a:bodyPr/>
-          <a:lstStyle/>
-          <a:p>
-            <a:pPr>
-              <a:defRPr sz="2200"/>
-            </a:pPr>
-            <a:r>
-              <a:t>• Post scene is two days after the event</a:t>
-            </a:r>
-          </a:p>
-          <a:p>
-            <a:pPr>
-              <a:defRPr sz="2200"/>
-            </a:pPr>
-            <a:r>
-              <a:t>• 30 m pixels, steep terrain masked, OSM incomplete in rural Rasuwa</a:t>
-            </a:r>
-          </a:p>
-          <a:p>
-            <a:pPr>
-              <a:defRPr sz="2200"/>
-            </a:pPr>
-            <a:r>
-              <a:t>• Next: Sentinel-2, PlanetScope or high-resolution SAR within 24-72 h</a:t>
-            </a:r>
-          </a:p>
-          <a:p>
-            <a:pPr>
-              <a:defRPr sz="2200"/>
-            </a:pPr>
-            <a:r>
-              <a:t>• Replace the threshold detector before reuse</a:t>
+              <a:t>2026-10-11</a:t>
             </a:r>
           </a:p>
         </p:txBody>
@@ -3303,7 +3215,7 @@
               <a:defRPr sz="2200"/>
             </a:pPr>
             <a:r>
-              <a:t>• Suspected GLOF on 2026-08-26, Rasuwa District, Nepal</a:t>
+              <a:t>• Event date 2026-08-26, Trishuli / Bhote Koshi, Rasuwa, Nepal</a:t>
             </a:r>
           </a:p>
           <a:p>
@@ -3311,7 +3223,7 @@
               <a:defRPr sz="2200"/>
             </a:pPr>
             <a:r>
-              <a:t>• Can free Sentinel-1 data map flood extent and impact quickly?</a:t>
+              <a:t>• Can free Sentinel-1 data show where the valley floor changed, and what is exposed?</a:t>
             </a:r>
           </a:p>
           <a:p>
@@ -3319,7 +3231,7 @@
               <a:defRPr sz="2200"/>
             </a:pPr>
             <a:r>
-              <a:t>• EMSR927 mapped damaged structures but has no flood-extent layer</a:t>
+              <a:t>• Checking only: Copernicus EMS products (EMSR927 GRA: landslide polygons and damage points, no flood-extent layer)</a:t>
             </a:r>
           </a:p>
         </p:txBody>
@@ -3382,7 +3294,7 @@
               <a:defRPr sz="2200"/>
             </a:pPr>
             <a:r>
-              <a:t>• Sentinel-1 GRD VV/VH: 2026-08-16 (pre), 2026-08-28 (post)</a:t>
+              <a:t>• Sentinel-1 GRD VV/VH, track asc85: references 2026-08-16, 2026-08-04, 2026-07-23, 2026-07-11; post 2026-08-28</a:t>
             </a:r>
           </a:p>
           <a:p>
@@ -3390,7 +3302,7 @@
               <a:defRPr sz="2200"/>
             </a:pPr>
             <a:r>
-              <a:t>• Copernicus GLO-30 DEM</a:t>
+              <a:t>• Copernicus GLO-30 DEM (HAND valley floor, radar layover / shadow mask)</a:t>
             </a:r>
           </a:p>
           <a:p>
@@ -3406,7 +3318,7 @@
               <a:defRPr sz="2200"/>
             </a:pPr>
             <a:r>
-              <a:t>• EMSR927 damage points, used only for validation</a:t>
+              <a:t>• EMS products used only for checking</a:t>
             </a:r>
           </a:p>
         </p:txBody>
@@ -3469,7 +3381,7 @@
               <a:defRPr sz="2200"/>
             </a:pPr>
             <a:r>
-              <a:t>1. SNAP: orbit file, noise removal, sigma0, terrain correction</a:t>
+              <a:t>1. SNAP: orbit file, noise removal, sigma0, terrain correction; 30 m grid</a:t>
             </a:r>
           </a:p>
           <a:p>
@@ -3477,7 +3389,7 @@
               <a:defRPr sz="2200"/>
             </a:pPr>
             <a:r>
-              <a:t>2. Average to a 30 m grid (UTM 45N)</a:t>
+              <a:t>2. Robust-z change of the post scene against 4 pre-event references, valley floor only</a:t>
             </a:r>
           </a:p>
           <a:p>
@@ -3485,7 +3397,7 @@
               <a:defRPr sz="2200"/>
             </a:pPr>
             <a:r>
-              <a:t>3. Detect: mean VV/VH change below a threshold, flat land only</a:t>
+              <a:t>3. Thresholds from leave-one-out null runs on pre-event dates (no EMS)</a:t>
             </a:r>
           </a:p>
           <a:p>
@@ -3493,7 +3405,7 @@
               <a:defRPr sz="2200"/>
             </a:pPr>
             <a:r>
-              <a:t>4. Overlay on OSM and validate against EMSR927</a:t>
+              <a:t>4. Overlay on pre-event OSM: exposure, bridges exposed, hospital access</a:t>
             </a:r>
           </a:p>
         </p:txBody>
@@ -3553,26 +3465,34 @@
           <a:lstStyle/>
           <a:p>
             <a:pPr>
-              <a:defRPr sz="2200"/>
+              <a:defRPr sz="1600"/>
             </a:pPr>
             <a:r>
-              <a:t>• No detectable flood signal on this Sentinel-1 pair</a:t>
+              <a:t>• Detector status: change_detected (calibrated = True)</a:t>
             </a:r>
           </a:p>
           <a:p>
             <a:pPr>
-              <a:defRPr sz="2200"/>
+              <a:defRPr sz="1600"/>
             </a:pPr>
             <a:r>
-              <a:t>• River VV change in the Rasuwa reach is no darker than shifted controls</a:t>
+              <a:t>• Flagged: 0.31 km² flood-like (water-like backscatter change), 2.29 km² dark, 0.54 km² bright</a:t>
             </a:r>
           </a:p>
           <a:p>
             <a:pPr>
-              <a:defRPr sz="2200"/>
+              <a:defRPr sz="1600"/>
             </a:pPr>
             <a:r>
-              <a:t>• The pair cannot resolve the event; it does not show that no flood occurred</a:t>
+              <a:t>• Flood-like change (0.31 km² of water-like backscatter change) and surface change (2.29 km² dark, 0.54 km² bright) are each separable from all four pre-event nulls. An independent single-date water model could not separate the event from pre-event dates, and Sentinel-2 does not confirm open water.</a:t>
+            </a:r>
+          </a:p>
+          <a:p>
+            <a:pPr>
+              <a:defRPr sz="1600"/>
+            </a:pPr>
+            <a:r>
+              <a:t>• Surface change on the valley floor, not a validated flood extent</a:t>
             </a:r>
           </a:p>
         </p:txBody>
@@ -3611,7 +3531,7 @@
           <a:lstStyle/>
           <a:p>
             <a:r>
-              <a:t>Detector mask (unvalidated)</a:t>
+              <a:t>Exposure to the mask (not damage)</a:t>
             </a:r>
           </a:p>
         </p:txBody>
@@ -3632,26 +3552,34 @@
           <a:lstStyle/>
           <a:p>
             <a:pPr>
-              <a:defRPr sz="2200"/>
+              <a:defRPr sz="1800"/>
             </a:pPr>
             <a:r>
-              <a:t>• 340 px (0.31 km²), scattered</a:t>
+              <a:t>• Buildings overlapping the mask: 556 (range 244-1,078) of 189,503; 92% unknown status</a:t>
             </a:r>
           </a:p>
           <a:p>
             <a:pPr>
-              <a:defRPr sz="2200"/>
+              <a:defRPr sz="1800"/>
             </a:pPr>
             <a:r>
-              <a:t>• Threshold clipped to -3.5 to -1.5 dB, slope under 12°, patches of 20+ px</a:t>
+              <a:t>• Motorable road in mask: 11.8 km (range 6.4-22.0)</a:t>
             </a:r>
           </a:p>
           <a:p>
             <a:pPr>
-              <a:defRPr sz="2200"/>
+              <a:defRPr sz="1800"/>
             </a:pPr>
             <a:r>
-              <a:t>• Selected from noise-level change, so not a flood extent</a:t>
+              <a:t>• Bridges exposed (not failed): 20 (range 12-30)</a:t>
+            </a:r>
+          </a:p>
+          <a:p>
+            <a:pPr>
+              <a:defRPr sz="1800"/>
+            </a:pPr>
+            <a:r>
+              <a:t>• Settlements with no road path to a hospital: 4 (range 2-12) of 446</a:t>
             </a:r>
           </a:p>
         </p:txBody>
@@ -3690,7 +3618,7 @@
           <a:lstStyle/>
           <a:p>
             <a:r>
-              <a:t>Exposure to the mask</a:t>
+              <a:t>Validation</a:t>
             </a:r>
           </a:p>
         </p:txBody>
@@ -3711,34 +3639,42 @@
           <a:lstStyle/>
           <a:p>
             <a:pPr>
-              <a:defRPr sz="2200"/>
+              <a:defRPr sz="1800"/>
             </a:pPr>
             <a:r>
-              <a:t>• Buildings: 3 of 189,503 (+473 debris-affected)</a:t>
+              <a:t>• Check-only reference: EMSR927 landslide polygons and damage points (GRA products)</a:t>
             </a:r>
           </a:p>
           <a:p>
             <a:pPr>
-              <a:defRPr sz="2200"/>
+              <a:defRPr sz="1800"/>
             </a:pPr>
             <a:r>
-              <a:t>• Road segments: 0 of 14,151</a:t>
+              <a:t>• Hold-out AOI03 vs landslide polygons: precision 0.93, recall 0.17, IoU 0.17</a:t>
             </a:r>
           </a:p>
           <a:p>
             <a:pPr>
-              <a:defRPr sz="2200"/>
+              <a:defRPr sz="1800"/>
             </a:pPr>
             <a:r>
-              <a:t>• Bridges: 0 of 385</a:t>
+              <a:t>• Damage-point recall at 0 m: 23% [11%-33%], indistinguishable from chance</a:t>
             </a:r>
           </a:p>
           <a:p>
             <a:pPr>
-              <a:defRPr sz="2200"/>
+              <a:defRPr sz="1800"/>
             </a:pPr>
             <a:r>
-              <a:t>• Settlements cut off: 0 of 446</a:t>
+              <a:t>• No flood-extent layer: the flood class is not validated against EMS</a:t>
+            </a:r>
+          </a:p>
+          <a:p>
+            <a:pPr>
+              <a:defRPr sz="1800"/>
+            </a:pPr>
+            <a:r>
+              <a:t>• Water model on the corridor (prediction-only): not separable from the nulls, so it is not independent evidence</a:t>
             </a:r>
           </a:p>
         </p:txBody>
@@ -3777,7 +3713,7 @@
           <a:lstStyle/>
           <a:p>
             <a:r>
-              <a:t>Validation</a:t>
+              <a:t>Deliverables</a:t>
             </a:r>
           </a:p>
         </p:txBody>
@@ -3801,7 +3737,7 @@
               <a:defRPr sz="2200"/>
             </a:pPr>
             <a:r>
-              <a:t>• Mask hit rate on EMSR927 damage points vs a random-mask null</a:t>
+              <a:t>• Interactive dashboard (outputs/dashboard/index.html, works offline)</a:t>
             </a:r>
           </a:p>
           <a:p>
@@ -3809,7 +3745,7 @@
               <a:defRPr sz="2200"/>
             </a:pPr>
             <a:r>
-              <a:t>• No mask pixels in 2 of 4 AOIs: a coverage limit, not a detection error</a:t>
+              <a:t>• Situation reports (EN, NE, one page) and docs/REPORT.pdf</a:t>
             </a:r>
           </a:p>
           <a:p>
@@ -3817,7 +3753,15 @@
               <a:defRPr sz="2200"/>
             </a:pPr>
             <a:r>
-              <a:t>• U-Net (Sen1Floods11) cannot separate the two scenes, so it is not independent evidence</a:t>
+              <a:t>• Reproducible pipeline: python -m src.run (SNAP route; --s1-source pc cross-check)</a:t>
+            </a:r>
+          </a:p>
+          <a:p>
+            <a:pPr>
+              <a:defRPr sz="2200"/>
+            </a:pPr>
+            <a:r>
+              <a:t>• Water-model weights (models/)</a:t>
             </a:r>
           </a:p>
         </p:txBody>
@@ -3856,7 +3800,7 @@
           <a:lstStyle/>
           <a:p>
             <a:r>
-              <a:t>Deliverables</a:t>
+              <a:t>Limitations and next steps</a:t>
             </a:r>
           </a:p>
         </p:txBody>
@@ -3880,7 +3824,7 @@
               <a:defRPr sz="2200"/>
             </a:pPr>
             <a:r>
-              <a:t>• Interactive dashboard (outputs/dashboard.html)</a:t>
+              <a:t>• One track; post scene 2026-08-28</a:t>
             </a:r>
           </a:p>
           <a:p>
@@ -3888,7 +3832,7 @@
               <a:defRPr sz="2200"/>
             </a:pPr>
             <a:r>
-              <a:t>• Situation report and final report</a:t>
+              <a:t>• 30 m pixels, steep terrain masked, OSM incomplete in rural areas</a:t>
             </a:r>
           </a:p>
           <a:p>
@@ -3896,15 +3840,7 @@
               <a:defRPr sz="2200"/>
             </a:pPr>
             <a:r>
-              <a:t>• Reproducible pipeline (run_all.sh)</a:t>
-            </a:r>
-          </a:p>
-          <a:p>
-            <a:pPr>
-              <a:defRPr sz="2200"/>
-            </a:pPr>
-            <a:r>
-              <a:t>• Trained U-Net weights (flood_unet.pt)</a:t>
+              <a:t>• Next: a second track or a closer post scene, post-event OSM for cut-off checks</a:t>
             </a:r>
           </a:p>
         </p:txBody>

--- a/outputs/presentation.pptx
+++ b/outputs/presentation.pptx
@@ -4,19 +4,40 @@
   <p:sldMasterIdLst>
     <p:sldMasterId id="2147483648" r:id="rId1"/>
   </p:sldMasterIdLst>
+  <p:notesMasterIdLst>
+    <p:notesMasterId r:id="rId8"/>
+  </p:notesMasterIdLst>
   <p:sldIdLst>
     <p:sldId id="256" r:id="rId7"/>
-    <p:sldId id="257" r:id="rId8"/>
-    <p:sldId id="258" r:id="rId9"/>
-    <p:sldId id="259" r:id="rId10"/>
-    <p:sldId id="260" r:id="rId11"/>
-    <p:sldId id="261" r:id="rId12"/>
-    <p:sldId id="262" r:id="rId13"/>
-    <p:sldId id="263" r:id="rId14"/>
-    <p:sldId id="264" r:id="rId15"/>
+    <p:sldId id="257" r:id="rId9"/>
+    <p:sldId id="258" r:id="rId10"/>
+    <p:sldId id="259" r:id="rId11"/>
+    <p:sldId id="260" r:id="rId12"/>
+    <p:sldId id="261" r:id="rId13"/>
+    <p:sldId id="262" r:id="rId14"/>
+    <p:sldId id="263" r:id="rId15"/>
+    <p:sldId id="264" r:id="rId16"/>
+    <p:sldId id="265" r:id="rId17"/>
+    <p:sldId id="266" r:id="rId18"/>
+    <p:sldId id="267" r:id="rId19"/>
+    <p:sldId id="268" r:id="rId20"/>
   </p:sldIdLst>
-  <p:sldSz cx="9144000" cy="6858000" type="screen4x3"/>
+  <p:sldSz cx="12192000" cy="6858000" type="screen16x9"/>
   <p:notesSz cx="6858000" cy="9144000"/>
+  <p:embeddedFontLst>
+    <p:embeddedFont>
+      <p:font typeface="Inter SemiBold" charset="1"/>
+      <p:regular r:id="rId21"/>
+    </p:embeddedFont>
+    <p:embeddedFont>
+      <p:font typeface="Space Grotesk Bold" charset="1"/>
+      <p:regular r:id="rId22"/>
+    </p:embeddedFont>
+    <p:embeddedFont>
+      <p:font typeface="Space Grotesk" charset="1"/>
+      <p:regular r:id="rId23"/>
+    </p:embeddedFont>
+  </p:embeddedFontLst>
   <p:defaultTextStyle>
     <a:defPPr>
       <a:defRPr lang="en-US"/>
@@ -113,6 +134,1056 @@
     </a:lvl9pPr>
   </p:defaultTextStyle>
 </p:presentation>
+</file>
+
+<file path=ppt/notesMasters/notesMaster1.xml><?xml version="1.0" encoding="utf-8"?>
+<p:notesMaster xmlns:a="http://schemas.openxmlformats.org/drawingml/2006/main" xmlns:p="http://schemas.openxmlformats.org/presentationml/2006/main" xmlns:r="http://schemas.openxmlformats.org/officeDocument/2006/relationships">
+  <p:cSld>
+    <p:bg>
+      <p:bgRef idx="1001">
+        <a:schemeClr val="bg1"/>
+      </p:bgRef>
+    </p:bg>
+    <p:spTree>
+      <p:nvGrpSpPr>
+        <p:cNvPr id="1" name=""/>
+        <p:cNvGrpSpPr/>
+        <p:nvPr/>
+      </p:nvGrpSpPr>
+      <p:grpSpPr>
+        <a:xfrm>
+          <a:off x="0" y="0"/>
+          <a:ext cx="0" cy="0"/>
+          <a:chOff x="0" y="0"/>
+          <a:chExt cx="0" cy="0"/>
+        </a:xfrm>
+      </p:grpSpPr>
+      <p:sp>
+        <p:nvSpPr>
+          <p:cNvPr id="2" name="Header Placeholder 1"/>
+          <p:cNvSpPr>
+            <a:spLocks noGrp="1"/>
+          </p:cNvSpPr>
+          <p:nvPr>
+            <p:ph type="hdr" sz="quarter"/>
+          </p:nvPr>
+        </p:nvSpPr>
+        <p:spPr>
+          <a:xfrm>
+            <a:off x="0" y="0"/>
+            <a:ext cx="2971800" cy="457200"/>
+          </a:xfrm>
+          <a:prstGeom prst="rect">
+            <a:avLst/>
+          </a:prstGeom>
+        </p:spPr>
+        <p:txBody>
+          <a:bodyPr vert="horz" lIns="91440" tIns="45720" rIns="91440" bIns="45720" rtlCol="0"/>
+          <a:lstStyle>
+            <a:lvl1pPr algn="l">
+              <a:defRPr sz="1200"/>
+            </a:lvl1pPr>
+          </a:lstStyle>
+          <a:p>
+            <a:endParaRPr lang="en-US"/>
+          </a:p>
+        </p:txBody>
+      </p:sp>
+      <p:sp>
+        <p:nvSpPr>
+          <p:cNvPr id="3" name="Date Placeholder 2"/>
+          <p:cNvSpPr>
+            <a:spLocks noGrp="1"/>
+          </p:cNvSpPr>
+          <p:nvPr>
+            <p:ph type="dt" idx="1"/>
+          </p:nvPr>
+        </p:nvSpPr>
+        <p:spPr>
+          <a:xfrm>
+            <a:off x="3884613" y="0"/>
+            <a:ext cx="2971800" cy="457200"/>
+          </a:xfrm>
+          <a:prstGeom prst="rect">
+            <a:avLst/>
+          </a:prstGeom>
+        </p:spPr>
+        <p:txBody>
+          <a:bodyPr vert="horz" lIns="91440" tIns="45720" rIns="91440" bIns="45720" rtlCol="0"/>
+          <a:lstStyle>
+            <a:lvl1pPr algn="r">
+              <a:defRPr sz="1200"/>
+            </a:lvl1pPr>
+          </a:lstStyle>
+          <a:p>
+            <a:fld id="{0F89C1C7-3DCD-1040-A9CF-14679D8B5DDD}" type="datetimeFigureOut">
+              <a:rPr lang="en-US" smtClean="0"/>
+              <a:t>10/17/16</a:t>
+            </a:fld>
+            <a:endParaRPr lang="en-US"/>
+          </a:p>
+        </p:txBody>
+      </p:sp>
+      <p:sp>
+        <p:nvSpPr>
+          <p:cNvPr id="4" name="Slide Image Placeholder 3"/>
+          <p:cNvSpPr>
+            <a:spLocks noGrp="1" noRot="1" noChangeAspect="1"/>
+          </p:cNvSpPr>
+          <p:nvPr>
+            <p:ph type="sldImg" idx="2"/>
+          </p:nvPr>
+        </p:nvSpPr>
+        <p:spPr>
+          <a:xfrm>
+            <a:off x="1143000" y="685800"/>
+            <a:ext cx="4572000" cy="3429000"/>
+          </a:xfrm>
+          <a:prstGeom prst="rect">
+            <a:avLst/>
+          </a:prstGeom>
+          <a:noFill/>
+          <a:ln w="12700">
+            <a:solidFill>
+              <a:prstClr val="black"/>
+            </a:solidFill>
+          </a:ln>
+        </p:spPr>
+        <p:txBody>
+          <a:bodyPr vert="horz" lIns="91440" tIns="45720" rIns="91440" bIns="45720" rtlCol="0" anchor="ctr"/>
+          <a:lstStyle/>
+          <a:p>
+            <a:endParaRPr lang="en-US"/>
+          </a:p>
+        </p:txBody>
+      </p:sp>
+      <p:sp>
+        <p:nvSpPr>
+          <p:cNvPr id="5" name="Notes Placeholder 4"/>
+          <p:cNvSpPr>
+            <a:spLocks noGrp="1"/>
+          </p:cNvSpPr>
+          <p:nvPr>
+            <p:ph type="body" sz="quarter" idx="3"/>
+          </p:nvPr>
+        </p:nvSpPr>
+        <p:spPr>
+          <a:xfrm>
+            <a:off x="685800" y="4343400"/>
+            <a:ext cx="5486400" cy="4114800"/>
+          </a:xfrm>
+          <a:prstGeom prst="rect">
+            <a:avLst/>
+          </a:prstGeom>
+        </p:spPr>
+        <p:txBody>
+          <a:bodyPr vert="horz" lIns="91440" tIns="45720" rIns="91440" bIns="45720" rtlCol="0"/>
+          <a:lstStyle/>
+          <a:p>
+            <a:pPr lvl="0"/>
+            <a:r>
+              <a:rPr lang="en-US" smtClean="0"/>
+              <a:t>Click to edit Master text styles</a:t>
+            </a:r>
+          </a:p>
+          <a:p>
+            <a:pPr lvl="1"/>
+            <a:r>
+              <a:rPr lang="en-US" smtClean="0"/>
+              <a:t>Second level</a:t>
+            </a:r>
+          </a:p>
+          <a:p>
+            <a:pPr lvl="2"/>
+            <a:r>
+              <a:rPr lang="en-US" smtClean="0"/>
+              <a:t>Third level</a:t>
+            </a:r>
+          </a:p>
+          <a:p>
+            <a:pPr lvl="3"/>
+            <a:r>
+              <a:rPr lang="en-US" smtClean="0"/>
+              <a:t>Fourth level</a:t>
+            </a:r>
+          </a:p>
+          <a:p>
+            <a:pPr lvl="4"/>
+            <a:r>
+              <a:rPr lang="en-US" smtClean="0"/>
+              <a:t>Fifth level</a:t>
+            </a:r>
+            <a:endParaRPr lang="en-US"/>
+          </a:p>
+        </p:txBody>
+      </p:sp>
+      <p:sp>
+        <p:nvSpPr>
+          <p:cNvPr id="6" name="Footer Placeholder 5"/>
+          <p:cNvSpPr>
+            <a:spLocks noGrp="1"/>
+          </p:cNvSpPr>
+          <p:nvPr>
+            <p:ph type="ftr" sz="quarter" idx="4"/>
+          </p:nvPr>
+        </p:nvSpPr>
+        <p:spPr>
+          <a:xfrm>
+            <a:off x="0" y="8685213"/>
+            <a:ext cx="2971800" cy="457200"/>
+          </a:xfrm>
+          <a:prstGeom prst="rect">
+            <a:avLst/>
+          </a:prstGeom>
+        </p:spPr>
+        <p:txBody>
+          <a:bodyPr vert="horz" lIns="91440" tIns="45720" rIns="91440" bIns="45720" rtlCol="0" anchor="b"/>
+          <a:lstStyle>
+            <a:lvl1pPr algn="l">
+              <a:defRPr sz="1200"/>
+            </a:lvl1pPr>
+          </a:lstStyle>
+          <a:p>
+            <a:endParaRPr lang="en-US"/>
+          </a:p>
+        </p:txBody>
+      </p:sp>
+      <p:sp>
+        <p:nvSpPr>
+          <p:cNvPr id="7" name="Slide Number Placeholder 6"/>
+          <p:cNvSpPr>
+            <a:spLocks noGrp="1"/>
+          </p:cNvSpPr>
+          <p:nvPr>
+            <p:ph type="sldNum" sz="quarter" idx="5"/>
+          </p:nvPr>
+        </p:nvSpPr>
+        <p:spPr>
+          <a:xfrm>
+            <a:off x="3884613" y="8685213"/>
+            <a:ext cx="2971800" cy="457200"/>
+          </a:xfrm>
+          <a:prstGeom prst="rect">
+            <a:avLst/>
+          </a:prstGeom>
+        </p:spPr>
+        <p:txBody>
+          <a:bodyPr vert="horz" lIns="91440" tIns="45720" rIns="91440" bIns="45720" rtlCol="0" anchor="b"/>
+          <a:lstStyle>
+            <a:lvl1pPr algn="r">
+              <a:defRPr sz="1200"/>
+            </a:lvl1pPr>
+          </a:lstStyle>
+          <a:p>
+            <a:fld id="{BB5E49A5-4136-284D-997B-48E1D791AD67}" type="slidenum">
+              <a:rPr lang="en-US" smtClean="0"/>
+              <a:t>‹#›</a:t>
+            </a:fld>
+            <a:endParaRPr lang="en-US"/>
+          </a:p>
+        </p:txBody>
+      </p:sp>
+    </p:spTree>
+    <p:extLst>
+      <p:ext uri="{BB962C8B-B14F-4D97-AF65-F5344CB8AC3E}">
+        <p14:creationId xmlns:p14="http://schemas.microsoft.com/office/powerpoint/2010/main" val="2623252185"/>
+      </p:ext>
+    </p:extLst>
+  </p:cSld>
+  <p:clrMap bg1="lt1" tx1="dk1" bg2="lt2" tx2="dk2" accent1="accent1" accent2="accent2" accent3="accent3" accent4="accent4" accent5="accent5" accent6="accent6" hlink="hlink" folHlink="folHlink"/>
+  <p:notesStyle>
+    <a:lvl1pPr marL="0" algn="l" defTabSz="457200" rtl="0" eaLnBrk="1" latinLnBrk="0" hangingPunct="1">
+      <a:defRPr sz="1200" kern="1200">
+        <a:solidFill>
+          <a:schemeClr val="tx1"/>
+        </a:solidFill>
+        <a:latin typeface="+mn-lt"/>
+        <a:ea typeface="+mn-ea"/>
+        <a:cs typeface="+mn-cs"/>
+      </a:defRPr>
+    </a:lvl1pPr>
+    <a:lvl2pPr marL="457200" algn="l" defTabSz="457200" rtl="0" eaLnBrk="1" latinLnBrk="0" hangingPunct="1">
+      <a:defRPr sz="1200" kern="1200">
+        <a:solidFill>
+          <a:schemeClr val="tx1"/>
+        </a:solidFill>
+        <a:latin typeface="+mn-lt"/>
+        <a:ea typeface="+mn-ea"/>
+        <a:cs typeface="+mn-cs"/>
+      </a:defRPr>
+    </a:lvl2pPr>
+    <a:lvl3pPr marL="914400" algn="l" defTabSz="457200" rtl="0" eaLnBrk="1" latinLnBrk="0" hangingPunct="1">
+      <a:defRPr sz="1200" kern="1200">
+        <a:solidFill>
+          <a:schemeClr val="tx1"/>
+        </a:solidFill>
+        <a:latin typeface="+mn-lt"/>
+        <a:ea typeface="+mn-ea"/>
+        <a:cs typeface="+mn-cs"/>
+      </a:defRPr>
+    </a:lvl3pPr>
+    <a:lvl4pPr marL="1371600" algn="l" defTabSz="457200" rtl="0" eaLnBrk="1" latinLnBrk="0" hangingPunct="1">
+      <a:defRPr sz="1200" kern="1200">
+        <a:solidFill>
+          <a:schemeClr val="tx1"/>
+        </a:solidFill>
+        <a:latin typeface="+mn-lt"/>
+        <a:ea typeface="+mn-ea"/>
+        <a:cs typeface="+mn-cs"/>
+      </a:defRPr>
+    </a:lvl4pPr>
+    <a:lvl5pPr marL="1828800" algn="l" defTabSz="457200" rtl="0" eaLnBrk="1" latinLnBrk="0" hangingPunct="1">
+      <a:defRPr sz="1200" kern="1200">
+        <a:solidFill>
+          <a:schemeClr val="tx1"/>
+        </a:solidFill>
+        <a:latin typeface="+mn-lt"/>
+        <a:ea typeface="+mn-ea"/>
+        <a:cs typeface="+mn-cs"/>
+      </a:defRPr>
+    </a:lvl5pPr>
+    <a:lvl6pPr marL="2286000" algn="l" defTabSz="457200" rtl="0" eaLnBrk="1" latinLnBrk="0" hangingPunct="1">
+      <a:defRPr sz="1200" kern="1200">
+        <a:solidFill>
+          <a:schemeClr val="tx1"/>
+        </a:solidFill>
+        <a:latin typeface="+mn-lt"/>
+        <a:ea typeface="+mn-ea"/>
+        <a:cs typeface="+mn-cs"/>
+      </a:defRPr>
+    </a:lvl6pPr>
+    <a:lvl7pPr marL="2743200" algn="l" defTabSz="457200" rtl="0" eaLnBrk="1" latinLnBrk="0" hangingPunct="1">
+      <a:defRPr sz="1200" kern="1200">
+        <a:solidFill>
+          <a:schemeClr val="tx1"/>
+        </a:solidFill>
+        <a:latin typeface="+mn-lt"/>
+        <a:ea typeface="+mn-ea"/>
+        <a:cs typeface="+mn-cs"/>
+      </a:defRPr>
+    </a:lvl7pPr>
+    <a:lvl8pPr marL="3200400" algn="l" defTabSz="457200" rtl="0" eaLnBrk="1" latinLnBrk="0" hangingPunct="1">
+      <a:defRPr sz="1200" kern="1200">
+        <a:solidFill>
+          <a:schemeClr val="tx1"/>
+        </a:solidFill>
+        <a:latin typeface="+mn-lt"/>
+        <a:ea typeface="+mn-ea"/>
+        <a:cs typeface="+mn-cs"/>
+      </a:defRPr>
+    </a:lvl8pPr>
+    <a:lvl9pPr marL="3657600" algn="l" defTabSz="457200" rtl="0" eaLnBrk="1" latinLnBrk="0" hangingPunct="1">
+      <a:defRPr sz="1200" kern="1200">
+        <a:solidFill>
+          <a:schemeClr val="tx1"/>
+        </a:solidFill>
+        <a:latin typeface="+mn-lt"/>
+        <a:ea typeface="+mn-ea"/>
+        <a:cs typeface="+mn-cs"/>
+      </a:defRPr>
+    </a:lvl9pPr>
+  </p:notesStyle>
+</p:notesMaster>
+</file>
+
+<file path=ppt/notesSlides/notesSlide1.xml><?xml version="1.0" encoding="utf-8"?>
+<p:notes xmlns:a="http://schemas.openxmlformats.org/drawingml/2006/main" xmlns:p="http://schemas.openxmlformats.org/presentationml/2006/main" xmlns:r="http://schemas.openxmlformats.org/officeDocument/2006/relationships">
+  <p:cSld>
+    <p:spTree>
+      <p:nvGrpSpPr>
+        <p:cNvPr id="1" name=""/>
+        <p:cNvGrpSpPr/>
+        <p:nvPr/>
+      </p:nvGrpSpPr>
+      <p:grpSpPr>
+        <a:xfrm>
+          <a:off x="0" y="0"/>
+          <a:ext cx="0" cy="0"/>
+          <a:chOff x="0" y="0"/>
+          <a:chExt cx="0" cy="0"/>
+        </a:xfrm>
+      </p:grpSpPr>
+      <p:sp>
+        <p:nvSpPr>
+          <p:cNvPr id="2" name="Slide Image Placeholder 1"/>
+          <p:cNvSpPr>
+            <a:spLocks noGrp="1"/>
+          </p:cNvSpPr>
+          <p:nvPr>
+            <p:ph type="sldImg" idx="2"/>
+          </p:nvPr>
+        </p:nvSpPr>
+        <p:spPr/>
+      </p:sp>
+      <p:sp>
+        <p:nvSpPr>
+          <p:cNvPr id="3" name="Notes Placeholder 2"/>
+          <p:cNvSpPr>
+            <a:spLocks noGrp="1"/>
+          </p:cNvSpPr>
+          <p:nvPr>
+            <p:ph type="body" idx="3" sz="quarter"/>
+          </p:nvPr>
+        </p:nvSpPr>
+        <p:spPr/>
+        <p:txBody>
+          <a:bodyPr/>
+          <a:lstStyle/>
+          <a:p>
+            <a:r>
+              <a:t>26 Aug 2026 flash flood in Rasuwa. Question: where did the ground change, what is exposed, who lost road access to a hospital, using free satellite data only. Educational prototype, not an operational tool.</a:t>
+            </a:r>
+          </a:p>
+        </p:txBody>
+      </p:sp>
+      <p:sp>
+        <p:nvSpPr>
+          <p:cNvPr id="4" name="Slide Number Placeholder 3"/>
+          <p:cNvSpPr>
+            <a:spLocks noGrp="1"/>
+          </p:cNvSpPr>
+          <p:nvPr>
+            <p:ph type="sldNum" idx="5" sz="quarter"/>
+          </p:nvPr>
+        </p:nvSpPr>
+        <p:spPr/>
+      </p:sp>
+    </p:spTree>
+  </p:cSld>
+  <p:clrMapOvr>
+    <a:masterClrMapping/>
+  </p:clrMapOvr>
+</p:notes>
+</file>
+
+<file path=ppt/notesSlides/notesSlide10.xml><?xml version="1.0" encoding="utf-8"?>
+<p:notes xmlns:a="http://schemas.openxmlformats.org/drawingml/2006/main" xmlns:p="http://schemas.openxmlformats.org/presentationml/2006/main" xmlns:r="http://schemas.openxmlformats.org/officeDocument/2006/relationships">
+  <p:cSld>
+    <p:spTree>
+      <p:nvGrpSpPr>
+        <p:cNvPr id="1" name=""/>
+        <p:cNvGrpSpPr/>
+        <p:nvPr/>
+      </p:nvGrpSpPr>
+      <p:grpSpPr>
+        <a:xfrm>
+          <a:off x="0" y="0"/>
+          <a:ext cx="0" cy="0"/>
+          <a:chOff x="0" y="0"/>
+          <a:chExt cx="0" cy="0"/>
+        </a:xfrm>
+      </p:grpSpPr>
+      <p:sp>
+        <p:nvSpPr>
+          <p:cNvPr id="2" name="Slide Image Placeholder 1"/>
+          <p:cNvSpPr>
+            <a:spLocks noGrp="1"/>
+          </p:cNvSpPr>
+          <p:nvPr>
+            <p:ph type="sldImg" idx="2"/>
+          </p:nvPr>
+        </p:nvSpPr>
+        <p:spPr/>
+      </p:sp>
+      <p:sp>
+        <p:nvSpPr>
+          <p:cNvPr id="3" name="Notes Placeholder 2"/>
+          <p:cNvSpPr>
+            <a:spLocks noGrp="1"/>
+          </p:cNvSpPr>
+          <p:nvPr>
+            <p:ph type="body" idx="3" sz="quarter"/>
+          </p:nvPr>
+        </p:nvSpPr>
+        <p:spPr/>
+        <p:txBody>
+          <a:bodyPr/>
+          <a:lstStyle/>
+          <a:p>
+            <a:r>
+              <a:t>Contains modified Copernicus Sentinel data 2026. Produced using Copernicus WorldDEM-30 © DLR e.V. 2010–2014 and © Airbus Defence and Space GmbH 2014–2018 provided under COPERNICUS by the European Union and ESA; all rights reserved. © OpenStreetMap contributors. European Union, Copernicus Emergency Management Service data (EMSR927, checking only). Sen1Floods11 (Bonafilia et al. 2020, CC BY 4.0).</a:t>
+            </a:r>
+          </a:p>
+        </p:txBody>
+      </p:sp>
+      <p:sp>
+        <p:nvSpPr>
+          <p:cNvPr id="4" name="Slide Number Placeholder 3"/>
+          <p:cNvSpPr>
+            <a:spLocks noGrp="1"/>
+          </p:cNvSpPr>
+          <p:nvPr>
+            <p:ph type="sldNum" idx="5" sz="quarter"/>
+          </p:nvPr>
+        </p:nvSpPr>
+        <p:spPr/>
+      </p:sp>
+    </p:spTree>
+  </p:cSld>
+  <p:clrMapOvr>
+    <a:masterClrMapping/>
+  </p:clrMapOvr>
+</p:notes>
+</file>
+
+<file path=ppt/notesSlides/notesSlide2.xml><?xml version="1.0" encoding="utf-8"?>
+<p:notes xmlns:a="http://schemas.openxmlformats.org/drawingml/2006/main" xmlns:p="http://schemas.openxmlformats.org/presentationml/2006/main" xmlns:r="http://schemas.openxmlformats.org/officeDocument/2006/relationships">
+  <p:cSld>
+    <p:spTree>
+      <p:nvGrpSpPr>
+        <p:cNvPr id="1" name=""/>
+        <p:cNvGrpSpPr/>
+        <p:nvPr/>
+      </p:nvGrpSpPr>
+      <p:grpSpPr>
+        <a:xfrm>
+          <a:off x="0" y="0"/>
+          <a:ext cx="0" cy="0"/>
+          <a:chOff x="0" y="0"/>
+          <a:chExt cx="0" cy="0"/>
+        </a:xfrm>
+      </p:grpSpPr>
+      <p:sp>
+        <p:nvSpPr>
+          <p:cNvPr id="2" name="Slide Image Placeholder 1"/>
+          <p:cNvSpPr>
+            <a:spLocks noGrp="1"/>
+          </p:cNvSpPr>
+          <p:nvPr>
+            <p:ph type="sldImg" idx="2"/>
+          </p:nvPr>
+        </p:nvSpPr>
+        <p:spPr/>
+      </p:sp>
+      <p:sp>
+        <p:nvSpPr>
+          <p:cNvPr id="3" name="Notes Placeholder 2"/>
+          <p:cNvSpPr>
+            <a:spLocks noGrp="1"/>
+          </p:cNvSpPr>
+          <p:nvPr>
+            <p:ph type="body" idx="3" sz="quarter"/>
+          </p:nvPr>
+        </p:nvSpPr>
+        <p:spPr/>
+        <p:txBody>
+          <a:bodyPr/>
+          <a:lstStyle/>
+          <a:p>
+            <a:r>
+              <a:t>Inputs: Sentinel-1 GRD VV/VH track asc85, references 16 Aug, 4 Aug, 23 Jul, 11 Jul; post 28 Aug. Copernicus GLO-30 DEM for the HAND valley floor and layover/shadow mask. Planetary Computer RTC route is a cross-check only.</a:t>
+            </a:r>
+          </a:p>
+        </p:txBody>
+      </p:sp>
+      <p:sp>
+        <p:nvSpPr>
+          <p:cNvPr id="4" name="Slide Number Placeholder 3"/>
+          <p:cNvSpPr>
+            <a:spLocks noGrp="1"/>
+          </p:cNvSpPr>
+          <p:nvPr>
+            <p:ph type="sldNum" idx="5" sz="quarter"/>
+          </p:nvPr>
+        </p:nvSpPr>
+        <p:spPr/>
+      </p:sp>
+    </p:spTree>
+  </p:cSld>
+  <p:clrMapOvr>
+    <a:masterClrMapping/>
+  </p:clrMapOvr>
+</p:notes>
+</file>
+
+<file path=ppt/notesSlides/notesSlide3.xml><?xml version="1.0" encoding="utf-8"?>
+<p:notes xmlns:a="http://schemas.openxmlformats.org/drawingml/2006/main" xmlns:p="http://schemas.openxmlformats.org/presentationml/2006/main" xmlns:r="http://schemas.openxmlformats.org/officeDocument/2006/relationships">
+  <p:cSld>
+    <p:spTree>
+      <p:nvGrpSpPr>
+        <p:cNvPr id="1" name=""/>
+        <p:cNvGrpSpPr/>
+        <p:nvPr/>
+      </p:nvGrpSpPr>
+      <p:grpSpPr>
+        <a:xfrm>
+          <a:off x="0" y="0"/>
+          <a:ext cx="0" cy="0"/>
+          <a:chOff x="0" y="0"/>
+          <a:chExt cx="0" cy="0"/>
+        </a:xfrm>
+      </p:grpSpPr>
+      <p:sp>
+        <p:nvSpPr>
+          <p:cNvPr id="2" name="Slide Image Placeholder 1"/>
+          <p:cNvSpPr>
+            <a:spLocks noGrp="1"/>
+          </p:cNvSpPr>
+          <p:nvPr>
+            <p:ph type="sldImg" idx="2"/>
+          </p:nvPr>
+        </p:nvSpPr>
+        <p:spPr/>
+      </p:sp>
+      <p:sp>
+        <p:nvSpPr>
+          <p:cNvPr id="3" name="Notes Placeholder 2"/>
+          <p:cNvSpPr>
+            <a:spLocks noGrp="1"/>
+          </p:cNvSpPr>
+          <p:nvPr>
+            <p:ph type="body" idx="3" sz="quarter"/>
+          </p:nvPr>
+        </p:nvSpPr>
+        <p:spPr/>
+        <p:txBody>
+          <a:bodyPr/>
+          <a:lstStyle/>
+          <a:p>
+            <a:r>
+              <a:t>Surface change on the valley floor, not a validated flood extent. Minimum detectable area for the case study is 0.211 km². Source: docs/REPORT.md section 2.</a:t>
+            </a:r>
+          </a:p>
+        </p:txBody>
+      </p:sp>
+      <p:sp>
+        <p:nvSpPr>
+          <p:cNvPr id="4" name="Slide Number Placeholder 3"/>
+          <p:cNvSpPr>
+            <a:spLocks noGrp="1"/>
+          </p:cNvSpPr>
+          <p:nvPr>
+            <p:ph type="sldNum" idx="5" sz="quarter"/>
+          </p:nvPr>
+        </p:nvSpPr>
+        <p:spPr/>
+      </p:sp>
+    </p:spTree>
+  </p:cSld>
+  <p:clrMapOvr>
+    <a:masterClrMapping/>
+  </p:clrMapOvr>
+</p:notes>
+</file>
+
+<file path=ppt/notesSlides/notesSlide4.xml><?xml version="1.0" encoding="utf-8"?>
+<p:notes xmlns:a="http://schemas.openxmlformats.org/drawingml/2006/main" xmlns:p="http://schemas.openxmlformats.org/presentationml/2006/main" xmlns:r="http://schemas.openxmlformats.org/officeDocument/2006/relationships">
+  <p:cSld>
+    <p:spTree>
+      <p:nvGrpSpPr>
+        <p:cNvPr id="1" name=""/>
+        <p:cNvGrpSpPr/>
+        <p:nvPr/>
+      </p:nvGrpSpPr>
+      <p:grpSpPr>
+        <a:xfrm>
+          <a:off x="0" y="0"/>
+          <a:ext cx="0" cy="0"/>
+          <a:chOff x="0" y="0"/>
+          <a:chExt cx="0" cy="0"/>
+        </a:xfrm>
+      </p:grpSpPr>
+      <p:sp>
+        <p:nvSpPr>
+          <p:cNvPr id="2" name="Slide Image Placeholder 1"/>
+          <p:cNvSpPr>
+            <a:spLocks noGrp="1"/>
+          </p:cNvSpPr>
+          <p:nvPr>
+            <p:ph type="sldImg" idx="2"/>
+          </p:nvPr>
+        </p:nvSpPr>
+        <p:spPr/>
+      </p:sp>
+      <p:sp>
+        <p:nvSpPr>
+          <p:cNvPr id="3" name="Notes Placeholder 2"/>
+          <p:cNvSpPr>
+            <a:spLocks noGrp="1"/>
+          </p:cNvSpPr>
+          <p:nvPr>
+            <p:ph type="body" idx="3" sz="quarter"/>
+          </p:nvPr>
+        </p:nvSpPr>
+        <p:spPr/>
+        <p:txBody>
+          <a:bodyPr/>
+          <a:lstStyle/>
+          <a:p>
+            <a:r>
+              <a:t>Class-level nulls, ungated, leave-one-out: water-like 0.306 vs 0.014 km²; dark 2.294 vs 0.040; bright 0.542 vs 0.092.</a:t>
+            </a:r>
+          </a:p>
+        </p:txBody>
+      </p:sp>
+      <p:sp>
+        <p:nvSpPr>
+          <p:cNvPr id="4" name="Slide Number Placeholder 3"/>
+          <p:cNvSpPr>
+            <a:spLocks noGrp="1"/>
+          </p:cNvSpPr>
+          <p:nvPr>
+            <p:ph type="sldNum" idx="5" sz="quarter"/>
+          </p:nvPr>
+        </p:nvSpPr>
+        <p:spPr/>
+      </p:sp>
+    </p:spTree>
+  </p:cSld>
+  <p:clrMapOvr>
+    <a:masterClrMapping/>
+  </p:clrMapOvr>
+</p:notes>
+</file>
+
+<file path=ppt/notesSlides/notesSlide5.xml><?xml version="1.0" encoding="utf-8"?>
+<p:notes xmlns:a="http://schemas.openxmlformats.org/drawingml/2006/main" xmlns:p="http://schemas.openxmlformats.org/presentationml/2006/main" xmlns:r="http://schemas.openxmlformats.org/officeDocument/2006/relationships">
+  <p:cSld>
+    <p:spTree>
+      <p:nvGrpSpPr>
+        <p:cNvPr id="1" name=""/>
+        <p:cNvGrpSpPr/>
+        <p:nvPr/>
+      </p:nvGrpSpPr>
+      <p:grpSpPr>
+        <a:xfrm>
+          <a:off x="0" y="0"/>
+          <a:ext cx="0" cy="0"/>
+          <a:chOff x="0" y="0"/>
+          <a:chExt cx="0" cy="0"/>
+        </a:xfrm>
+      </p:grpSpPr>
+      <p:sp>
+        <p:nvSpPr>
+          <p:cNvPr id="2" name="Slide Image Placeholder 1"/>
+          <p:cNvSpPr>
+            <a:spLocks noGrp="1"/>
+          </p:cNvSpPr>
+          <p:nvPr>
+            <p:ph type="sldImg" idx="2"/>
+          </p:nvPr>
+        </p:nvSpPr>
+        <p:spPr/>
+      </p:sp>
+      <p:sp>
+        <p:nvSpPr>
+          <p:cNvPr id="3" name="Notes Placeholder 2"/>
+          <p:cNvSpPr>
+            <a:spLocks noGrp="1"/>
+          </p:cNvSpPr>
+          <p:nvPr>
+            <p:ph type="body" idx="3" sz="quarter"/>
+          </p:nvPr>
+        </p:nvSpPr>
+        <p:spPr/>
+        <p:txBody>
+          <a:bodyPr/>
+          <a:lstStyle/>
+          <a:p>
+            <a:r>
+              <a:t>Show the negative-control run in the terminal here. Zero-safe behaviour matters because judges pick their own areas and dates.</a:t>
+            </a:r>
+          </a:p>
+        </p:txBody>
+      </p:sp>
+      <p:sp>
+        <p:nvSpPr>
+          <p:cNvPr id="4" name="Slide Number Placeholder 3"/>
+          <p:cNvSpPr>
+            <a:spLocks noGrp="1"/>
+          </p:cNvSpPr>
+          <p:nvPr>
+            <p:ph type="sldNum" idx="5" sz="quarter"/>
+          </p:nvPr>
+        </p:nvSpPr>
+        <p:spPr/>
+      </p:sp>
+    </p:spTree>
+  </p:cSld>
+  <p:clrMapOvr>
+    <a:masterClrMapping/>
+  </p:clrMapOvr>
+</p:notes>
+</file>
+
+<file path=ppt/notesSlides/notesSlide6.xml><?xml version="1.0" encoding="utf-8"?>
+<p:notes xmlns:a="http://schemas.openxmlformats.org/drawingml/2006/main" xmlns:p="http://schemas.openxmlformats.org/presentationml/2006/main" xmlns:r="http://schemas.openxmlformats.org/officeDocument/2006/relationships">
+  <p:cSld>
+    <p:spTree>
+      <p:nvGrpSpPr>
+        <p:cNvPr id="1" name=""/>
+        <p:cNvGrpSpPr/>
+        <p:nvPr/>
+      </p:nvGrpSpPr>
+      <p:grpSpPr>
+        <a:xfrm>
+          <a:off x="0" y="0"/>
+          <a:ext cx="0" cy="0"/>
+          <a:chOff x="0" y="0"/>
+          <a:chExt cx="0" cy="0"/>
+        </a:xfrm>
+      </p:grpSpPr>
+      <p:sp>
+        <p:nvSpPr>
+          <p:cNvPr id="2" name="Slide Image Placeholder 1"/>
+          <p:cNvSpPr>
+            <a:spLocks noGrp="1"/>
+          </p:cNvSpPr>
+          <p:nvPr>
+            <p:ph type="sldImg" idx="2"/>
+          </p:nvPr>
+        </p:nvSpPr>
+        <p:spPr/>
+      </p:sp>
+      <p:sp>
+        <p:nvSpPr>
+          <p:cNvPr id="3" name="Notes Placeholder 2"/>
+          <p:cNvSpPr>
+            <a:spLocks noGrp="1"/>
+          </p:cNvSpPr>
+          <p:nvPr>
+            <p:ph type="body" idx="3" sz="quarter"/>
+          </p:nvPr>
+        </p:nvSpPr>
+        <p:spPr/>
+        <p:txBody>
+          <a:bodyPr/>
+          <a:lstStyle/>
+          <a:p>
+            <a:r>
+              <a:t>446 settlements in total; 141 had no pre-flood road route to a hospital so they are not assessed and never counted as cut off. 18 of 20 hospitals snap to the road network. No cut-off ground truth exists.</a:t>
+            </a:r>
+          </a:p>
+        </p:txBody>
+      </p:sp>
+      <p:sp>
+        <p:nvSpPr>
+          <p:cNvPr id="4" name="Slide Number Placeholder 3"/>
+          <p:cNvSpPr>
+            <a:spLocks noGrp="1"/>
+          </p:cNvSpPr>
+          <p:nvPr>
+            <p:ph type="sldNum" idx="5" sz="quarter"/>
+          </p:nvPr>
+        </p:nvSpPr>
+        <p:spPr/>
+      </p:sp>
+    </p:spTree>
+  </p:cSld>
+  <p:clrMapOvr>
+    <a:masterClrMapping/>
+  </p:clrMapOvr>
+</p:notes>
+</file>
+
+<file path=ppt/notesSlides/notesSlide7.xml><?xml version="1.0" encoding="utf-8"?>
+<p:notes xmlns:a="http://schemas.openxmlformats.org/drawingml/2006/main" xmlns:p="http://schemas.openxmlformats.org/presentationml/2006/main" xmlns:r="http://schemas.openxmlformats.org/officeDocument/2006/relationships">
+  <p:cSld>
+    <p:spTree>
+      <p:nvGrpSpPr>
+        <p:cNvPr id="1" name=""/>
+        <p:cNvGrpSpPr/>
+        <p:nvPr/>
+      </p:nvGrpSpPr>
+      <p:grpSpPr>
+        <a:xfrm>
+          <a:off x="0" y="0"/>
+          <a:ext cx="0" cy="0"/>
+          <a:chOff x="0" y="0"/>
+          <a:chExt cx="0" cy="0"/>
+        </a:xfrm>
+      </p:grpSpPr>
+      <p:sp>
+        <p:nvSpPr>
+          <p:cNvPr id="2" name="Slide Image Placeholder 1"/>
+          <p:cNvSpPr>
+            <a:spLocks noGrp="1"/>
+          </p:cNvSpPr>
+          <p:nvPr>
+            <p:ph type="sldImg" idx="2"/>
+          </p:nvPr>
+        </p:nvSpPr>
+        <p:spPr/>
+      </p:sp>
+      <p:sp>
+        <p:nvSpPr>
+          <p:cNvPr id="3" name="Notes Placeholder 2"/>
+          <p:cNvSpPr>
+            <a:spLocks noGrp="1"/>
+          </p:cNvSpPr>
+          <p:nvPr>
+            <p:ph type="body" idx="3" sz="quarter"/>
+          </p:nvPr>
+        </p:nvSpPr>
+        <p:spPr/>
+        <p:txBody>
+          <a:bodyPr/>
+          <a:lstStyle/>
+          <a:p>
+            <a:r>
+              <a:t>Every number in the dashboard is read from the JSON outputs; ranges come from thresholds, mask +/-1 px and the bridge policy.</a:t>
+            </a:r>
+          </a:p>
+        </p:txBody>
+      </p:sp>
+      <p:sp>
+        <p:nvSpPr>
+          <p:cNvPr id="4" name="Slide Number Placeholder 3"/>
+          <p:cNvSpPr>
+            <a:spLocks noGrp="1"/>
+          </p:cNvSpPr>
+          <p:nvPr>
+            <p:ph type="sldNum" idx="5" sz="quarter"/>
+          </p:nvPr>
+        </p:nvSpPr>
+        <p:spPr/>
+      </p:sp>
+    </p:spTree>
+  </p:cSld>
+  <p:clrMapOvr>
+    <a:masterClrMapping/>
+  </p:clrMapOvr>
+</p:notes>
+</file>
+
+<file path=ppt/notesSlides/notesSlide8.xml><?xml version="1.0" encoding="utf-8"?>
+<p:notes xmlns:a="http://schemas.openxmlformats.org/drawingml/2006/main" xmlns:p="http://schemas.openxmlformats.org/presentationml/2006/main" xmlns:r="http://schemas.openxmlformats.org/officeDocument/2006/relationships">
+  <p:cSld>
+    <p:spTree>
+      <p:nvGrpSpPr>
+        <p:cNvPr id="1" name=""/>
+        <p:cNvGrpSpPr/>
+        <p:nvPr/>
+      </p:nvGrpSpPr>
+      <p:grpSpPr>
+        <a:xfrm>
+          <a:off x="0" y="0"/>
+          <a:ext cx="0" cy="0"/>
+          <a:chOff x="0" y="0"/>
+          <a:chExt cx="0" cy="0"/>
+        </a:xfrm>
+      </p:grpSpPr>
+      <p:sp>
+        <p:nvSpPr>
+          <p:cNvPr id="2" name="Slide Image Placeholder 1"/>
+          <p:cNvSpPr>
+            <a:spLocks noGrp="1"/>
+          </p:cNvSpPr>
+          <p:nvPr>
+            <p:ph type="sldImg" idx="2"/>
+          </p:nvPr>
+        </p:nvSpPr>
+        <p:spPr/>
+      </p:sp>
+      <p:sp>
+        <p:nvSpPr>
+          <p:cNvPr id="3" name="Notes Placeholder 2"/>
+          <p:cNvSpPr>
+            <a:spLocks noGrp="1"/>
+          </p:cNvSpPr>
+          <p:nvPr>
+            <p:ph type="body" idx="3" sz="quarter"/>
+          </p:nvPr>
+        </p:nvSpPr>
+        <p:spPr/>
+        <p:txBody>
+          <a:bodyPr/>
+          <a:lstStyle/>
+          <a:p>
+            <a:r>
+              <a:t>EMS is check-only. EMSR927 has landslide polygons and damage points but no flood-extent layer, so the flood class itself is not validated. Chance = the mask's own blobs relocated at random; CI from 1 km block bootstrap.</a:t>
+            </a:r>
+          </a:p>
+        </p:txBody>
+      </p:sp>
+      <p:sp>
+        <p:nvSpPr>
+          <p:cNvPr id="4" name="Slide Number Placeholder 3"/>
+          <p:cNvSpPr>
+            <a:spLocks noGrp="1"/>
+          </p:cNvSpPr>
+          <p:nvPr>
+            <p:ph type="sldNum" idx="5" sz="quarter"/>
+          </p:nvPr>
+        </p:nvSpPr>
+        <p:spPr/>
+      </p:sp>
+    </p:spTree>
+  </p:cSld>
+  <p:clrMapOvr>
+    <a:masterClrMapping/>
+  </p:clrMapOvr>
+</p:notes>
+</file>
+
+<file path=ppt/notesSlides/notesSlide9.xml><?xml version="1.0" encoding="utf-8"?>
+<p:notes xmlns:a="http://schemas.openxmlformats.org/drawingml/2006/main" xmlns:p="http://schemas.openxmlformats.org/presentationml/2006/main" xmlns:r="http://schemas.openxmlformats.org/officeDocument/2006/relationships">
+  <p:cSld>
+    <p:spTree>
+      <p:nvGrpSpPr>
+        <p:cNvPr id="1" name=""/>
+        <p:cNvGrpSpPr/>
+        <p:nvPr/>
+      </p:nvGrpSpPr>
+      <p:grpSpPr>
+        <a:xfrm>
+          <a:off x="0" y="0"/>
+          <a:ext cx="0" cy="0"/>
+          <a:chOff x="0" y="0"/>
+          <a:chExt cx="0" cy="0"/>
+        </a:xfrm>
+      </p:grpSpPr>
+      <p:sp>
+        <p:nvSpPr>
+          <p:cNvPr id="2" name="Slide Image Placeholder 1"/>
+          <p:cNvSpPr>
+            <a:spLocks noGrp="1"/>
+          </p:cNvSpPr>
+          <p:nvPr>
+            <p:ph type="sldImg" idx="2"/>
+          </p:nvPr>
+        </p:nvSpPr>
+        <p:spPr/>
+      </p:sp>
+      <p:sp>
+        <p:nvSpPr>
+          <p:cNvPr id="3" name="Notes Placeholder 2"/>
+          <p:cNvSpPr>
+            <a:spLocks noGrp="1"/>
+          </p:cNvSpPr>
+          <p:nvPr>
+            <p:ph type="body" idx="3" sz="quarter"/>
+          </p:nvPr>
+        </p:nvSpPr>
+        <p:spPr/>
+        <p:txBody>
+          <a:bodyPr/>
+          <a:lstStyle/>
+          <a:p>
+            <a:r>
+              <a:t>Also: 92% of OSM buildings are outside the observed valley floor and are UNKNOWN, not clear. Rural Rasuwa is under-mapped in OSM.</a:t>
+            </a:r>
+          </a:p>
+        </p:txBody>
+      </p:sp>
+      <p:sp>
+        <p:nvSpPr>
+          <p:cNvPr id="4" name="Slide Number Placeholder 3"/>
+          <p:cNvSpPr>
+            <a:spLocks noGrp="1"/>
+          </p:cNvSpPr>
+          <p:nvPr>
+            <p:ph type="sldNum" idx="5" sz="quarter"/>
+          </p:nvPr>
+        </p:nvSpPr>
+        <p:spPr/>
+      </p:sp>
+    </p:spTree>
+  </p:cSld>
+  <p:clrMapOvr>
+    <a:masterClrMapping/>
+  </p:clrMapOvr>
+</p:notes>
 </file>
 
 <file path=ppt/slideLayouts/slideLayout1.xml><?xml version="1.0" encoding="utf-8"?>
@@ -3089,6 +4160,14 @@
 <file path=ppt/slides/slide1.xml><?xml version="1.0" encoding="utf-8"?>
 <p:sld xmlns:a="http://schemas.openxmlformats.org/drawingml/2006/main" xmlns:p="http://schemas.openxmlformats.org/presentationml/2006/main" xmlns:r="http://schemas.openxmlformats.org/officeDocument/2006/relationships">
   <p:cSld>
+    <p:bg>
+      <p:bgPr>
+        <a:solidFill>
+          <a:srgbClr val="0C1620"/>
+        </a:solidFill>
+        <a:effectLst/>
+      </p:bgPr>
+    </p:bg>
     <p:spTree>
       <p:nvGrpSpPr>
         <p:cNvPr id="1" name=""/>
@@ -3098,61 +4177,3230 @@
       <p:grpSpPr/>
       <p:sp>
         <p:nvSpPr>
-          <p:cNvPr id="2" name="Title 1"/>
-          <p:cNvSpPr>
-            <a:spLocks noGrp="1"/>
-          </p:cNvSpPr>
-          <p:nvPr>
-            <p:ph type="title"/>
-          </p:nvPr>
-        </p:nvSpPr>
-        <p:spPr/>
-        <p:txBody>
-          <a:bodyPr/>
-          <a:lstStyle/>
-          <a:p>
-            <a:r>
-              <a:t>Trishuli / Bhote Koshi flood, 2026-08-26: Sentinel-1 analysis</a:t>
-            </a:r>
-          </a:p>
-        </p:txBody>
-      </p:sp>
-      <p:sp>
-        <p:nvSpPr>
-          <p:cNvPr id="3" name="Content Placeholder 2"/>
-          <p:cNvSpPr>
-            <a:spLocks noGrp="1"/>
-          </p:cNvSpPr>
-          <p:nvPr>
-            <p:ph idx="1"/>
-          </p:nvPr>
-        </p:nvSpPr>
-        <p:spPr/>
-        <p:txBody>
-          <a:bodyPr/>
-          <a:lstStyle/>
-          <a:p>
-            <a:pPr>
-              <a:defRPr sz="2200"/>
-            </a:pPr>
-            <a:r>
-              <a:t>Calibrated SAR change detection and OpenStreetMap exposure</a:t>
-            </a:r>
-          </a:p>
-          <a:p>
-            <a:pPr>
-              <a:defRPr sz="2200"/>
-            </a:pPr>
-            <a:r>
-              <a:t>Educational prototype, not an operational tool</a:t>
-            </a:r>
-          </a:p>
-          <a:p>
-            <a:pPr>
-              <a:defRPr sz="2200"/>
-            </a:pPr>
-            <a:r>
-              <a:t>2026-10-11</a:t>
+          <p:cNvPr id="2" name="TextBox 1"/>
+          <p:cNvSpPr txBox="1"/>
+          <p:nvPr/>
+        </p:nvSpPr>
+        <p:spPr>
+          <a:xfrm>
+            <a:off x="10253472" y="342351"/>
+            <a:ext cx="1280160" cy="187924"/>
+          </a:xfrm>
+          <a:prstGeom prst="rect">
+            <a:avLst/>
+          </a:prstGeom>
+          <a:noFill/>
+        </p:spPr>
+        <p:txBody>
+          <a:bodyPr wrap="square" anchor="t" lIns="0" rIns="0" tIns="0" bIns="0">
+            <a:normAutofit/>
+          </a:bodyPr>
+          <a:lstStyle/>
+          <a:p>
+            <a:pPr algn="r">
+              <a:lnSpc>
+                <a:spcPct val="97445"/>
+              </a:lnSpc>
+            </a:pPr>
+            <a:r>
+              <a:rPr sz="1100" b="0" spc="70">
+                <a:solidFill>
+                  <a:srgbClr val="8DA0AE"/>
+                </a:solidFill>
+                <a:latin typeface="Inter SemiBold"/>
+                <a:cs typeface="Inter SemiBold"/>
+                <a:sym typeface="Inter SemiBold"/>
+              </a:rPr>
+              <a:t>01 / 13</a:t>
+            </a:r>
+          </a:p>
+        </p:txBody>
+      </p:sp>
+      <p:sp>
+        <p:nvSpPr>
+          <p:cNvPr id="3" name="TextBox 2"/>
+          <p:cNvSpPr txBox="1"/>
+          <p:nvPr/>
+        </p:nvSpPr>
+        <p:spPr>
+          <a:xfrm>
+            <a:off x="658368" y="1544970"/>
+            <a:ext cx="9352727" cy="209929"/>
+          </a:xfrm>
+          <a:prstGeom prst="rect">
+            <a:avLst/>
+          </a:prstGeom>
+          <a:noFill/>
+        </p:spPr>
+        <p:txBody>
+          <a:bodyPr wrap="square" anchor="t" lIns="0" rIns="0" tIns="0" bIns="0">
+            <a:normAutofit/>
+          </a:bodyPr>
+          <a:lstStyle/>
+          <a:p>
+            <a:pPr algn="l">
+              <a:lnSpc>
+                <a:spcPct val="97445"/>
+              </a:lnSpc>
+            </a:pPr>
+            <a:r>
+              <a:rPr sz="1100" b="0" spc="70">
+                <a:solidFill>
+                  <a:srgbClr val="4BC7D6"/>
+                </a:solidFill>
+                <a:latin typeface="Inter SemiBold"/>
+                <a:cs typeface="Inter SemiBold"/>
+                <a:sym typeface="Inter SemiBold"/>
+              </a:rPr>
+              <a:t>TRISHULI-FLOOD-MAPPING</a:t>
+            </a:r>
+          </a:p>
+        </p:txBody>
+      </p:sp>
+      <p:sp>
+        <p:nvSpPr>
+          <p:cNvPr id="4" name="TextBox 3"/>
+          <p:cNvSpPr txBox="1"/>
+          <p:nvPr/>
+        </p:nvSpPr>
+        <p:spPr>
+          <a:xfrm>
+            <a:off x="658368" y="1774838"/>
+            <a:ext cx="9352727" cy="2945849"/>
+          </a:xfrm>
+          <a:prstGeom prst="rect">
+            <a:avLst/>
+          </a:prstGeom>
+          <a:noFill/>
+        </p:spPr>
+        <p:txBody>
+          <a:bodyPr wrap="square" anchor="t" lIns="0" rIns="0" tIns="0" bIns="0">
+            <a:normAutofit/>
+          </a:bodyPr>
+          <a:lstStyle/>
+          <a:p>
+            <a:pPr algn="l">
+              <a:lnSpc>
+                <a:spcPct val="88496"/>
+              </a:lnSpc>
+            </a:pPr>
+            <a:r>
+              <a:rPr sz="5984" b="0">
+                <a:solidFill>
+                  <a:srgbClr val="DCE6EE"/>
+                </a:solidFill>
+                <a:latin typeface="Space Grotesk Bold"/>
+                <a:cs typeface="Space Grotesk Bold"/>
+                <a:sym typeface="Space Grotesk Bold"/>
+              </a:rPr>
+              <a:t>Free radar shows where the Trishuli valley floor changed</a:t>
+            </a:r>
+          </a:p>
+        </p:txBody>
+      </p:sp>
+      <p:sp>
+        <p:nvSpPr>
+          <p:cNvPr id="5" name="TextBox 4"/>
+          <p:cNvSpPr txBox="1"/>
+          <p:nvPr/>
+        </p:nvSpPr>
+        <p:spPr>
+          <a:xfrm>
+            <a:off x="658368" y="4578372"/>
+            <a:ext cx="9352727" cy="388010"/>
+          </a:xfrm>
+          <a:prstGeom prst="rect">
+            <a:avLst/>
+          </a:prstGeom>
+          <a:noFill/>
+        </p:spPr>
+        <p:txBody>
+          <a:bodyPr wrap="square" anchor="t" lIns="0" rIns="0" tIns="0" bIns="0">
+            <a:normAutofit/>
+          </a:bodyPr>
+          <a:lstStyle/>
+          <a:p>
+            <a:pPr algn="l">
+              <a:lnSpc>
+                <a:spcPct val="104905"/>
+              </a:lnSpc>
+            </a:pPr>
+            <a:r>
+              <a:rPr sz="1900" b="0">
+                <a:solidFill>
+                  <a:srgbClr val="8DA0AE"/>
+                </a:solidFill>
+                <a:latin typeface="Space Grotesk"/>
+                <a:cs typeface="Space Grotesk"/>
+                <a:sym typeface="Space Grotesk"/>
+              </a:rPr>
+              <a:t>Raw Sentinel-1 to exposure and hospital access in Rasuwa</a:t>
+            </a:r>
+          </a:p>
+        </p:txBody>
+      </p:sp>
+      <p:sp>
+        <p:nvSpPr>
+          <p:cNvPr id="6" name="TextBox 5"/>
+          <p:cNvSpPr txBox="1"/>
+          <p:nvPr/>
+        </p:nvSpPr>
+        <p:spPr>
+          <a:xfrm>
+            <a:off x="658368" y="5239512"/>
+            <a:ext cx="3320288" cy="209929"/>
+          </a:xfrm>
+          <a:prstGeom prst="rect">
+            <a:avLst/>
+          </a:prstGeom>
+          <a:noFill/>
+        </p:spPr>
+        <p:txBody>
+          <a:bodyPr wrap="square" anchor="t" lIns="0" rIns="0" tIns="0" bIns="0">
+            <a:normAutofit/>
+          </a:bodyPr>
+          <a:lstStyle/>
+          <a:p>
+            <a:pPr algn="l">
+              <a:lnSpc>
+                <a:spcPct val="97445"/>
+              </a:lnSpc>
+            </a:pPr>
+            <a:r>
+              <a:rPr sz="1100" b="0" spc="70">
+                <a:solidFill>
+                  <a:srgbClr val="4BC7D6"/>
+                </a:solidFill>
+                <a:latin typeface="Inter SemiBold"/>
+                <a:cs typeface="Inter SemiBold"/>
+                <a:sym typeface="Inter SemiBold"/>
+              </a:rPr>
+              <a:t>EVENT</a:t>
+            </a:r>
+          </a:p>
+        </p:txBody>
+      </p:sp>
+      <p:sp>
+        <p:nvSpPr>
+          <p:cNvPr id="7" name="TextBox 6"/>
+          <p:cNvSpPr txBox="1"/>
+          <p:nvPr/>
+        </p:nvSpPr>
+        <p:spPr>
+          <a:xfrm>
+            <a:off x="658368" y="5469380"/>
+            <a:ext cx="3320288" cy="333573"/>
+          </a:xfrm>
+          <a:prstGeom prst="rect">
+            <a:avLst/>
+          </a:prstGeom>
+          <a:noFill/>
+        </p:spPr>
+        <p:txBody>
+          <a:bodyPr wrap="square" anchor="t" lIns="0" rIns="0" tIns="0" bIns="0">
+            <a:normAutofit/>
+          </a:bodyPr>
+          <a:lstStyle/>
+          <a:p>
+            <a:pPr algn="l">
+              <a:lnSpc>
+                <a:spcPct val="112734"/>
+              </a:lnSpc>
+            </a:pPr>
+            <a:r>
+              <a:rPr sz="1500" b="0">
+                <a:solidFill>
+                  <a:srgbClr val="8DA0AE"/>
+                </a:solidFill>
+                <a:latin typeface="Space Grotesk"/>
+                <a:cs typeface="Space Grotesk"/>
+                <a:sym typeface="Space Grotesk"/>
+              </a:rPr>
+              <a:t>26 Aug 2026</a:t>
+            </a:r>
+          </a:p>
+        </p:txBody>
+      </p:sp>
+      <p:sp>
+        <p:nvSpPr>
+          <p:cNvPr id="8" name="TextBox 7"/>
+          <p:cNvSpPr txBox="1"/>
+          <p:nvPr/>
+        </p:nvSpPr>
+        <p:spPr>
+          <a:xfrm>
+            <a:off x="4435856" y="5239512"/>
+            <a:ext cx="3320288" cy="209929"/>
+          </a:xfrm>
+          <a:prstGeom prst="rect">
+            <a:avLst/>
+          </a:prstGeom>
+          <a:noFill/>
+        </p:spPr>
+        <p:txBody>
+          <a:bodyPr wrap="square" anchor="t" lIns="0" rIns="0" tIns="0" bIns="0">
+            <a:normAutofit/>
+          </a:bodyPr>
+          <a:lstStyle/>
+          <a:p>
+            <a:pPr algn="l">
+              <a:lnSpc>
+                <a:spcPct val="97445"/>
+              </a:lnSpc>
+            </a:pPr>
+            <a:r>
+              <a:rPr sz="1100" b="0" spc="70">
+                <a:solidFill>
+                  <a:srgbClr val="4BC7D6"/>
+                </a:solidFill>
+                <a:latin typeface="Inter SemiBold"/>
+                <a:cs typeface="Inter SemiBold"/>
+                <a:sym typeface="Inter SemiBold"/>
+              </a:rPr>
+              <a:t>AREA</a:t>
+            </a:r>
+          </a:p>
+        </p:txBody>
+      </p:sp>
+      <p:sp>
+        <p:nvSpPr>
+          <p:cNvPr id="9" name="TextBox 8"/>
+          <p:cNvSpPr txBox="1"/>
+          <p:nvPr/>
+        </p:nvSpPr>
+        <p:spPr>
+          <a:xfrm>
+            <a:off x="4435856" y="5469380"/>
+            <a:ext cx="3320288" cy="647642"/>
+          </a:xfrm>
+          <a:prstGeom prst="rect">
+            <a:avLst/>
+          </a:prstGeom>
+          <a:noFill/>
+        </p:spPr>
+        <p:txBody>
+          <a:bodyPr wrap="square" anchor="t" lIns="0" rIns="0" tIns="0" bIns="0">
+            <a:normAutofit/>
+          </a:bodyPr>
+          <a:lstStyle/>
+          <a:p>
+            <a:pPr algn="l">
+              <a:lnSpc>
+                <a:spcPct val="112734"/>
+              </a:lnSpc>
+            </a:pPr>
+            <a:r>
+              <a:rPr sz="1500" b="0">
+                <a:solidFill>
+                  <a:srgbClr val="8DA0AE"/>
+                </a:solidFill>
+                <a:latin typeface="Space Grotesk"/>
+                <a:cs typeface="Space Grotesk"/>
+                <a:sym typeface="Space Grotesk"/>
+              </a:rPr>
+              <a:t>Trishuli / Bhote Koshi, Nepal</a:t>
+            </a:r>
+          </a:p>
+        </p:txBody>
+      </p:sp>
+      <p:sp>
+        <p:nvSpPr>
+          <p:cNvPr id="10" name="TextBox 9"/>
+          <p:cNvSpPr txBox="1"/>
+          <p:nvPr/>
+        </p:nvSpPr>
+        <p:spPr>
+          <a:xfrm>
+            <a:off x="8213344" y="5239512"/>
+            <a:ext cx="3320288" cy="209929"/>
+          </a:xfrm>
+          <a:prstGeom prst="rect">
+            <a:avLst/>
+          </a:prstGeom>
+          <a:noFill/>
+        </p:spPr>
+        <p:txBody>
+          <a:bodyPr wrap="square" anchor="t" lIns="0" rIns="0" tIns="0" bIns="0">
+            <a:normAutofit/>
+          </a:bodyPr>
+          <a:lstStyle/>
+          <a:p>
+            <a:pPr algn="l">
+              <a:lnSpc>
+                <a:spcPct val="97445"/>
+              </a:lnSpc>
+            </a:pPr>
+            <a:r>
+              <a:rPr sz="1100" b="0" spc="70">
+                <a:solidFill>
+                  <a:srgbClr val="4BC7D6"/>
+                </a:solidFill>
+                <a:latin typeface="Inter SemiBold"/>
+                <a:cs typeface="Inter SemiBold"/>
+                <a:sym typeface="Inter SemiBold"/>
+              </a:rPr>
+              <a:t>ROUTE</a:t>
+            </a:r>
+          </a:p>
+        </p:txBody>
+      </p:sp>
+      <p:sp>
+        <p:nvSpPr>
+          <p:cNvPr id="11" name="TextBox 10"/>
+          <p:cNvSpPr txBox="1"/>
+          <p:nvPr/>
+        </p:nvSpPr>
+        <p:spPr>
+          <a:xfrm>
+            <a:off x="8213344" y="5469380"/>
+            <a:ext cx="3320288" cy="333573"/>
+          </a:xfrm>
+          <a:prstGeom prst="rect">
+            <a:avLst/>
+          </a:prstGeom>
+          <a:noFill/>
+        </p:spPr>
+        <p:txBody>
+          <a:bodyPr wrap="square" anchor="t" lIns="0" rIns="0" tIns="0" bIns="0">
+            <a:normAutofit/>
+          </a:bodyPr>
+          <a:lstStyle/>
+          <a:p>
+            <a:pPr algn="l">
+              <a:lnSpc>
+                <a:spcPct val="112734"/>
+              </a:lnSpc>
+            </a:pPr>
+            <a:r>
+              <a:rPr sz="1500" b="0">
+                <a:solidFill>
+                  <a:srgbClr val="8DA0AE"/>
+                </a:solidFill>
+                <a:latin typeface="Space Grotesk"/>
+                <a:cs typeface="Space Grotesk"/>
+                <a:sym typeface="Space Grotesk"/>
+              </a:rPr>
+              <a:t>SNAP from raw GRD</a:t>
+            </a:r>
+          </a:p>
+        </p:txBody>
+      </p:sp>
+      <p:sp>
+        <p:nvSpPr>
+          <p:cNvPr id="12" name="TextBox 11"/>
+          <p:cNvSpPr txBox="1"/>
+          <p:nvPr/>
+        </p:nvSpPr>
+        <p:spPr>
+          <a:xfrm>
+            <a:off x="658368" y="6449812"/>
+            <a:ext cx="5437632" cy="187924"/>
+          </a:xfrm>
+          <a:prstGeom prst="rect">
+            <a:avLst/>
+          </a:prstGeom>
+          <a:noFill/>
+        </p:spPr>
+        <p:txBody>
+          <a:bodyPr wrap="square" anchor="t" lIns="0" rIns="0" tIns="0" bIns="0">
+            <a:normAutofit/>
+          </a:bodyPr>
+          <a:lstStyle/>
+          <a:p>
+            <a:pPr algn="l">
+              <a:lnSpc>
+                <a:spcPct val="97445"/>
+              </a:lnSpc>
+            </a:pPr>
+            <a:r>
+              <a:rPr sz="1100" b="0" spc="70">
+                <a:solidFill>
+                  <a:srgbClr val="8DA0AE"/>
+                </a:solidFill>
+                <a:latin typeface="Inter SemiBold"/>
+                <a:cs typeface="Inter SemiBold"/>
+                <a:sym typeface="Inter SemiBold"/>
+              </a:rPr>
+              <a:t>GITHUB.COM/MANIKANTH678</a:t>
+            </a:r>
+          </a:p>
+        </p:txBody>
+      </p:sp>
+    </p:spTree>
+  </p:cSld>
+  <p:clrMapOvr>
+    <a:masterClrMapping/>
+  </p:clrMapOvr>
+</p:sld>
+</file>
+
+<file path=ppt/slides/slide10.xml><?xml version="1.0" encoding="utf-8"?>
+<p:sld xmlns:a="http://schemas.openxmlformats.org/drawingml/2006/main" xmlns:p="http://schemas.openxmlformats.org/presentationml/2006/main" xmlns:r="http://schemas.openxmlformats.org/officeDocument/2006/relationships">
+  <p:cSld>
+    <p:bg>
+      <p:bgPr>
+        <a:solidFill>
+          <a:srgbClr val="0C1620"/>
+        </a:solidFill>
+        <a:effectLst/>
+      </p:bgPr>
+    </p:bg>
+    <p:spTree>
+      <p:nvGrpSpPr>
+        <p:cNvPr id="1" name=""/>
+        <p:cNvGrpSpPr/>
+        <p:nvPr/>
+      </p:nvGrpSpPr>
+      <p:grpSpPr/>
+      <p:sp>
+        <p:nvSpPr>
+          <p:cNvPr id="2" name="Rectangle 1"/>
+          <p:cNvSpPr/>
+          <p:nvPr/>
+        </p:nvSpPr>
+        <p:spPr>
+          <a:xfrm>
+            <a:off x="0" y="0"/>
+            <a:ext cx="276515" cy="6858000"/>
+          </a:xfrm>
+          <a:prstGeom prst="rect">
+            <a:avLst/>
+          </a:prstGeom>
+          <a:solidFill>
+            <a:srgbClr val="4BC7D6"/>
+          </a:solidFill>
+          <a:ln>
+            <a:noFill/>
+          </a:ln>
+          <a:effectLst/>
+        </p:spPr>
+        <p:style>
+          <a:lnRef idx="1">
+            <a:schemeClr val="accent1"/>
+          </a:lnRef>
+          <a:fillRef idx="3">
+            <a:schemeClr val="accent1"/>
+          </a:fillRef>
+          <a:effectRef idx="2">
+            <a:schemeClr val="accent1"/>
+          </a:effectRef>
+          <a:fontRef idx="minor">
+            <a:schemeClr val="lt1"/>
+          </a:fontRef>
+        </p:style>
+        <p:txBody>
+          <a:bodyPr rtlCol="0" anchor="ctr"/>
+          <a:lstStyle/>
+          <a:p/>
+        </p:txBody>
+      </p:sp>
+      <p:sp>
+        <p:nvSpPr>
+          <p:cNvPr id="3" name="TextBox 2"/>
+          <p:cNvSpPr txBox="1"/>
+          <p:nvPr/>
+        </p:nvSpPr>
+        <p:spPr>
+          <a:xfrm>
+            <a:off x="658368" y="342351"/>
+            <a:ext cx="5437632" cy="209929"/>
+          </a:xfrm>
+          <a:prstGeom prst="rect">
+            <a:avLst/>
+          </a:prstGeom>
+          <a:noFill/>
+        </p:spPr>
+        <p:txBody>
+          <a:bodyPr wrap="square" anchor="t" lIns="0" rIns="0" tIns="0" bIns="0">
+            <a:normAutofit/>
+          </a:bodyPr>
+          <a:lstStyle/>
+          <a:p>
+            <a:pPr algn="l">
+              <a:lnSpc>
+                <a:spcPct val="97445"/>
+              </a:lnSpc>
+            </a:pPr>
+            <a:r>
+              <a:rPr sz="1100" b="0" spc="70">
+                <a:solidFill>
+                  <a:srgbClr val="8DA0AE"/>
+                </a:solidFill>
+                <a:latin typeface="Inter SemiBold"/>
+                <a:cs typeface="Inter SemiBold"/>
+                <a:sym typeface="Inter SemiBold"/>
+              </a:rPr>
+              <a:t>TRISHULI-FLOOD-MAPPING</a:t>
+            </a:r>
+          </a:p>
+        </p:txBody>
+      </p:sp>
+      <p:sp>
+        <p:nvSpPr>
+          <p:cNvPr id="4" name="TextBox 3"/>
+          <p:cNvSpPr txBox="1"/>
+          <p:nvPr/>
+        </p:nvSpPr>
+        <p:spPr>
+          <a:xfrm>
+            <a:off x="10253472" y="342351"/>
+            <a:ext cx="1280160" cy="187924"/>
+          </a:xfrm>
+          <a:prstGeom prst="rect">
+            <a:avLst/>
+          </a:prstGeom>
+          <a:noFill/>
+        </p:spPr>
+        <p:txBody>
+          <a:bodyPr wrap="square" anchor="t" lIns="0" rIns="0" tIns="0" bIns="0">
+            <a:normAutofit/>
+          </a:bodyPr>
+          <a:lstStyle/>
+          <a:p>
+            <a:pPr algn="r">
+              <a:lnSpc>
+                <a:spcPct val="97445"/>
+              </a:lnSpc>
+            </a:pPr>
+            <a:r>
+              <a:rPr sz="1100" b="0" spc="70">
+                <a:solidFill>
+                  <a:srgbClr val="8DA0AE"/>
+                </a:solidFill>
+                <a:latin typeface="Inter SemiBold"/>
+                <a:cs typeface="Inter SemiBold"/>
+                <a:sym typeface="Inter SemiBold"/>
+              </a:rPr>
+              <a:t>10 / 13</a:t>
+            </a:r>
+          </a:p>
+        </p:txBody>
+      </p:sp>
+      <p:sp>
+        <p:nvSpPr>
+          <p:cNvPr id="5" name="TextBox 4"/>
+          <p:cNvSpPr txBox="1"/>
+          <p:nvPr/>
+        </p:nvSpPr>
+        <p:spPr>
+          <a:xfrm>
+            <a:off x="658368" y="2002522"/>
+            <a:ext cx="8700211" cy="894665"/>
+          </a:xfrm>
+          <a:prstGeom prst="rect">
+            <a:avLst/>
+          </a:prstGeom>
+          <a:noFill/>
+        </p:spPr>
+        <p:txBody>
+          <a:bodyPr wrap="square" anchor="t" lIns="0" rIns="0" tIns="0" bIns="0">
+            <a:normAutofit/>
+          </a:bodyPr>
+          <a:lstStyle/>
+          <a:p>
+            <a:pPr algn="l">
+              <a:lnSpc>
+                <a:spcPct val="88496"/>
+              </a:lnSpc>
+            </a:pPr>
+            <a:r>
+              <a:rPr sz="5400" b="0">
+                <a:solidFill>
+                  <a:srgbClr val="4BC7D6"/>
+                </a:solidFill>
+                <a:latin typeface="Space Grotesk Bold"/>
+                <a:cs typeface="Space Grotesk Bold"/>
+                <a:sym typeface="Space Grotesk Bold"/>
+              </a:rPr>
+              <a:t>03</a:t>
+            </a:r>
+          </a:p>
+        </p:txBody>
+      </p:sp>
+      <p:sp>
+        <p:nvSpPr>
+          <p:cNvPr id="6" name="TextBox 5"/>
+          <p:cNvSpPr txBox="1"/>
+          <p:nvPr/>
+        </p:nvSpPr>
+        <p:spPr>
+          <a:xfrm>
+            <a:off x="658368" y="2897044"/>
+            <a:ext cx="8700211" cy="1396550"/>
+          </a:xfrm>
+          <a:prstGeom prst="rect">
+            <a:avLst/>
+          </a:prstGeom>
+          <a:noFill/>
+        </p:spPr>
+        <p:txBody>
+          <a:bodyPr wrap="square" anchor="t" lIns="0" rIns="0" tIns="0" bIns="0">
+            <a:normAutofit/>
+          </a:bodyPr>
+          <a:lstStyle/>
+          <a:p>
+            <a:pPr algn="l">
+              <a:lnSpc>
+                <a:spcPct val="88496"/>
+              </a:lnSpc>
+            </a:pPr>
+            <a:r>
+              <a:rPr sz="4264" b="0">
+                <a:solidFill>
+                  <a:srgbClr val="DCE6EE"/>
+                </a:solidFill>
+                <a:latin typeface="Space Grotesk Bold"/>
+                <a:cs typeface="Space Grotesk Bold"/>
+                <a:sym typeface="Space Grotesk Bold"/>
+              </a:rPr>
+              <a:t>Validation is honest about what it cannot show</a:t>
+            </a:r>
+          </a:p>
+        </p:txBody>
+      </p:sp>
+      <p:sp>
+        <p:nvSpPr>
+          <p:cNvPr id="7" name="TextBox 6"/>
+          <p:cNvSpPr txBox="1"/>
+          <p:nvPr/>
+        </p:nvSpPr>
+        <p:spPr>
+          <a:xfrm>
+            <a:off x="658368" y="4396408"/>
+            <a:ext cx="5981395" cy="776021"/>
+          </a:xfrm>
+          <a:prstGeom prst="rect">
+            <a:avLst/>
+          </a:prstGeom>
+          <a:noFill/>
+        </p:spPr>
+        <p:txBody>
+          <a:bodyPr wrap="square" anchor="t" lIns="0" rIns="0" tIns="0" bIns="0">
+            <a:normAutofit/>
+          </a:bodyPr>
+          <a:lstStyle/>
+          <a:p>
+            <a:pPr algn="l">
+              <a:lnSpc>
+                <a:spcPct val="104905"/>
+              </a:lnSpc>
+            </a:pPr>
+            <a:r>
+              <a:rPr sz="1900" b="0">
+                <a:solidFill>
+                  <a:srgbClr val="DCE6EE"/>
+                </a:solidFill>
+                <a:latin typeface="Space Grotesk"/>
+                <a:cs typeface="Space Grotesk"/>
+                <a:sym typeface="Space Grotesk"/>
+              </a:rPr>
+              <a:t>EMS products are read only for checking and never tune the detector.</a:t>
+            </a:r>
+          </a:p>
+        </p:txBody>
+      </p:sp>
+    </p:spTree>
+  </p:cSld>
+  <p:clrMapOvr>
+    <a:masterClrMapping/>
+  </p:clrMapOvr>
+</p:sld>
+</file>
+
+<file path=ppt/slides/slide11.xml><?xml version="1.0" encoding="utf-8"?>
+<p:sld xmlns:a="http://schemas.openxmlformats.org/drawingml/2006/main" xmlns:p="http://schemas.openxmlformats.org/presentationml/2006/main" xmlns:r="http://schemas.openxmlformats.org/officeDocument/2006/relationships">
+  <p:cSld>
+    <p:bg>
+      <p:bgPr>
+        <a:solidFill>
+          <a:srgbClr val="0C1620"/>
+        </a:solidFill>
+        <a:effectLst/>
+      </p:bgPr>
+    </p:bg>
+    <p:spTree>
+      <p:nvGrpSpPr>
+        <p:cNvPr id="1" name=""/>
+        <p:cNvGrpSpPr/>
+        <p:nvPr/>
+      </p:nvGrpSpPr>
+      <p:grpSpPr/>
+      <p:sp>
+        <p:nvSpPr>
+          <p:cNvPr id="2" name="Rectangle 1"/>
+          <p:cNvSpPr/>
+          <p:nvPr/>
+        </p:nvSpPr>
+        <p:spPr>
+          <a:xfrm>
+            <a:off x="0" y="0"/>
+            <a:ext cx="276515" cy="6858000"/>
+          </a:xfrm>
+          <a:prstGeom prst="rect">
+            <a:avLst/>
+          </a:prstGeom>
+          <a:solidFill>
+            <a:srgbClr val="4BC7D6"/>
+          </a:solidFill>
+          <a:ln>
+            <a:noFill/>
+          </a:ln>
+          <a:effectLst/>
+        </p:spPr>
+        <p:style>
+          <a:lnRef idx="1">
+            <a:schemeClr val="accent1"/>
+          </a:lnRef>
+          <a:fillRef idx="3">
+            <a:schemeClr val="accent1"/>
+          </a:fillRef>
+          <a:effectRef idx="2">
+            <a:schemeClr val="accent1"/>
+          </a:effectRef>
+          <a:fontRef idx="minor">
+            <a:schemeClr val="lt1"/>
+          </a:fontRef>
+        </p:style>
+        <p:txBody>
+          <a:bodyPr rtlCol="0" anchor="ctr"/>
+          <a:lstStyle/>
+          <a:p/>
+        </p:txBody>
+      </p:sp>
+      <p:sp>
+        <p:nvSpPr>
+          <p:cNvPr id="3" name="Rectangle 2"/>
+          <p:cNvSpPr/>
+          <p:nvPr/>
+        </p:nvSpPr>
+        <p:spPr>
+          <a:xfrm>
+            <a:off x="658368" y="3311164"/>
+            <a:ext cx="10875264" cy="13716"/>
+          </a:xfrm>
+          <a:prstGeom prst="rect">
+            <a:avLst/>
+          </a:prstGeom>
+          <a:solidFill>
+            <a:srgbClr val="4BC7D6"/>
+          </a:solidFill>
+          <a:ln>
+            <a:noFill/>
+          </a:ln>
+          <a:effectLst/>
+        </p:spPr>
+        <p:style>
+          <a:lnRef idx="1">
+            <a:schemeClr val="accent1"/>
+          </a:lnRef>
+          <a:fillRef idx="3">
+            <a:schemeClr val="accent1"/>
+          </a:fillRef>
+          <a:effectRef idx="2">
+            <a:schemeClr val="accent1"/>
+          </a:effectRef>
+          <a:fontRef idx="minor">
+            <a:schemeClr val="lt1"/>
+          </a:fontRef>
+        </p:style>
+        <p:txBody>
+          <a:bodyPr rtlCol="0" anchor="ctr"/>
+          <a:lstStyle/>
+          <a:p/>
+        </p:txBody>
+      </p:sp>
+      <p:sp>
+        <p:nvSpPr>
+          <p:cNvPr id="4" name="TextBox 3"/>
+          <p:cNvSpPr txBox="1"/>
+          <p:nvPr/>
+        </p:nvSpPr>
+        <p:spPr>
+          <a:xfrm>
+            <a:off x="658368" y="342351"/>
+            <a:ext cx="5437632" cy="209929"/>
+          </a:xfrm>
+          <a:prstGeom prst="rect">
+            <a:avLst/>
+          </a:prstGeom>
+          <a:noFill/>
+        </p:spPr>
+        <p:txBody>
+          <a:bodyPr wrap="square" anchor="t" lIns="0" rIns="0" tIns="0" bIns="0">
+            <a:normAutofit/>
+          </a:bodyPr>
+          <a:lstStyle/>
+          <a:p>
+            <a:pPr algn="l">
+              <a:lnSpc>
+                <a:spcPct val="97445"/>
+              </a:lnSpc>
+            </a:pPr>
+            <a:r>
+              <a:rPr sz="1100" b="0" spc="70">
+                <a:solidFill>
+                  <a:srgbClr val="8DA0AE"/>
+                </a:solidFill>
+                <a:latin typeface="Inter SemiBold"/>
+                <a:cs typeface="Inter SemiBold"/>
+                <a:sym typeface="Inter SemiBold"/>
+              </a:rPr>
+              <a:t>TRISHULI-FLOOD-MAPPING</a:t>
+            </a:r>
+          </a:p>
+        </p:txBody>
+      </p:sp>
+      <p:sp>
+        <p:nvSpPr>
+          <p:cNvPr id="5" name="TextBox 4"/>
+          <p:cNvSpPr txBox="1"/>
+          <p:nvPr/>
+        </p:nvSpPr>
+        <p:spPr>
+          <a:xfrm>
+            <a:off x="10253472" y="342351"/>
+            <a:ext cx="1280160" cy="187924"/>
+          </a:xfrm>
+          <a:prstGeom prst="rect">
+            <a:avLst/>
+          </a:prstGeom>
+          <a:noFill/>
+        </p:spPr>
+        <p:txBody>
+          <a:bodyPr wrap="square" anchor="t" lIns="0" rIns="0" tIns="0" bIns="0">
+            <a:normAutofit/>
+          </a:bodyPr>
+          <a:lstStyle/>
+          <a:p>
+            <a:pPr algn="r">
+              <a:lnSpc>
+                <a:spcPct val="97445"/>
+              </a:lnSpc>
+            </a:pPr>
+            <a:r>
+              <a:rPr sz="1100" b="0" spc="70">
+                <a:solidFill>
+                  <a:srgbClr val="8DA0AE"/>
+                </a:solidFill>
+                <a:latin typeface="Inter SemiBold"/>
+                <a:cs typeface="Inter SemiBold"/>
+                <a:sym typeface="Inter SemiBold"/>
+              </a:rPr>
+              <a:t>11 / 13</a:t>
+            </a:r>
+          </a:p>
+        </p:txBody>
+      </p:sp>
+      <p:sp>
+        <p:nvSpPr>
+          <p:cNvPr id="6" name="TextBox 5"/>
+          <p:cNvSpPr txBox="1"/>
+          <p:nvPr/>
+        </p:nvSpPr>
+        <p:spPr>
+          <a:xfrm>
+            <a:off x="658368" y="1039551"/>
+            <a:ext cx="7830190" cy="1963899"/>
+          </a:xfrm>
+          <a:prstGeom prst="rect">
+            <a:avLst/>
+          </a:prstGeom>
+          <a:noFill/>
+        </p:spPr>
+        <p:txBody>
+          <a:bodyPr wrap="square" anchor="t" lIns="0" rIns="0" tIns="0" bIns="0">
+            <a:normAutofit/>
+          </a:bodyPr>
+          <a:lstStyle/>
+          <a:p>
+            <a:pPr algn="l">
+              <a:lnSpc>
+                <a:spcPct val="88496"/>
+              </a:lnSpc>
+            </a:pPr>
+            <a:r>
+              <a:rPr sz="4000" b="0">
+                <a:solidFill>
+                  <a:srgbClr val="DCE6EE"/>
+                </a:solidFill>
+                <a:latin typeface="Space Grotesk Bold"/>
+                <a:cs typeface="Space Grotesk Bold"/>
+                <a:sym typeface="Space Grotesk Bold"/>
+              </a:rPr>
+              <a:t>Detections land on EMS landslides at high precision but low recall</a:t>
+            </a:r>
+          </a:p>
+        </p:txBody>
+      </p:sp>
+      <p:sp>
+        <p:nvSpPr>
+          <p:cNvPr id="7" name="TextBox 6"/>
+          <p:cNvSpPr txBox="1"/>
+          <p:nvPr/>
+        </p:nvSpPr>
+        <p:spPr>
+          <a:xfrm>
+            <a:off x="658368" y="3054878"/>
+            <a:ext cx="2028749" cy="187924"/>
+          </a:xfrm>
+          <a:prstGeom prst="rect">
+            <a:avLst/>
+          </a:prstGeom>
+          <a:noFill/>
+        </p:spPr>
+        <p:txBody>
+          <a:bodyPr wrap="square" anchor="t" lIns="0" rIns="0" tIns="0" bIns="0">
+            <a:normAutofit/>
+          </a:bodyPr>
+          <a:lstStyle/>
+          <a:p>
+            <a:pPr algn="l">
+              <a:lnSpc>
+                <a:spcPct val="97445"/>
+              </a:lnSpc>
+            </a:pPr>
+            <a:r>
+              <a:rPr sz="1100" b="0" spc="70">
+                <a:solidFill>
+                  <a:srgbClr val="8DA0AE"/>
+                </a:solidFill>
+                <a:latin typeface="Inter SemiBold"/>
+                <a:cs typeface="Inter SemiBold"/>
+                <a:sym typeface="Inter SemiBold"/>
+              </a:rPr>
+              <a:t>EMSR927 AREA</a:t>
+            </a:r>
+          </a:p>
+        </p:txBody>
+      </p:sp>
+      <p:sp>
+        <p:nvSpPr>
+          <p:cNvPr id="8" name="TextBox 7"/>
+          <p:cNvSpPr txBox="1"/>
+          <p:nvPr/>
+        </p:nvSpPr>
+        <p:spPr>
+          <a:xfrm>
+            <a:off x="2833421" y="3054878"/>
+            <a:ext cx="2028749" cy="187924"/>
+          </a:xfrm>
+          <a:prstGeom prst="rect">
+            <a:avLst/>
+          </a:prstGeom>
+          <a:noFill/>
+        </p:spPr>
+        <p:txBody>
+          <a:bodyPr wrap="square" anchor="t" lIns="0" rIns="0" tIns="0" bIns="0">
+            <a:normAutofit/>
+          </a:bodyPr>
+          <a:lstStyle/>
+          <a:p>
+            <a:pPr algn="l">
+              <a:lnSpc>
+                <a:spcPct val="97445"/>
+              </a:lnSpc>
+            </a:pPr>
+            <a:r>
+              <a:rPr sz="1100" b="0" spc="70">
+                <a:solidFill>
+                  <a:srgbClr val="8DA0AE"/>
+                </a:solidFill>
+                <a:latin typeface="Inter SemiBold"/>
+                <a:cs typeface="Inter SemiBold"/>
+                <a:sym typeface="Inter SemiBold"/>
+              </a:rPr>
+              <a:t>PRECISION</a:t>
+            </a:r>
+          </a:p>
+        </p:txBody>
+      </p:sp>
+      <p:sp>
+        <p:nvSpPr>
+          <p:cNvPr id="9" name="TextBox 8"/>
+          <p:cNvSpPr txBox="1"/>
+          <p:nvPr/>
+        </p:nvSpPr>
+        <p:spPr>
+          <a:xfrm>
+            <a:off x="5008474" y="3054878"/>
+            <a:ext cx="2028749" cy="187924"/>
+          </a:xfrm>
+          <a:prstGeom prst="rect">
+            <a:avLst/>
+          </a:prstGeom>
+          <a:noFill/>
+        </p:spPr>
+        <p:txBody>
+          <a:bodyPr wrap="square" anchor="t" lIns="0" rIns="0" tIns="0" bIns="0">
+            <a:normAutofit/>
+          </a:bodyPr>
+          <a:lstStyle/>
+          <a:p>
+            <a:pPr algn="l">
+              <a:lnSpc>
+                <a:spcPct val="97445"/>
+              </a:lnSpc>
+            </a:pPr>
+            <a:r>
+              <a:rPr sz="1100" b="0" spc="70">
+                <a:solidFill>
+                  <a:srgbClr val="8DA0AE"/>
+                </a:solidFill>
+                <a:latin typeface="Inter SemiBold"/>
+                <a:cs typeface="Inter SemiBold"/>
+                <a:sym typeface="Inter SemiBold"/>
+              </a:rPr>
+              <a:t>RECALL</a:t>
+            </a:r>
+          </a:p>
+        </p:txBody>
+      </p:sp>
+      <p:sp>
+        <p:nvSpPr>
+          <p:cNvPr id="10" name="TextBox 9"/>
+          <p:cNvSpPr txBox="1"/>
+          <p:nvPr/>
+        </p:nvSpPr>
+        <p:spPr>
+          <a:xfrm>
+            <a:off x="7183526" y="3054878"/>
+            <a:ext cx="2028749" cy="187924"/>
+          </a:xfrm>
+          <a:prstGeom prst="rect">
+            <a:avLst/>
+          </a:prstGeom>
+          <a:noFill/>
+        </p:spPr>
+        <p:txBody>
+          <a:bodyPr wrap="square" anchor="t" lIns="0" rIns="0" tIns="0" bIns="0">
+            <a:normAutofit/>
+          </a:bodyPr>
+          <a:lstStyle/>
+          <a:p>
+            <a:pPr algn="l">
+              <a:lnSpc>
+                <a:spcPct val="97445"/>
+              </a:lnSpc>
+            </a:pPr>
+            <a:r>
+              <a:rPr sz="1100" b="0" spc="70">
+                <a:solidFill>
+                  <a:srgbClr val="8DA0AE"/>
+                </a:solidFill>
+                <a:latin typeface="Inter SemiBold"/>
+                <a:cs typeface="Inter SemiBold"/>
+                <a:sym typeface="Inter SemiBold"/>
+              </a:rPr>
+              <a:t>IOU</a:t>
+            </a:r>
+          </a:p>
+        </p:txBody>
+      </p:sp>
+      <p:sp>
+        <p:nvSpPr>
+          <p:cNvPr id="11" name="TextBox 10"/>
+          <p:cNvSpPr txBox="1"/>
+          <p:nvPr/>
+        </p:nvSpPr>
+        <p:spPr>
+          <a:xfrm>
+            <a:off x="9358579" y="3054878"/>
+            <a:ext cx="2028749" cy="187924"/>
+          </a:xfrm>
+          <a:prstGeom prst="rect">
+            <a:avLst/>
+          </a:prstGeom>
+          <a:noFill/>
+        </p:spPr>
+        <p:txBody>
+          <a:bodyPr wrap="square" anchor="t" lIns="0" rIns="0" tIns="0" bIns="0">
+            <a:normAutofit/>
+          </a:bodyPr>
+          <a:lstStyle/>
+          <a:p>
+            <a:pPr algn="l">
+              <a:lnSpc>
+                <a:spcPct val="97445"/>
+              </a:lnSpc>
+            </a:pPr>
+            <a:r>
+              <a:rPr sz="1100" b="0" spc="70">
+                <a:solidFill>
+                  <a:srgbClr val="8DA0AE"/>
+                </a:solidFill>
+                <a:latin typeface="Inter SemiBold"/>
+                <a:cs typeface="Inter SemiBold"/>
+                <a:sym typeface="Inter SemiBold"/>
+              </a:rPr>
+              <a:t>DAMAGE POINTS</a:t>
+            </a:r>
+          </a:p>
+        </p:txBody>
+      </p:sp>
+      <p:sp>
+        <p:nvSpPr>
+          <p:cNvPr id="12" name="TextBox 11"/>
+          <p:cNvSpPr txBox="1"/>
+          <p:nvPr/>
+        </p:nvSpPr>
+        <p:spPr>
+          <a:xfrm>
+            <a:off x="658368" y="3457468"/>
+            <a:ext cx="2028749" cy="333573"/>
+          </a:xfrm>
+          <a:prstGeom prst="rect">
+            <a:avLst/>
+          </a:prstGeom>
+          <a:noFill/>
+        </p:spPr>
+        <p:txBody>
+          <a:bodyPr wrap="square" anchor="t" lIns="0" rIns="0" tIns="0" bIns="0">
+            <a:normAutofit/>
+          </a:bodyPr>
+          <a:lstStyle/>
+          <a:p>
+            <a:pPr algn="l">
+              <a:lnSpc>
+                <a:spcPct val="112734"/>
+              </a:lnSpc>
+            </a:pPr>
+            <a:r>
+              <a:rPr sz="1500" b="0">
+                <a:solidFill>
+                  <a:srgbClr val="DCE6EE"/>
+                </a:solidFill>
+                <a:latin typeface="Space Grotesk"/>
+                <a:cs typeface="Space Grotesk"/>
+                <a:sym typeface="Space Grotesk"/>
+              </a:rPr>
+              <a:t>Bidur (hold-out)</a:t>
+            </a:r>
+          </a:p>
+        </p:txBody>
+      </p:sp>
+      <p:sp>
+        <p:nvSpPr>
+          <p:cNvPr id="13" name="TextBox 12"/>
+          <p:cNvSpPr txBox="1"/>
+          <p:nvPr/>
+        </p:nvSpPr>
+        <p:spPr>
+          <a:xfrm>
+            <a:off x="2833421" y="3457468"/>
+            <a:ext cx="2028749" cy="333573"/>
+          </a:xfrm>
+          <a:prstGeom prst="rect">
+            <a:avLst/>
+          </a:prstGeom>
+          <a:noFill/>
+        </p:spPr>
+        <p:txBody>
+          <a:bodyPr wrap="square" anchor="t" lIns="0" rIns="0" tIns="0" bIns="0">
+            <a:normAutofit/>
+          </a:bodyPr>
+          <a:lstStyle/>
+          <a:p>
+            <a:pPr algn="l">
+              <a:lnSpc>
+                <a:spcPct val="112734"/>
+              </a:lnSpc>
+            </a:pPr>
+            <a:r>
+              <a:rPr sz="1500" b="0">
+                <a:solidFill>
+                  <a:srgbClr val="DCE6EE"/>
+                </a:solidFill>
+                <a:latin typeface="Space Grotesk"/>
+                <a:cs typeface="Space Grotesk"/>
+                <a:sym typeface="Space Grotesk"/>
+              </a:rPr>
+              <a:t>0.93</a:t>
+            </a:r>
+          </a:p>
+        </p:txBody>
+      </p:sp>
+      <p:sp>
+        <p:nvSpPr>
+          <p:cNvPr id="14" name="TextBox 13"/>
+          <p:cNvSpPr txBox="1"/>
+          <p:nvPr/>
+        </p:nvSpPr>
+        <p:spPr>
+          <a:xfrm>
+            <a:off x="5008474" y="3457468"/>
+            <a:ext cx="2028749" cy="333573"/>
+          </a:xfrm>
+          <a:prstGeom prst="rect">
+            <a:avLst/>
+          </a:prstGeom>
+          <a:noFill/>
+        </p:spPr>
+        <p:txBody>
+          <a:bodyPr wrap="square" anchor="t" lIns="0" rIns="0" tIns="0" bIns="0">
+            <a:normAutofit/>
+          </a:bodyPr>
+          <a:lstStyle/>
+          <a:p>
+            <a:pPr algn="l">
+              <a:lnSpc>
+                <a:spcPct val="112734"/>
+              </a:lnSpc>
+            </a:pPr>
+            <a:r>
+              <a:rPr sz="1500" b="0">
+                <a:solidFill>
+                  <a:srgbClr val="DCE6EE"/>
+                </a:solidFill>
+                <a:latin typeface="Space Grotesk"/>
+                <a:cs typeface="Space Grotesk"/>
+                <a:sym typeface="Space Grotesk"/>
+              </a:rPr>
+              <a:t>0.17</a:t>
+            </a:r>
+          </a:p>
+        </p:txBody>
+      </p:sp>
+      <p:sp>
+        <p:nvSpPr>
+          <p:cNvPr id="15" name="TextBox 14"/>
+          <p:cNvSpPr txBox="1"/>
+          <p:nvPr/>
+        </p:nvSpPr>
+        <p:spPr>
+          <a:xfrm>
+            <a:off x="7183526" y="3457468"/>
+            <a:ext cx="2028749" cy="333573"/>
+          </a:xfrm>
+          <a:prstGeom prst="rect">
+            <a:avLst/>
+          </a:prstGeom>
+          <a:noFill/>
+        </p:spPr>
+        <p:txBody>
+          <a:bodyPr wrap="square" anchor="t" lIns="0" rIns="0" tIns="0" bIns="0">
+            <a:normAutofit/>
+          </a:bodyPr>
+          <a:lstStyle/>
+          <a:p>
+            <a:pPr algn="l">
+              <a:lnSpc>
+                <a:spcPct val="112734"/>
+              </a:lnSpc>
+            </a:pPr>
+            <a:r>
+              <a:rPr sz="1500" b="0">
+                <a:solidFill>
+                  <a:srgbClr val="DCE6EE"/>
+                </a:solidFill>
+                <a:latin typeface="Space Grotesk"/>
+                <a:cs typeface="Space Grotesk"/>
+                <a:sym typeface="Space Grotesk"/>
+              </a:rPr>
+              <a:t>0.17</a:t>
+            </a:r>
+          </a:p>
+        </p:txBody>
+      </p:sp>
+      <p:sp>
+        <p:nvSpPr>
+          <p:cNvPr id="16" name="TextBox 15"/>
+          <p:cNvSpPr txBox="1"/>
+          <p:nvPr/>
+        </p:nvSpPr>
+        <p:spPr>
+          <a:xfrm>
+            <a:off x="9358579" y="3457468"/>
+            <a:ext cx="2028749" cy="333573"/>
+          </a:xfrm>
+          <a:prstGeom prst="rect">
+            <a:avLst/>
+          </a:prstGeom>
+          <a:noFill/>
+        </p:spPr>
+        <p:txBody>
+          <a:bodyPr wrap="square" anchor="t" lIns="0" rIns="0" tIns="0" bIns="0">
+            <a:normAutofit/>
+          </a:bodyPr>
+          <a:lstStyle/>
+          <a:p>
+            <a:pPr algn="l">
+              <a:lnSpc>
+                <a:spcPct val="112734"/>
+              </a:lnSpc>
+            </a:pPr>
+            <a:r>
+              <a:rPr sz="1500" b="0">
+                <a:solidFill>
+                  <a:srgbClr val="DCE6EE"/>
+                </a:solidFill>
+                <a:latin typeface="Space Grotesk"/>
+                <a:cs typeface="Space Grotesk"/>
+                <a:sym typeface="Space Grotesk"/>
+              </a:rPr>
+              <a:t>Chance-level</a:t>
+            </a:r>
+          </a:p>
+        </p:txBody>
+      </p:sp>
+      <p:sp>
+        <p:nvSpPr>
+          <p:cNvPr id="17" name="TextBox 16"/>
+          <p:cNvSpPr txBox="1"/>
+          <p:nvPr/>
+        </p:nvSpPr>
+        <p:spPr>
+          <a:xfrm>
+            <a:off x="658368" y="4146925"/>
+            <a:ext cx="2028749" cy="333573"/>
+          </a:xfrm>
+          <a:prstGeom prst="rect">
+            <a:avLst/>
+          </a:prstGeom>
+          <a:noFill/>
+        </p:spPr>
+        <p:txBody>
+          <a:bodyPr wrap="square" anchor="t" lIns="0" rIns="0" tIns="0" bIns="0">
+            <a:normAutofit/>
+          </a:bodyPr>
+          <a:lstStyle/>
+          <a:p>
+            <a:pPr algn="l">
+              <a:lnSpc>
+                <a:spcPct val="112734"/>
+              </a:lnSpc>
+            </a:pPr>
+            <a:r>
+              <a:rPr sz="1500" b="0">
+                <a:solidFill>
+                  <a:srgbClr val="DCE6EE"/>
+                </a:solidFill>
+                <a:latin typeface="Space Grotesk"/>
+                <a:cs typeface="Space Grotesk"/>
+                <a:sym typeface="Space Grotesk"/>
+              </a:rPr>
+              <a:t>Phosretar</a:t>
+            </a:r>
+          </a:p>
+        </p:txBody>
+      </p:sp>
+      <p:sp>
+        <p:nvSpPr>
+          <p:cNvPr id="18" name="TextBox 17"/>
+          <p:cNvSpPr txBox="1"/>
+          <p:nvPr/>
+        </p:nvSpPr>
+        <p:spPr>
+          <a:xfrm>
+            <a:off x="2833421" y="4146925"/>
+            <a:ext cx="2028749" cy="333573"/>
+          </a:xfrm>
+          <a:prstGeom prst="rect">
+            <a:avLst/>
+          </a:prstGeom>
+          <a:noFill/>
+        </p:spPr>
+        <p:txBody>
+          <a:bodyPr wrap="square" anchor="t" lIns="0" rIns="0" tIns="0" bIns="0">
+            <a:normAutofit/>
+          </a:bodyPr>
+          <a:lstStyle/>
+          <a:p>
+            <a:pPr algn="l">
+              <a:lnSpc>
+                <a:spcPct val="112734"/>
+              </a:lnSpc>
+            </a:pPr>
+            <a:r>
+              <a:rPr sz="1500" b="0">
+                <a:solidFill>
+                  <a:srgbClr val="DCE6EE"/>
+                </a:solidFill>
+                <a:latin typeface="Space Grotesk"/>
+                <a:cs typeface="Space Grotesk"/>
+                <a:sym typeface="Space Grotesk"/>
+              </a:rPr>
+              <a:t>0.99</a:t>
+            </a:r>
+          </a:p>
+        </p:txBody>
+      </p:sp>
+      <p:sp>
+        <p:nvSpPr>
+          <p:cNvPr id="19" name="TextBox 18"/>
+          <p:cNvSpPr txBox="1"/>
+          <p:nvPr/>
+        </p:nvSpPr>
+        <p:spPr>
+          <a:xfrm>
+            <a:off x="5008474" y="4146925"/>
+            <a:ext cx="2028749" cy="333573"/>
+          </a:xfrm>
+          <a:prstGeom prst="rect">
+            <a:avLst/>
+          </a:prstGeom>
+          <a:noFill/>
+        </p:spPr>
+        <p:txBody>
+          <a:bodyPr wrap="square" anchor="t" lIns="0" rIns="0" tIns="0" bIns="0">
+            <a:normAutofit/>
+          </a:bodyPr>
+          <a:lstStyle/>
+          <a:p>
+            <a:pPr algn="l">
+              <a:lnSpc>
+                <a:spcPct val="112734"/>
+              </a:lnSpc>
+            </a:pPr>
+            <a:r>
+              <a:rPr sz="1500" b="0">
+                <a:solidFill>
+                  <a:srgbClr val="DCE6EE"/>
+                </a:solidFill>
+                <a:latin typeface="Space Grotesk"/>
+                <a:cs typeface="Space Grotesk"/>
+                <a:sym typeface="Space Grotesk"/>
+              </a:rPr>
+              <a:t>0.24</a:t>
+            </a:r>
+          </a:p>
+        </p:txBody>
+      </p:sp>
+      <p:sp>
+        <p:nvSpPr>
+          <p:cNvPr id="20" name="TextBox 19"/>
+          <p:cNvSpPr txBox="1"/>
+          <p:nvPr/>
+        </p:nvSpPr>
+        <p:spPr>
+          <a:xfrm>
+            <a:off x="7183526" y="4146925"/>
+            <a:ext cx="2028749" cy="333573"/>
+          </a:xfrm>
+          <a:prstGeom prst="rect">
+            <a:avLst/>
+          </a:prstGeom>
+          <a:noFill/>
+        </p:spPr>
+        <p:txBody>
+          <a:bodyPr wrap="square" anchor="t" lIns="0" rIns="0" tIns="0" bIns="0">
+            <a:normAutofit/>
+          </a:bodyPr>
+          <a:lstStyle/>
+          <a:p>
+            <a:pPr algn="l">
+              <a:lnSpc>
+                <a:spcPct val="112734"/>
+              </a:lnSpc>
+            </a:pPr>
+            <a:r>
+              <a:rPr sz="1500" b="0">
+                <a:solidFill>
+                  <a:srgbClr val="DCE6EE"/>
+                </a:solidFill>
+                <a:latin typeface="Space Grotesk"/>
+                <a:cs typeface="Space Grotesk"/>
+                <a:sym typeface="Space Grotesk"/>
+              </a:rPr>
+              <a:t>0.24</a:t>
+            </a:r>
+          </a:p>
+        </p:txBody>
+      </p:sp>
+      <p:sp>
+        <p:nvSpPr>
+          <p:cNvPr id="21" name="TextBox 20"/>
+          <p:cNvSpPr txBox="1"/>
+          <p:nvPr/>
+        </p:nvSpPr>
+        <p:spPr>
+          <a:xfrm>
+            <a:off x="9358579" y="4146925"/>
+            <a:ext cx="2028749" cy="333573"/>
+          </a:xfrm>
+          <a:prstGeom prst="rect">
+            <a:avLst/>
+          </a:prstGeom>
+          <a:noFill/>
+        </p:spPr>
+        <p:txBody>
+          <a:bodyPr wrap="square" anchor="t" lIns="0" rIns="0" tIns="0" bIns="0">
+            <a:normAutofit/>
+          </a:bodyPr>
+          <a:lstStyle/>
+          <a:p>
+            <a:pPr algn="l">
+              <a:lnSpc>
+                <a:spcPct val="112734"/>
+              </a:lnSpc>
+            </a:pPr>
+            <a:r>
+              <a:rPr sz="1500" b="0">
+                <a:solidFill>
+                  <a:srgbClr val="DCE6EE"/>
+                </a:solidFill>
+                <a:latin typeface="Space Grotesk"/>
+                <a:cs typeface="Space Grotesk"/>
+                <a:sym typeface="Space Grotesk"/>
+              </a:rPr>
+              <a:t>Chance-level</a:t>
+            </a:r>
+          </a:p>
+        </p:txBody>
+      </p:sp>
+      <p:sp>
+        <p:nvSpPr>
+          <p:cNvPr id="22" name="TextBox 21"/>
+          <p:cNvSpPr txBox="1"/>
+          <p:nvPr/>
+        </p:nvSpPr>
+        <p:spPr>
+          <a:xfrm>
+            <a:off x="658368" y="4836383"/>
+            <a:ext cx="2028749" cy="333573"/>
+          </a:xfrm>
+          <a:prstGeom prst="rect">
+            <a:avLst/>
+          </a:prstGeom>
+          <a:noFill/>
+        </p:spPr>
+        <p:txBody>
+          <a:bodyPr wrap="square" anchor="t" lIns="0" rIns="0" tIns="0" bIns="0">
+            <a:normAutofit/>
+          </a:bodyPr>
+          <a:lstStyle/>
+          <a:p>
+            <a:pPr algn="l">
+              <a:lnSpc>
+                <a:spcPct val="112734"/>
+              </a:lnSpc>
+            </a:pPr>
+            <a:r>
+              <a:rPr sz="1500" b="0">
+                <a:solidFill>
+                  <a:srgbClr val="DCE6EE"/>
+                </a:solidFill>
+                <a:latin typeface="Space Grotesk"/>
+                <a:cs typeface="Space Grotesk"/>
+                <a:sym typeface="Space Grotesk"/>
+              </a:rPr>
+              <a:t>Syapru Besi</a:t>
+            </a:r>
+          </a:p>
+        </p:txBody>
+      </p:sp>
+      <p:sp>
+        <p:nvSpPr>
+          <p:cNvPr id="23" name="TextBox 22"/>
+          <p:cNvSpPr txBox="1"/>
+          <p:nvPr/>
+        </p:nvSpPr>
+        <p:spPr>
+          <a:xfrm>
+            <a:off x="2833421" y="4836383"/>
+            <a:ext cx="2028749" cy="333573"/>
+          </a:xfrm>
+          <a:prstGeom prst="rect">
+            <a:avLst/>
+          </a:prstGeom>
+          <a:noFill/>
+        </p:spPr>
+        <p:txBody>
+          <a:bodyPr wrap="square" anchor="t" lIns="0" rIns="0" tIns="0" bIns="0">
+            <a:normAutofit/>
+          </a:bodyPr>
+          <a:lstStyle/>
+          <a:p>
+            <a:pPr algn="l">
+              <a:lnSpc>
+                <a:spcPct val="112734"/>
+              </a:lnSpc>
+            </a:pPr>
+            <a:r>
+              <a:rPr sz="1500" b="0">
+                <a:solidFill>
+                  <a:srgbClr val="DCE6EE"/>
+                </a:solidFill>
+                <a:latin typeface="Space Grotesk"/>
+                <a:cs typeface="Space Grotesk"/>
+                <a:sym typeface="Space Grotesk"/>
+              </a:rPr>
+              <a:t>0</a:t>
+            </a:r>
+          </a:p>
+        </p:txBody>
+      </p:sp>
+      <p:sp>
+        <p:nvSpPr>
+          <p:cNvPr id="24" name="TextBox 23"/>
+          <p:cNvSpPr txBox="1"/>
+          <p:nvPr/>
+        </p:nvSpPr>
+        <p:spPr>
+          <a:xfrm>
+            <a:off x="5008474" y="4836383"/>
+            <a:ext cx="2028749" cy="333573"/>
+          </a:xfrm>
+          <a:prstGeom prst="rect">
+            <a:avLst/>
+          </a:prstGeom>
+          <a:noFill/>
+        </p:spPr>
+        <p:txBody>
+          <a:bodyPr wrap="square" anchor="t" lIns="0" rIns="0" tIns="0" bIns="0">
+            <a:normAutofit/>
+          </a:bodyPr>
+          <a:lstStyle/>
+          <a:p>
+            <a:pPr algn="l">
+              <a:lnSpc>
+                <a:spcPct val="112734"/>
+              </a:lnSpc>
+            </a:pPr>
+            <a:r>
+              <a:rPr sz="1500" b="0">
+                <a:solidFill>
+                  <a:srgbClr val="DCE6EE"/>
+                </a:solidFill>
+                <a:latin typeface="Space Grotesk"/>
+                <a:cs typeface="Space Grotesk"/>
+                <a:sym typeface="Space Grotesk"/>
+              </a:rPr>
+              <a:t>0</a:t>
+            </a:r>
+          </a:p>
+        </p:txBody>
+      </p:sp>
+      <p:sp>
+        <p:nvSpPr>
+          <p:cNvPr id="25" name="TextBox 24"/>
+          <p:cNvSpPr txBox="1"/>
+          <p:nvPr/>
+        </p:nvSpPr>
+        <p:spPr>
+          <a:xfrm>
+            <a:off x="7183526" y="4836383"/>
+            <a:ext cx="2028749" cy="333573"/>
+          </a:xfrm>
+          <a:prstGeom prst="rect">
+            <a:avLst/>
+          </a:prstGeom>
+          <a:noFill/>
+        </p:spPr>
+        <p:txBody>
+          <a:bodyPr wrap="square" anchor="t" lIns="0" rIns="0" tIns="0" bIns="0">
+            <a:normAutofit/>
+          </a:bodyPr>
+          <a:lstStyle/>
+          <a:p>
+            <a:pPr algn="l">
+              <a:lnSpc>
+                <a:spcPct val="112734"/>
+              </a:lnSpc>
+            </a:pPr>
+            <a:r>
+              <a:rPr sz="1500" b="0">
+                <a:solidFill>
+                  <a:srgbClr val="DCE6EE"/>
+                </a:solidFill>
+                <a:latin typeface="Space Grotesk"/>
+                <a:cs typeface="Space Grotesk"/>
+                <a:sym typeface="Space Grotesk"/>
+              </a:rPr>
+              <a:t>0</a:t>
+            </a:r>
+          </a:p>
+        </p:txBody>
+      </p:sp>
+      <p:sp>
+        <p:nvSpPr>
+          <p:cNvPr id="26" name="TextBox 25"/>
+          <p:cNvSpPr txBox="1"/>
+          <p:nvPr/>
+        </p:nvSpPr>
+        <p:spPr>
+          <a:xfrm>
+            <a:off x="9358579" y="4836383"/>
+            <a:ext cx="2028749" cy="333573"/>
+          </a:xfrm>
+          <a:prstGeom prst="rect">
+            <a:avLst/>
+          </a:prstGeom>
+          <a:noFill/>
+        </p:spPr>
+        <p:txBody>
+          <a:bodyPr wrap="square" anchor="t" lIns="0" rIns="0" tIns="0" bIns="0">
+            <a:normAutofit/>
+          </a:bodyPr>
+          <a:lstStyle/>
+          <a:p>
+            <a:pPr algn="l">
+              <a:lnSpc>
+                <a:spcPct val="112734"/>
+              </a:lnSpc>
+            </a:pPr>
+            <a:r>
+              <a:rPr sz="1500" b="0">
+                <a:solidFill>
+                  <a:srgbClr val="DCE6EE"/>
+                </a:solidFill>
+                <a:latin typeface="Space Grotesk"/>
+                <a:cs typeface="Space Grotesk"/>
+                <a:sym typeface="Space Grotesk"/>
+              </a:rPr>
+              <a:t>Not scored</a:t>
+            </a:r>
+          </a:p>
+        </p:txBody>
+      </p:sp>
+      <p:sp>
+        <p:nvSpPr>
+          <p:cNvPr id="27" name="TextBox 26"/>
+          <p:cNvSpPr txBox="1"/>
+          <p:nvPr/>
+        </p:nvSpPr>
+        <p:spPr>
+          <a:xfrm>
+            <a:off x="658368" y="5525841"/>
+            <a:ext cx="2028749" cy="333573"/>
+          </a:xfrm>
+          <a:prstGeom prst="rect">
+            <a:avLst/>
+          </a:prstGeom>
+          <a:noFill/>
+        </p:spPr>
+        <p:txBody>
+          <a:bodyPr wrap="square" anchor="t" lIns="0" rIns="0" tIns="0" bIns="0">
+            <a:normAutofit/>
+          </a:bodyPr>
+          <a:lstStyle/>
+          <a:p>
+            <a:pPr algn="l">
+              <a:lnSpc>
+                <a:spcPct val="112734"/>
+              </a:lnSpc>
+            </a:pPr>
+            <a:r>
+              <a:rPr sz="1500" b="0">
+                <a:solidFill>
+                  <a:srgbClr val="DCE6EE"/>
+                </a:solidFill>
+                <a:latin typeface="Space Grotesk"/>
+                <a:cs typeface="Space Grotesk"/>
+                <a:sym typeface="Space Grotesk"/>
+              </a:rPr>
+              <a:t>Timure</a:t>
+            </a:r>
+          </a:p>
+        </p:txBody>
+      </p:sp>
+      <p:sp>
+        <p:nvSpPr>
+          <p:cNvPr id="28" name="TextBox 27"/>
+          <p:cNvSpPr txBox="1"/>
+          <p:nvPr/>
+        </p:nvSpPr>
+        <p:spPr>
+          <a:xfrm>
+            <a:off x="2833421" y="5525841"/>
+            <a:ext cx="2028749" cy="333573"/>
+          </a:xfrm>
+          <a:prstGeom prst="rect">
+            <a:avLst/>
+          </a:prstGeom>
+          <a:noFill/>
+        </p:spPr>
+        <p:txBody>
+          <a:bodyPr wrap="square" anchor="t" lIns="0" rIns="0" tIns="0" bIns="0">
+            <a:normAutofit/>
+          </a:bodyPr>
+          <a:lstStyle/>
+          <a:p>
+            <a:pPr algn="l">
+              <a:lnSpc>
+                <a:spcPct val="112734"/>
+              </a:lnSpc>
+            </a:pPr>
+            <a:r>
+              <a:rPr sz="1500" b="0">
+                <a:solidFill>
+                  <a:srgbClr val="DCE6EE"/>
+                </a:solidFill>
+                <a:latin typeface="Space Grotesk"/>
+                <a:cs typeface="Space Grotesk"/>
+                <a:sym typeface="Space Grotesk"/>
+              </a:rPr>
+              <a:t>0</a:t>
+            </a:r>
+          </a:p>
+        </p:txBody>
+      </p:sp>
+      <p:sp>
+        <p:nvSpPr>
+          <p:cNvPr id="29" name="TextBox 28"/>
+          <p:cNvSpPr txBox="1"/>
+          <p:nvPr/>
+        </p:nvSpPr>
+        <p:spPr>
+          <a:xfrm>
+            <a:off x="5008474" y="5525841"/>
+            <a:ext cx="2028749" cy="333573"/>
+          </a:xfrm>
+          <a:prstGeom prst="rect">
+            <a:avLst/>
+          </a:prstGeom>
+          <a:noFill/>
+        </p:spPr>
+        <p:txBody>
+          <a:bodyPr wrap="square" anchor="t" lIns="0" rIns="0" tIns="0" bIns="0">
+            <a:normAutofit/>
+          </a:bodyPr>
+          <a:lstStyle/>
+          <a:p>
+            <a:pPr algn="l">
+              <a:lnSpc>
+                <a:spcPct val="112734"/>
+              </a:lnSpc>
+            </a:pPr>
+            <a:r>
+              <a:rPr sz="1500" b="0">
+                <a:solidFill>
+                  <a:srgbClr val="DCE6EE"/>
+                </a:solidFill>
+                <a:latin typeface="Space Grotesk"/>
+                <a:cs typeface="Space Grotesk"/>
+                <a:sym typeface="Space Grotesk"/>
+              </a:rPr>
+              <a:t>0</a:t>
+            </a:r>
+          </a:p>
+        </p:txBody>
+      </p:sp>
+      <p:sp>
+        <p:nvSpPr>
+          <p:cNvPr id="30" name="TextBox 29"/>
+          <p:cNvSpPr txBox="1"/>
+          <p:nvPr/>
+        </p:nvSpPr>
+        <p:spPr>
+          <a:xfrm>
+            <a:off x="7183526" y="5525841"/>
+            <a:ext cx="2028749" cy="333573"/>
+          </a:xfrm>
+          <a:prstGeom prst="rect">
+            <a:avLst/>
+          </a:prstGeom>
+          <a:noFill/>
+        </p:spPr>
+        <p:txBody>
+          <a:bodyPr wrap="square" anchor="t" lIns="0" rIns="0" tIns="0" bIns="0">
+            <a:normAutofit/>
+          </a:bodyPr>
+          <a:lstStyle/>
+          <a:p>
+            <a:pPr algn="l">
+              <a:lnSpc>
+                <a:spcPct val="112734"/>
+              </a:lnSpc>
+            </a:pPr>
+            <a:r>
+              <a:rPr sz="1500" b="0">
+                <a:solidFill>
+                  <a:srgbClr val="DCE6EE"/>
+                </a:solidFill>
+                <a:latin typeface="Space Grotesk"/>
+                <a:cs typeface="Space Grotesk"/>
+                <a:sym typeface="Space Grotesk"/>
+              </a:rPr>
+              <a:t>0</a:t>
+            </a:r>
+          </a:p>
+        </p:txBody>
+      </p:sp>
+      <p:sp>
+        <p:nvSpPr>
+          <p:cNvPr id="31" name="TextBox 30"/>
+          <p:cNvSpPr txBox="1"/>
+          <p:nvPr/>
+        </p:nvSpPr>
+        <p:spPr>
+          <a:xfrm>
+            <a:off x="9358579" y="5525841"/>
+            <a:ext cx="2028749" cy="333573"/>
+          </a:xfrm>
+          <a:prstGeom prst="rect">
+            <a:avLst/>
+          </a:prstGeom>
+          <a:noFill/>
+        </p:spPr>
+        <p:txBody>
+          <a:bodyPr wrap="square" anchor="t" lIns="0" rIns="0" tIns="0" bIns="0">
+            <a:normAutofit/>
+          </a:bodyPr>
+          <a:lstStyle/>
+          <a:p>
+            <a:pPr algn="l">
+              <a:lnSpc>
+                <a:spcPct val="112734"/>
+              </a:lnSpc>
+            </a:pPr>
+            <a:r>
+              <a:rPr sz="1500" b="0">
+                <a:solidFill>
+                  <a:srgbClr val="DCE6EE"/>
+                </a:solidFill>
+                <a:latin typeface="Space Grotesk"/>
+                <a:cs typeface="Space Grotesk"/>
+                <a:sym typeface="Space Grotesk"/>
+              </a:rPr>
+              <a:t>Not scored</a:t>
+            </a:r>
+          </a:p>
+        </p:txBody>
+      </p:sp>
+    </p:spTree>
+  </p:cSld>
+  <p:clrMapOvr>
+    <a:masterClrMapping/>
+  </p:clrMapOvr>
+</p:sld>
+</file>
+
+<file path=ppt/slides/slide12.xml><?xml version="1.0" encoding="utf-8"?>
+<p:sld xmlns:a="http://schemas.openxmlformats.org/drawingml/2006/main" xmlns:p="http://schemas.openxmlformats.org/presentationml/2006/main" xmlns:r="http://schemas.openxmlformats.org/officeDocument/2006/relationships">
+  <p:cSld>
+    <p:bg>
+      <p:bgPr>
+        <a:solidFill>
+          <a:srgbClr val="0C1620"/>
+        </a:solidFill>
+        <a:effectLst/>
+      </p:bgPr>
+    </p:bg>
+    <p:spTree>
+      <p:nvGrpSpPr>
+        <p:cNvPr id="1" name=""/>
+        <p:cNvGrpSpPr/>
+        <p:nvPr/>
+      </p:nvGrpSpPr>
+      <p:grpSpPr/>
+      <p:sp>
+        <p:nvSpPr>
+          <p:cNvPr id="2" name="Rectangle 1"/>
+          <p:cNvSpPr/>
+          <p:nvPr/>
+        </p:nvSpPr>
+        <p:spPr>
+          <a:xfrm>
+            <a:off x="0" y="0"/>
+            <a:ext cx="276515" cy="6858000"/>
+          </a:xfrm>
+          <a:prstGeom prst="rect">
+            <a:avLst/>
+          </a:prstGeom>
+          <a:solidFill>
+            <a:srgbClr val="4BC7D6"/>
+          </a:solidFill>
+          <a:ln>
+            <a:noFill/>
+          </a:ln>
+          <a:effectLst/>
+        </p:spPr>
+        <p:style>
+          <a:lnRef idx="1">
+            <a:schemeClr val="accent1"/>
+          </a:lnRef>
+          <a:fillRef idx="3">
+            <a:schemeClr val="accent1"/>
+          </a:fillRef>
+          <a:effectRef idx="2">
+            <a:schemeClr val="accent1"/>
+          </a:effectRef>
+          <a:fontRef idx="minor">
+            <a:schemeClr val="lt1"/>
+          </a:fontRef>
+        </p:style>
+        <p:txBody>
+          <a:bodyPr rtlCol="0" anchor="ctr"/>
+          <a:lstStyle/>
+          <a:p/>
+        </p:txBody>
+      </p:sp>
+      <p:sp>
+        <p:nvSpPr>
+          <p:cNvPr id="3" name="Rectangle 2"/>
+          <p:cNvSpPr/>
+          <p:nvPr/>
+        </p:nvSpPr>
+        <p:spPr>
+          <a:xfrm>
+            <a:off x="658368" y="3459805"/>
+            <a:ext cx="1043970" cy="18288"/>
+          </a:xfrm>
+          <a:prstGeom prst="rect">
+            <a:avLst/>
+          </a:prstGeom>
+          <a:solidFill>
+            <a:srgbClr val="4BC7D6"/>
+          </a:solidFill>
+          <a:ln>
+            <a:noFill/>
+          </a:ln>
+          <a:effectLst/>
+        </p:spPr>
+        <p:style>
+          <a:lnRef idx="1">
+            <a:schemeClr val="accent1"/>
+          </a:lnRef>
+          <a:fillRef idx="3">
+            <a:schemeClr val="accent1"/>
+          </a:fillRef>
+          <a:effectRef idx="2">
+            <a:schemeClr val="accent1"/>
+          </a:effectRef>
+          <a:fontRef idx="minor">
+            <a:schemeClr val="lt1"/>
+          </a:fontRef>
+        </p:style>
+        <p:txBody>
+          <a:bodyPr rtlCol="0" anchor="ctr"/>
+          <a:lstStyle/>
+          <a:p/>
+        </p:txBody>
+      </p:sp>
+      <p:sp>
+        <p:nvSpPr>
+          <p:cNvPr id="4" name="Rectangle 3"/>
+          <p:cNvSpPr/>
+          <p:nvPr/>
+        </p:nvSpPr>
+        <p:spPr>
+          <a:xfrm>
+            <a:off x="3454908" y="3459805"/>
+            <a:ext cx="1043970" cy="18288"/>
+          </a:xfrm>
+          <a:prstGeom prst="rect">
+            <a:avLst/>
+          </a:prstGeom>
+          <a:solidFill>
+            <a:srgbClr val="4BC7D6"/>
+          </a:solidFill>
+          <a:ln>
+            <a:noFill/>
+          </a:ln>
+          <a:effectLst/>
+        </p:spPr>
+        <p:style>
+          <a:lnRef idx="1">
+            <a:schemeClr val="accent1"/>
+          </a:lnRef>
+          <a:fillRef idx="3">
+            <a:schemeClr val="accent1"/>
+          </a:fillRef>
+          <a:effectRef idx="2">
+            <a:schemeClr val="accent1"/>
+          </a:effectRef>
+          <a:fontRef idx="minor">
+            <a:schemeClr val="lt1"/>
+          </a:fontRef>
+        </p:style>
+        <p:txBody>
+          <a:bodyPr rtlCol="0" anchor="ctr"/>
+          <a:lstStyle/>
+          <a:p/>
+        </p:txBody>
+      </p:sp>
+      <p:sp>
+        <p:nvSpPr>
+          <p:cNvPr id="5" name="Rectangle 4"/>
+          <p:cNvSpPr/>
+          <p:nvPr/>
+        </p:nvSpPr>
+        <p:spPr>
+          <a:xfrm>
+            <a:off x="6251448" y="3459805"/>
+            <a:ext cx="1043970" cy="18288"/>
+          </a:xfrm>
+          <a:prstGeom prst="rect">
+            <a:avLst/>
+          </a:prstGeom>
+          <a:solidFill>
+            <a:srgbClr val="4BC7D6"/>
+          </a:solidFill>
+          <a:ln>
+            <a:noFill/>
+          </a:ln>
+          <a:effectLst/>
+        </p:spPr>
+        <p:style>
+          <a:lnRef idx="1">
+            <a:schemeClr val="accent1"/>
+          </a:lnRef>
+          <a:fillRef idx="3">
+            <a:schemeClr val="accent1"/>
+          </a:fillRef>
+          <a:effectRef idx="2">
+            <a:schemeClr val="accent1"/>
+          </a:effectRef>
+          <a:fontRef idx="minor">
+            <a:schemeClr val="lt1"/>
+          </a:fontRef>
+        </p:style>
+        <p:txBody>
+          <a:bodyPr rtlCol="0" anchor="ctr"/>
+          <a:lstStyle/>
+          <a:p/>
+        </p:txBody>
+      </p:sp>
+      <p:sp>
+        <p:nvSpPr>
+          <p:cNvPr id="6" name="Rectangle 5"/>
+          <p:cNvSpPr/>
+          <p:nvPr/>
+        </p:nvSpPr>
+        <p:spPr>
+          <a:xfrm>
+            <a:off x="9047988" y="3459805"/>
+            <a:ext cx="1043970" cy="18288"/>
+          </a:xfrm>
+          <a:prstGeom prst="rect">
+            <a:avLst/>
+          </a:prstGeom>
+          <a:solidFill>
+            <a:srgbClr val="4BC7D6"/>
+          </a:solidFill>
+          <a:ln>
+            <a:noFill/>
+          </a:ln>
+          <a:effectLst/>
+        </p:spPr>
+        <p:style>
+          <a:lnRef idx="1">
+            <a:schemeClr val="accent1"/>
+          </a:lnRef>
+          <a:fillRef idx="3">
+            <a:schemeClr val="accent1"/>
+          </a:fillRef>
+          <a:effectRef idx="2">
+            <a:schemeClr val="accent1"/>
+          </a:effectRef>
+          <a:fontRef idx="minor">
+            <a:schemeClr val="lt1"/>
+          </a:fontRef>
+        </p:style>
+        <p:txBody>
+          <a:bodyPr rtlCol="0" anchor="ctr"/>
+          <a:lstStyle/>
+          <a:p/>
+        </p:txBody>
+      </p:sp>
+      <p:sp>
+        <p:nvSpPr>
+          <p:cNvPr id="7" name="TextBox 6"/>
+          <p:cNvSpPr txBox="1"/>
+          <p:nvPr/>
+        </p:nvSpPr>
+        <p:spPr>
+          <a:xfrm>
+            <a:off x="658368" y="342351"/>
+            <a:ext cx="5437632" cy="209929"/>
+          </a:xfrm>
+          <a:prstGeom prst="rect">
+            <a:avLst/>
+          </a:prstGeom>
+          <a:noFill/>
+        </p:spPr>
+        <p:txBody>
+          <a:bodyPr wrap="square" anchor="t" lIns="0" rIns="0" tIns="0" bIns="0">
+            <a:normAutofit/>
+          </a:bodyPr>
+          <a:lstStyle/>
+          <a:p>
+            <a:pPr algn="l">
+              <a:lnSpc>
+                <a:spcPct val="97445"/>
+              </a:lnSpc>
+            </a:pPr>
+            <a:r>
+              <a:rPr sz="1100" b="0" spc="70">
+                <a:solidFill>
+                  <a:srgbClr val="8DA0AE"/>
+                </a:solidFill>
+                <a:latin typeface="Inter SemiBold"/>
+                <a:cs typeface="Inter SemiBold"/>
+                <a:sym typeface="Inter SemiBold"/>
+              </a:rPr>
+              <a:t>TRISHULI-FLOOD-MAPPING</a:t>
+            </a:r>
+          </a:p>
+        </p:txBody>
+      </p:sp>
+      <p:sp>
+        <p:nvSpPr>
+          <p:cNvPr id="8" name="TextBox 7"/>
+          <p:cNvSpPr txBox="1"/>
+          <p:nvPr/>
+        </p:nvSpPr>
+        <p:spPr>
+          <a:xfrm>
+            <a:off x="10253472" y="342351"/>
+            <a:ext cx="1280160" cy="187924"/>
+          </a:xfrm>
+          <a:prstGeom prst="rect">
+            <a:avLst/>
+          </a:prstGeom>
+          <a:noFill/>
+        </p:spPr>
+        <p:txBody>
+          <a:bodyPr wrap="square" anchor="t" lIns="0" rIns="0" tIns="0" bIns="0">
+            <a:normAutofit/>
+          </a:bodyPr>
+          <a:lstStyle/>
+          <a:p>
+            <a:pPr algn="r">
+              <a:lnSpc>
+                <a:spcPct val="97445"/>
+              </a:lnSpc>
+            </a:pPr>
+            <a:r>
+              <a:rPr sz="1100" b="0" spc="70">
+                <a:solidFill>
+                  <a:srgbClr val="8DA0AE"/>
+                </a:solidFill>
+                <a:latin typeface="Inter SemiBold"/>
+                <a:cs typeface="Inter SemiBold"/>
+                <a:sym typeface="Inter SemiBold"/>
+              </a:rPr>
+              <a:t>12 / 13</a:t>
+            </a:r>
+          </a:p>
+        </p:txBody>
+      </p:sp>
+      <p:sp>
+        <p:nvSpPr>
+          <p:cNvPr id="9" name="TextBox 8"/>
+          <p:cNvSpPr txBox="1"/>
+          <p:nvPr/>
+        </p:nvSpPr>
+        <p:spPr>
+          <a:xfrm>
+            <a:off x="658368" y="1788851"/>
+            <a:ext cx="7830190" cy="1309266"/>
+          </a:xfrm>
+          <a:prstGeom prst="rect">
+            <a:avLst/>
+          </a:prstGeom>
+          <a:noFill/>
+        </p:spPr>
+        <p:txBody>
+          <a:bodyPr wrap="square" anchor="t" lIns="0" rIns="0" tIns="0" bIns="0">
+            <a:normAutofit/>
+          </a:bodyPr>
+          <a:lstStyle/>
+          <a:p>
+            <a:pPr algn="l">
+              <a:lnSpc>
+                <a:spcPct val="88496"/>
+              </a:lnSpc>
+            </a:pPr>
+            <a:r>
+              <a:rPr sz="4000" b="0">
+                <a:solidFill>
+                  <a:srgbClr val="DCE6EE"/>
+                </a:solidFill>
+                <a:latin typeface="Space Grotesk Bold"/>
+                <a:cs typeface="Space Grotesk Bold"/>
+                <a:sym typeface="Space Grotesk Bold"/>
+              </a:rPr>
+              <a:t>Four limits bound what these numbers can claim</a:t>
+            </a:r>
+          </a:p>
+        </p:txBody>
+      </p:sp>
+      <p:sp>
+        <p:nvSpPr>
+          <p:cNvPr id="10" name="TextBox 9"/>
+          <p:cNvSpPr txBox="1"/>
+          <p:nvPr/>
+        </p:nvSpPr>
+        <p:spPr>
+          <a:xfrm>
+            <a:off x="658368" y="3193362"/>
+            <a:ext cx="2485644" cy="209929"/>
+          </a:xfrm>
+          <a:prstGeom prst="rect">
+            <a:avLst/>
+          </a:prstGeom>
+          <a:noFill/>
+        </p:spPr>
+        <p:txBody>
+          <a:bodyPr wrap="square" anchor="t" lIns="0" rIns="0" tIns="0" bIns="0">
+            <a:normAutofit/>
+          </a:bodyPr>
+          <a:lstStyle/>
+          <a:p>
+            <a:pPr algn="l">
+              <a:lnSpc>
+                <a:spcPct val="97445"/>
+              </a:lnSpc>
+            </a:pPr>
+            <a:r>
+              <a:rPr sz="1100" b="0" spc="70">
+                <a:solidFill>
+                  <a:srgbClr val="4BC7D6"/>
+                </a:solidFill>
+                <a:latin typeface="Inter SemiBold"/>
+                <a:cs typeface="Inter SemiBold"/>
+                <a:sym typeface="Inter SemiBold"/>
+              </a:rPr>
+              <a:t>ROUTE</a:t>
+            </a:r>
+          </a:p>
+        </p:txBody>
+      </p:sp>
+      <p:sp>
+        <p:nvSpPr>
+          <p:cNvPr id="11" name="TextBox 10"/>
+          <p:cNvSpPr txBox="1"/>
+          <p:nvPr/>
+        </p:nvSpPr>
+        <p:spPr>
+          <a:xfrm>
+            <a:off x="658368" y="3606109"/>
+            <a:ext cx="2485644" cy="1334292"/>
+          </a:xfrm>
+          <a:prstGeom prst="rect">
+            <a:avLst/>
+          </a:prstGeom>
+          <a:noFill/>
+        </p:spPr>
+        <p:txBody>
+          <a:bodyPr wrap="square" anchor="t" lIns="0" rIns="0" tIns="0" bIns="0">
+            <a:normAutofit/>
+          </a:bodyPr>
+          <a:lstStyle/>
+          <a:p>
+            <a:pPr algn="l">
+              <a:lnSpc>
+                <a:spcPct val="112734"/>
+              </a:lnSpc>
+            </a:pPr>
+            <a:r>
+              <a:rPr sz="1500" b="0">
+                <a:solidFill>
+                  <a:srgbClr val="DCE6EE"/>
+                </a:solidFill>
+                <a:latin typeface="Space Grotesk"/>
+                <a:cs typeface="Space Grotesk"/>
+                <a:sym typeface="Space Grotesk"/>
+              </a:rPr>
+              <a:t>Planetary Computer RTC is a cross-check only. SNAP is the route of record</a:t>
+            </a:r>
+          </a:p>
+        </p:txBody>
+      </p:sp>
+      <p:sp>
+        <p:nvSpPr>
+          <p:cNvPr id="12" name="TextBox 11"/>
+          <p:cNvSpPr txBox="1"/>
+          <p:nvPr/>
+        </p:nvSpPr>
+        <p:spPr>
+          <a:xfrm>
+            <a:off x="3454908" y="3193362"/>
+            <a:ext cx="2485644" cy="209929"/>
+          </a:xfrm>
+          <a:prstGeom prst="rect">
+            <a:avLst/>
+          </a:prstGeom>
+          <a:noFill/>
+        </p:spPr>
+        <p:txBody>
+          <a:bodyPr wrap="square" anchor="t" lIns="0" rIns="0" tIns="0" bIns="0">
+            <a:normAutofit/>
+          </a:bodyPr>
+          <a:lstStyle/>
+          <a:p>
+            <a:pPr algn="l">
+              <a:lnSpc>
+                <a:spcPct val="97445"/>
+              </a:lnSpc>
+            </a:pPr>
+            <a:r>
+              <a:rPr sz="1100" b="0" spc="70">
+                <a:solidFill>
+                  <a:srgbClr val="4BC7D6"/>
+                </a:solidFill>
+                <a:latin typeface="Inter SemiBold"/>
+                <a:cs typeface="Inter SemiBold"/>
+                <a:sym typeface="Inter SemiBold"/>
+              </a:rPr>
+              <a:t>TERAI</a:t>
+            </a:r>
+          </a:p>
+        </p:txBody>
+      </p:sp>
+      <p:sp>
+        <p:nvSpPr>
+          <p:cNvPr id="13" name="TextBox 12"/>
+          <p:cNvSpPr txBox="1"/>
+          <p:nvPr/>
+        </p:nvSpPr>
+        <p:spPr>
+          <a:xfrm>
+            <a:off x="3454908" y="3606109"/>
+            <a:ext cx="2485644" cy="1000719"/>
+          </a:xfrm>
+          <a:prstGeom prst="rect">
+            <a:avLst/>
+          </a:prstGeom>
+          <a:noFill/>
+        </p:spPr>
+        <p:txBody>
+          <a:bodyPr wrap="square" anchor="t" lIns="0" rIns="0" tIns="0" bIns="0">
+            <a:normAutofit/>
+          </a:bodyPr>
+          <a:lstStyle/>
+          <a:p>
+            <a:pPr algn="l">
+              <a:lnSpc>
+                <a:spcPct val="112734"/>
+              </a:lnSpc>
+            </a:pPr>
+            <a:r>
+              <a:rPr sz="1500" b="0">
+                <a:solidFill>
+                  <a:srgbClr val="DCE6EE"/>
+                </a:solidFill>
+                <a:latin typeface="Space Grotesk"/>
+                <a:cs typeface="Space Grotesk"/>
+                <a:sym typeface="Space Grotesk"/>
+              </a:rPr>
+              <a:t>Uncalibrated with a 17.37 km² minimum detectable area</a:t>
+            </a:r>
+          </a:p>
+        </p:txBody>
+      </p:sp>
+      <p:sp>
+        <p:nvSpPr>
+          <p:cNvPr id="14" name="TextBox 13"/>
+          <p:cNvSpPr txBox="1"/>
+          <p:nvPr/>
+        </p:nvSpPr>
+        <p:spPr>
+          <a:xfrm>
+            <a:off x="6251448" y="3193362"/>
+            <a:ext cx="2485644" cy="209929"/>
+          </a:xfrm>
+          <a:prstGeom prst="rect">
+            <a:avLst/>
+          </a:prstGeom>
+          <a:noFill/>
+        </p:spPr>
+        <p:txBody>
+          <a:bodyPr wrap="square" anchor="t" lIns="0" rIns="0" tIns="0" bIns="0">
+            <a:normAutofit/>
+          </a:bodyPr>
+          <a:lstStyle/>
+          <a:p>
+            <a:pPr algn="l">
+              <a:lnSpc>
+                <a:spcPct val="97445"/>
+              </a:lnSpc>
+            </a:pPr>
+            <a:r>
+              <a:rPr sz="1100" b="0" spc="70">
+                <a:solidFill>
+                  <a:srgbClr val="4BC7D6"/>
+                </a:solidFill>
+                <a:latin typeface="Inter SemiBold"/>
+                <a:cs typeface="Inter SemiBold"/>
+                <a:sym typeface="Inter SemiBold"/>
+              </a:rPr>
+              <a:t>EVIDENCE</a:t>
+            </a:r>
+          </a:p>
+        </p:txBody>
+      </p:sp>
+      <p:sp>
+        <p:nvSpPr>
+          <p:cNvPr id="15" name="TextBox 14"/>
+          <p:cNvSpPr txBox="1"/>
+          <p:nvPr/>
+        </p:nvSpPr>
+        <p:spPr>
+          <a:xfrm>
+            <a:off x="6251448" y="3606109"/>
+            <a:ext cx="2485644" cy="1667866"/>
+          </a:xfrm>
+          <a:prstGeom prst="rect">
+            <a:avLst/>
+          </a:prstGeom>
+          <a:noFill/>
+        </p:spPr>
+        <p:txBody>
+          <a:bodyPr wrap="square" anchor="t" lIns="0" rIns="0" tIns="0" bIns="0">
+            <a:normAutofit/>
+          </a:bodyPr>
+          <a:lstStyle/>
+          <a:p>
+            <a:pPr algn="l">
+              <a:lnSpc>
+                <a:spcPct val="112734"/>
+              </a:lnSpc>
+            </a:pPr>
+            <a:r>
+              <a:rPr sz="1500" b="0">
+                <a:solidFill>
+                  <a:srgbClr val="DCE6EE"/>
+                </a:solidFill>
+                <a:latin typeface="Space Grotesk"/>
+                <a:cs typeface="Space Grotesk"/>
+                <a:sym typeface="Space Grotesk"/>
+              </a:rPr>
+              <a:t>Himalayan chips are qualitative and unlabelled. Sentinel-2 does not confirm open water</a:t>
+            </a:r>
+          </a:p>
+        </p:txBody>
+      </p:sp>
+      <p:sp>
+        <p:nvSpPr>
+          <p:cNvPr id="16" name="TextBox 15"/>
+          <p:cNvSpPr txBox="1"/>
+          <p:nvPr/>
+        </p:nvSpPr>
+        <p:spPr>
+          <a:xfrm>
+            <a:off x="9047988" y="3193362"/>
+            <a:ext cx="2485644" cy="209929"/>
+          </a:xfrm>
+          <a:prstGeom prst="rect">
+            <a:avLst/>
+          </a:prstGeom>
+          <a:noFill/>
+        </p:spPr>
+        <p:txBody>
+          <a:bodyPr wrap="square" anchor="t" lIns="0" rIns="0" tIns="0" bIns="0">
+            <a:normAutofit/>
+          </a:bodyPr>
+          <a:lstStyle/>
+          <a:p>
+            <a:pPr algn="l">
+              <a:lnSpc>
+                <a:spcPct val="97445"/>
+              </a:lnSpc>
+            </a:pPr>
+            <a:r>
+              <a:rPr sz="1100" b="0" spc="70">
+                <a:solidFill>
+                  <a:srgbClr val="4BC7D6"/>
+                </a:solidFill>
+                <a:latin typeface="Inter SemiBold"/>
+                <a:cs typeface="Inter SemiBold"/>
+                <a:sym typeface="Inter SemiBold"/>
+              </a:rPr>
+              <a:t>SCOPE</a:t>
+            </a:r>
+          </a:p>
+        </p:txBody>
+      </p:sp>
+      <p:sp>
+        <p:nvSpPr>
+          <p:cNvPr id="17" name="TextBox 16"/>
+          <p:cNvSpPr txBox="1"/>
+          <p:nvPr/>
+        </p:nvSpPr>
+        <p:spPr>
+          <a:xfrm>
+            <a:off x="9047988" y="3606109"/>
+            <a:ext cx="2485644" cy="1295284"/>
+          </a:xfrm>
+          <a:prstGeom prst="rect">
+            <a:avLst/>
+          </a:prstGeom>
+          <a:noFill/>
+        </p:spPr>
+        <p:txBody>
+          <a:bodyPr wrap="square" anchor="t" lIns="0" rIns="0" tIns="0" bIns="0">
+            <a:normAutofit/>
+          </a:bodyPr>
+          <a:lstStyle/>
+          <a:p>
+            <a:pPr algn="l">
+              <a:lnSpc>
+                <a:spcPct val="112734"/>
+              </a:lnSpc>
+            </a:pPr>
+            <a:r>
+              <a:rPr sz="1500" b="0">
+                <a:solidFill>
+                  <a:srgbClr val="DCE6EE"/>
+                </a:solidFill>
+                <a:latin typeface="Space Grotesk"/>
+                <a:cs typeface="Space Grotesk"/>
+                <a:sym typeface="Space Grotesk"/>
+              </a:rPr>
+              <a:t>One track and one post scene. No imagery of victims anywhere</a:t>
+            </a:r>
+          </a:p>
+        </p:txBody>
+      </p:sp>
+    </p:spTree>
+  </p:cSld>
+  <p:clrMapOvr>
+    <a:masterClrMapping/>
+  </p:clrMapOvr>
+</p:sld>
+</file>
+
+<file path=ppt/slides/slide13.xml><?xml version="1.0" encoding="utf-8"?>
+<p:sld xmlns:a="http://schemas.openxmlformats.org/drawingml/2006/main" xmlns:p="http://schemas.openxmlformats.org/presentationml/2006/main" xmlns:r="http://schemas.openxmlformats.org/officeDocument/2006/relationships">
+  <p:cSld>
+    <p:bg>
+      <p:bgPr>
+        <a:solidFill>
+          <a:srgbClr val="0C1620"/>
+        </a:solidFill>
+        <a:effectLst/>
+      </p:bgPr>
+    </p:bg>
+    <p:spTree>
+      <p:nvGrpSpPr>
+        <p:cNvPr id="1" name=""/>
+        <p:cNvGrpSpPr/>
+        <p:nvPr/>
+      </p:nvGrpSpPr>
+      <p:grpSpPr/>
+      <p:sp>
+        <p:nvSpPr>
+          <p:cNvPr id="2" name="Rectangle 1"/>
+          <p:cNvSpPr/>
+          <p:nvPr/>
+        </p:nvSpPr>
+        <p:spPr>
+          <a:xfrm>
+            <a:off x="0" y="0"/>
+            <a:ext cx="276515" cy="6858000"/>
+          </a:xfrm>
+          <a:prstGeom prst="rect">
+            <a:avLst/>
+          </a:prstGeom>
+          <a:solidFill>
+            <a:srgbClr val="4BC7D6"/>
+          </a:solidFill>
+          <a:ln>
+            <a:noFill/>
+          </a:ln>
+          <a:effectLst/>
+        </p:spPr>
+        <p:style>
+          <a:lnRef idx="1">
+            <a:schemeClr val="accent1"/>
+          </a:lnRef>
+          <a:fillRef idx="3">
+            <a:schemeClr val="accent1"/>
+          </a:fillRef>
+          <a:effectRef idx="2">
+            <a:schemeClr val="accent1"/>
+          </a:effectRef>
+          <a:fontRef idx="minor">
+            <a:schemeClr val="lt1"/>
+          </a:fontRef>
+        </p:style>
+        <p:txBody>
+          <a:bodyPr rtlCol="0" anchor="ctr"/>
+          <a:lstStyle/>
+          <a:p/>
+        </p:txBody>
+      </p:sp>
+      <p:sp>
+        <p:nvSpPr>
+          <p:cNvPr id="3" name="Rectangle 2"/>
+          <p:cNvSpPr/>
+          <p:nvPr/>
+        </p:nvSpPr>
+        <p:spPr>
+          <a:xfrm>
+            <a:off x="658368" y="1455725"/>
+            <a:ext cx="1005840" cy="25603"/>
+          </a:xfrm>
+          <a:prstGeom prst="rect">
+            <a:avLst/>
+          </a:prstGeom>
+          <a:solidFill>
+            <a:srgbClr val="4BC7D6"/>
+          </a:solidFill>
+          <a:ln>
+            <a:noFill/>
+          </a:ln>
+          <a:effectLst/>
+        </p:spPr>
+        <p:style>
+          <a:lnRef idx="1">
+            <a:schemeClr val="accent1"/>
+          </a:lnRef>
+          <a:fillRef idx="3">
+            <a:schemeClr val="accent1"/>
+          </a:fillRef>
+          <a:effectRef idx="2">
+            <a:schemeClr val="accent1"/>
+          </a:effectRef>
+          <a:fontRef idx="minor">
+            <a:schemeClr val="lt1"/>
+          </a:fontRef>
+        </p:style>
+        <p:txBody>
+          <a:bodyPr rtlCol="0" anchor="ctr"/>
+          <a:lstStyle/>
+          <a:p/>
+        </p:txBody>
+      </p:sp>
+      <p:sp>
+        <p:nvSpPr>
+          <p:cNvPr id="4" name="TextBox 3"/>
+          <p:cNvSpPr txBox="1"/>
+          <p:nvPr/>
+        </p:nvSpPr>
+        <p:spPr>
+          <a:xfrm>
+            <a:off x="658368" y="342351"/>
+            <a:ext cx="5437632" cy="209929"/>
+          </a:xfrm>
+          <a:prstGeom prst="rect">
+            <a:avLst/>
+          </a:prstGeom>
+          <a:noFill/>
+        </p:spPr>
+        <p:txBody>
+          <a:bodyPr wrap="square" anchor="t" lIns="0" rIns="0" tIns="0" bIns="0">
+            <a:normAutofit/>
+          </a:bodyPr>
+          <a:lstStyle/>
+          <a:p>
+            <a:pPr algn="l">
+              <a:lnSpc>
+                <a:spcPct val="97445"/>
+              </a:lnSpc>
+            </a:pPr>
+            <a:r>
+              <a:rPr sz="1100" b="0" spc="70">
+                <a:solidFill>
+                  <a:srgbClr val="8DA0AE"/>
+                </a:solidFill>
+                <a:latin typeface="Inter SemiBold"/>
+                <a:cs typeface="Inter SemiBold"/>
+                <a:sym typeface="Inter SemiBold"/>
+              </a:rPr>
+              <a:t>TRISHULI-FLOOD-MAPPING</a:t>
+            </a:r>
+          </a:p>
+        </p:txBody>
+      </p:sp>
+      <p:sp>
+        <p:nvSpPr>
+          <p:cNvPr id="5" name="TextBox 4"/>
+          <p:cNvSpPr txBox="1"/>
+          <p:nvPr/>
+        </p:nvSpPr>
+        <p:spPr>
+          <a:xfrm>
+            <a:off x="10253472" y="342351"/>
+            <a:ext cx="1280160" cy="187924"/>
+          </a:xfrm>
+          <a:prstGeom prst="rect">
+            <a:avLst/>
+          </a:prstGeom>
+          <a:noFill/>
+        </p:spPr>
+        <p:txBody>
+          <a:bodyPr wrap="square" anchor="t" lIns="0" rIns="0" tIns="0" bIns="0">
+            <a:normAutofit/>
+          </a:bodyPr>
+          <a:lstStyle/>
+          <a:p>
+            <a:pPr algn="r">
+              <a:lnSpc>
+                <a:spcPct val="97445"/>
+              </a:lnSpc>
+            </a:pPr>
+            <a:r>
+              <a:rPr sz="1100" b="0" spc="70">
+                <a:solidFill>
+                  <a:srgbClr val="8DA0AE"/>
+                </a:solidFill>
+                <a:latin typeface="Inter SemiBold"/>
+                <a:cs typeface="Inter SemiBold"/>
+                <a:sym typeface="Inter SemiBold"/>
+              </a:rPr>
+              <a:t>13 / 13</a:t>
+            </a:r>
+          </a:p>
+        </p:txBody>
+      </p:sp>
+      <p:sp>
+        <p:nvSpPr>
+          <p:cNvPr id="6" name="TextBox 5"/>
+          <p:cNvSpPr txBox="1"/>
+          <p:nvPr/>
+        </p:nvSpPr>
+        <p:spPr>
+          <a:xfrm>
+            <a:off x="658368" y="1766621"/>
+            <a:ext cx="8047695" cy="209929"/>
+          </a:xfrm>
+          <a:prstGeom prst="rect">
+            <a:avLst/>
+          </a:prstGeom>
+          <a:noFill/>
+        </p:spPr>
+        <p:txBody>
+          <a:bodyPr wrap="square" anchor="t" lIns="0" rIns="0" tIns="0" bIns="0">
+            <a:normAutofit/>
+          </a:bodyPr>
+          <a:lstStyle/>
+          <a:p>
+            <a:pPr algn="l">
+              <a:lnSpc>
+                <a:spcPct val="97445"/>
+              </a:lnSpc>
+            </a:pPr>
+            <a:r>
+              <a:rPr sz="1100" b="0" spc="70">
+                <a:solidFill>
+                  <a:srgbClr val="4BC7D6"/>
+                </a:solidFill>
+                <a:latin typeface="Inter SemiBold"/>
+                <a:cs typeface="Inter SemiBold"/>
+                <a:sym typeface="Inter SemiBold"/>
+              </a:rPr>
+              <a:t>TRY IT</a:t>
+            </a:r>
+          </a:p>
+        </p:txBody>
+      </p:sp>
+      <p:sp>
+        <p:nvSpPr>
+          <p:cNvPr id="7" name="TextBox 6"/>
+          <p:cNvSpPr txBox="1"/>
+          <p:nvPr/>
+        </p:nvSpPr>
+        <p:spPr>
+          <a:xfrm>
+            <a:off x="658368" y="1996489"/>
+            <a:ext cx="8047695" cy="1396550"/>
+          </a:xfrm>
+          <a:prstGeom prst="rect">
+            <a:avLst/>
+          </a:prstGeom>
+          <a:noFill/>
+        </p:spPr>
+        <p:txBody>
+          <a:bodyPr wrap="square" anchor="t" lIns="0" rIns="0" tIns="0" bIns="0">
+            <a:normAutofit/>
+          </a:bodyPr>
+          <a:lstStyle/>
+          <a:p>
+            <a:pPr algn="l">
+              <a:lnSpc>
+                <a:spcPct val="88496"/>
+              </a:lnSpc>
+            </a:pPr>
+            <a:r>
+              <a:rPr sz="4264" b="0">
+                <a:solidFill>
+                  <a:srgbClr val="DCE6EE"/>
+                </a:solidFill>
+                <a:latin typeface="Space Grotesk Bold"/>
+                <a:cs typeface="Space Grotesk Bold"/>
+                <a:sym typeface="Space Grotesk Bold"/>
+              </a:rPr>
+              <a:t>Run it on any area and date from the public repo</a:t>
+            </a:r>
+          </a:p>
+        </p:txBody>
+      </p:sp>
+      <p:sp>
+        <p:nvSpPr>
+          <p:cNvPr id="8" name="TextBox 7"/>
+          <p:cNvSpPr txBox="1"/>
+          <p:nvPr/>
+        </p:nvSpPr>
+        <p:spPr>
+          <a:xfrm>
+            <a:off x="658368" y="3495853"/>
+            <a:ext cx="5981395" cy="1130000"/>
+          </a:xfrm>
+          <a:prstGeom prst="rect">
+            <a:avLst/>
+          </a:prstGeom>
+          <a:noFill/>
+        </p:spPr>
+        <p:txBody>
+          <a:bodyPr wrap="square" anchor="t" lIns="0" rIns="0" tIns="0" bIns="0">
+            <a:normAutofit/>
+          </a:bodyPr>
+          <a:lstStyle/>
+          <a:p>
+            <a:pPr algn="l">
+              <a:lnSpc>
+                <a:spcPct val="104905"/>
+              </a:lnSpc>
+            </a:pPr>
+            <a:r>
+              <a:rPr sz="1900" b="0">
+                <a:solidFill>
+                  <a:srgbClr val="8DA0AE"/>
+                </a:solidFill>
+                <a:latin typeface="Space Grotesk"/>
+                <a:cs typeface="Space Grotesk"/>
+                <a:sym typeface="Space Grotesk"/>
+              </a:rPr>
+              <a:t>README and docs/REPORT.pdf hold the method and validation. Every input is free and open.</a:t>
+            </a:r>
+          </a:p>
+        </p:txBody>
+      </p:sp>
+      <p:sp>
+        <p:nvSpPr>
+          <p:cNvPr id="9" name="TextBox 8"/>
+          <p:cNvSpPr txBox="1"/>
+          <p:nvPr/>
+        </p:nvSpPr>
+        <p:spPr>
+          <a:xfrm>
+            <a:off x="658368" y="5285232"/>
+            <a:ext cx="3320288" cy="209929"/>
+          </a:xfrm>
+          <a:prstGeom prst="rect">
+            <a:avLst/>
+          </a:prstGeom>
+          <a:noFill/>
+        </p:spPr>
+        <p:txBody>
+          <a:bodyPr wrap="square" anchor="t" lIns="0" rIns="0" tIns="0" bIns="0">
+            <a:normAutofit/>
+          </a:bodyPr>
+          <a:lstStyle/>
+          <a:p>
+            <a:pPr algn="l">
+              <a:lnSpc>
+                <a:spcPct val="97445"/>
+              </a:lnSpc>
+            </a:pPr>
+            <a:r>
+              <a:rPr sz="1100" b="0" spc="70">
+                <a:solidFill>
+                  <a:srgbClr val="4BC7D6"/>
+                </a:solidFill>
+                <a:latin typeface="Inter SemiBold"/>
+                <a:cs typeface="Inter SemiBold"/>
+                <a:sym typeface="Inter SemiBold"/>
+              </a:rPr>
+              <a:t>CODE</a:t>
+            </a:r>
+          </a:p>
+        </p:txBody>
+      </p:sp>
+      <p:sp>
+        <p:nvSpPr>
+          <p:cNvPr id="10" name="TextBox 9"/>
+          <p:cNvSpPr txBox="1"/>
+          <p:nvPr/>
+        </p:nvSpPr>
+        <p:spPr>
+          <a:xfrm>
+            <a:off x="658368" y="5515100"/>
+            <a:ext cx="3320288" cy="333573"/>
+          </a:xfrm>
+          <a:prstGeom prst="rect">
+            <a:avLst/>
+          </a:prstGeom>
+          <a:noFill/>
+        </p:spPr>
+        <p:txBody>
+          <a:bodyPr wrap="square" anchor="t" lIns="0" rIns="0" tIns="0" bIns="0">
+            <a:normAutofit/>
+          </a:bodyPr>
+          <a:lstStyle/>
+          <a:p>
+            <a:pPr algn="l">
+              <a:lnSpc>
+                <a:spcPct val="112734"/>
+              </a:lnSpc>
+            </a:pPr>
+            <a:r>
+              <a:rPr sz="1500" b="0">
+                <a:solidFill>
+                  <a:srgbClr val="8DA0AE"/>
+                </a:solidFill>
+                <a:latin typeface="Space Grotesk"/>
+                <a:cs typeface="Space Grotesk"/>
+                <a:sym typeface="Space Grotesk"/>
+              </a:rPr>
+              <a:t>Public GitHub repo</a:t>
+            </a:r>
+          </a:p>
+        </p:txBody>
+      </p:sp>
+      <p:sp>
+        <p:nvSpPr>
+          <p:cNvPr id="11" name="TextBox 10"/>
+          <p:cNvSpPr txBox="1"/>
+          <p:nvPr/>
+        </p:nvSpPr>
+        <p:spPr>
+          <a:xfrm>
+            <a:off x="4435856" y="5285232"/>
+            <a:ext cx="3320288" cy="209929"/>
+          </a:xfrm>
+          <a:prstGeom prst="rect">
+            <a:avLst/>
+          </a:prstGeom>
+          <a:noFill/>
+        </p:spPr>
+        <p:txBody>
+          <a:bodyPr wrap="square" anchor="t" lIns="0" rIns="0" tIns="0" bIns="0">
+            <a:normAutofit/>
+          </a:bodyPr>
+          <a:lstStyle/>
+          <a:p>
+            <a:pPr algn="l">
+              <a:lnSpc>
+                <a:spcPct val="97445"/>
+              </a:lnSpc>
+            </a:pPr>
+            <a:r>
+              <a:rPr sz="1100" b="0" spc="70">
+                <a:solidFill>
+                  <a:srgbClr val="4BC7D6"/>
+                </a:solidFill>
+                <a:latin typeface="Inter SemiBold"/>
+                <a:cs typeface="Inter SemiBold"/>
+                <a:sym typeface="Inter SemiBold"/>
+              </a:rPr>
+              <a:t>DATA</a:t>
+            </a:r>
+          </a:p>
+        </p:txBody>
+      </p:sp>
+      <p:sp>
+        <p:nvSpPr>
+          <p:cNvPr id="12" name="TextBox 11"/>
+          <p:cNvSpPr txBox="1"/>
+          <p:nvPr/>
+        </p:nvSpPr>
+        <p:spPr>
+          <a:xfrm>
+            <a:off x="4435856" y="5515100"/>
+            <a:ext cx="3320288" cy="333573"/>
+          </a:xfrm>
+          <a:prstGeom prst="rect">
+            <a:avLst/>
+          </a:prstGeom>
+          <a:noFill/>
+        </p:spPr>
+        <p:txBody>
+          <a:bodyPr wrap="square" anchor="t" lIns="0" rIns="0" tIns="0" bIns="0">
+            <a:normAutofit/>
+          </a:bodyPr>
+          <a:lstStyle/>
+          <a:p>
+            <a:pPr algn="l">
+              <a:lnSpc>
+                <a:spcPct val="112734"/>
+              </a:lnSpc>
+            </a:pPr>
+            <a:r>
+              <a:rPr sz="1500" b="0">
+                <a:solidFill>
+                  <a:srgbClr val="8DA0AE"/>
+                </a:solidFill>
+                <a:latin typeface="Space Grotesk"/>
+                <a:cs typeface="Space Grotesk"/>
+                <a:sym typeface="Space Grotesk"/>
+              </a:rPr>
+              <a:t>Sentinel-1, GLO-30 DEM, OSM</a:t>
+            </a:r>
+          </a:p>
+        </p:txBody>
+      </p:sp>
+      <p:sp>
+        <p:nvSpPr>
+          <p:cNvPr id="13" name="TextBox 12"/>
+          <p:cNvSpPr txBox="1"/>
+          <p:nvPr/>
+        </p:nvSpPr>
+        <p:spPr>
+          <a:xfrm>
+            <a:off x="8213344" y="5285232"/>
+            <a:ext cx="3320288" cy="209929"/>
+          </a:xfrm>
+          <a:prstGeom prst="rect">
+            <a:avLst/>
+          </a:prstGeom>
+          <a:noFill/>
+        </p:spPr>
+        <p:txBody>
+          <a:bodyPr wrap="square" anchor="t" lIns="0" rIns="0" tIns="0" bIns="0">
+            <a:normAutofit/>
+          </a:bodyPr>
+          <a:lstStyle/>
+          <a:p>
+            <a:pPr algn="l">
+              <a:lnSpc>
+                <a:spcPct val="97445"/>
+              </a:lnSpc>
+            </a:pPr>
+            <a:r>
+              <a:rPr sz="1100" b="0" spc="70">
+                <a:solidFill>
+                  <a:srgbClr val="4BC7D6"/>
+                </a:solidFill>
+                <a:latin typeface="Inter SemiBold"/>
+                <a:cs typeface="Inter SemiBold"/>
+                <a:sym typeface="Inter SemiBold"/>
+              </a:rPr>
+              <a:t>CREDIT</a:t>
+            </a:r>
+          </a:p>
+        </p:txBody>
+      </p:sp>
+      <p:sp>
+        <p:nvSpPr>
+          <p:cNvPr id="14" name="TextBox 13"/>
+          <p:cNvSpPr txBox="1"/>
+          <p:nvPr/>
+        </p:nvSpPr>
+        <p:spPr>
+          <a:xfrm>
+            <a:off x="8213344" y="5515100"/>
+            <a:ext cx="3320288" cy="333573"/>
+          </a:xfrm>
+          <a:prstGeom prst="rect">
+            <a:avLst/>
+          </a:prstGeom>
+          <a:noFill/>
+        </p:spPr>
+        <p:txBody>
+          <a:bodyPr wrap="square" anchor="t" lIns="0" rIns="0" tIns="0" bIns="0">
+            <a:normAutofit/>
+          </a:bodyPr>
+          <a:lstStyle/>
+          <a:p>
+            <a:pPr algn="l">
+              <a:lnSpc>
+                <a:spcPct val="112734"/>
+              </a:lnSpc>
+            </a:pPr>
+            <a:r>
+              <a:rPr sz="1500" b="0">
+                <a:solidFill>
+                  <a:srgbClr val="8DA0AE"/>
+                </a:solidFill>
+                <a:latin typeface="Space Grotesk"/>
+                <a:cs typeface="Space Grotesk"/>
+                <a:sym typeface="Space Grotesk"/>
+              </a:rPr>
+              <a:t>Copernicus EMS data</a:t>
             </a:r>
           </a:p>
         </p:txBody>
@@ -3168,6 +7416,14 @@
 <file path=ppt/slides/slide2.xml><?xml version="1.0" encoding="utf-8"?>
 <p:sld xmlns:a="http://schemas.openxmlformats.org/drawingml/2006/main" xmlns:p="http://schemas.openxmlformats.org/presentationml/2006/main" xmlns:r="http://schemas.openxmlformats.org/officeDocument/2006/relationships">
   <p:cSld>
+    <p:bg>
+      <p:bgPr>
+        <a:solidFill>
+          <a:srgbClr val="0C1620"/>
+        </a:solidFill>
+        <a:effectLst/>
+      </p:bgPr>
+    </p:bg>
     <p:spTree>
       <p:nvGrpSpPr>
         <p:cNvPr id="1" name=""/>
@@ -3177,61 +7433,661 @@
       <p:grpSpPr/>
       <p:sp>
         <p:nvSpPr>
-          <p:cNvPr id="2" name="Title 1"/>
-          <p:cNvSpPr>
-            <a:spLocks noGrp="1"/>
-          </p:cNvSpPr>
-          <p:nvPr>
-            <p:ph type="title"/>
-          </p:nvPr>
-        </p:nvSpPr>
-        <p:spPr/>
-        <p:txBody>
-          <a:bodyPr/>
-          <a:lstStyle/>
-          <a:p>
-            <a:r>
-              <a:t>Problem</a:t>
-            </a:r>
-          </a:p>
-        </p:txBody>
-      </p:sp>
-      <p:sp>
-        <p:nvSpPr>
-          <p:cNvPr id="3" name="Content Placeholder 2"/>
-          <p:cNvSpPr>
-            <a:spLocks noGrp="1"/>
-          </p:cNvSpPr>
-          <p:nvPr>
-            <p:ph idx="1"/>
-          </p:nvPr>
-        </p:nvSpPr>
-        <p:spPr/>
-        <p:txBody>
-          <a:bodyPr/>
-          <a:lstStyle/>
-          <a:p>
-            <a:pPr>
-              <a:defRPr sz="2200"/>
-            </a:pPr>
-            <a:r>
-              <a:t>• Event date 2026-08-26, Trishuli / Bhote Koshi, Rasuwa, Nepal</a:t>
-            </a:r>
-          </a:p>
-          <a:p>
-            <a:pPr>
-              <a:defRPr sz="2200"/>
-            </a:pPr>
-            <a:r>
-              <a:t>• Can free Sentinel-1 data show where the valley floor changed, and what is exposed?</a:t>
-            </a:r>
-          </a:p>
-          <a:p>
-            <a:pPr>
-              <a:defRPr sz="2200"/>
-            </a:pPr>
-            <a:r>
-              <a:t>• Checking only: Copernicus EMS products (EMSR927 GRA: landslide polygons and damage points, no flood-extent layer)</a:t>
+          <p:cNvPr id="2" name="Rectangle 1"/>
+          <p:cNvSpPr/>
+          <p:nvPr/>
+        </p:nvSpPr>
+        <p:spPr>
+          <a:xfrm>
+            <a:off x="0" y="0"/>
+            <a:ext cx="276515" cy="6858000"/>
+          </a:xfrm>
+          <a:prstGeom prst="rect">
+            <a:avLst/>
+          </a:prstGeom>
+          <a:solidFill>
+            <a:srgbClr val="4BC7D6"/>
+          </a:solidFill>
+          <a:ln>
+            <a:noFill/>
+          </a:ln>
+          <a:effectLst/>
+        </p:spPr>
+        <p:style>
+          <a:lnRef idx="1">
+            <a:schemeClr val="accent1"/>
+          </a:lnRef>
+          <a:fillRef idx="3">
+            <a:schemeClr val="accent1"/>
+          </a:fillRef>
+          <a:effectRef idx="2">
+            <a:schemeClr val="accent1"/>
+          </a:effectRef>
+          <a:fontRef idx="minor">
+            <a:schemeClr val="lt1"/>
+          </a:fontRef>
+        </p:style>
+        <p:txBody>
+          <a:bodyPr rtlCol="0" anchor="ctr"/>
+          <a:lstStyle/>
+          <a:p/>
+        </p:txBody>
+      </p:sp>
+      <p:sp>
+        <p:nvSpPr>
+          <p:cNvPr id="3" name="Rectangle 2"/>
+          <p:cNvSpPr/>
+          <p:nvPr/>
+        </p:nvSpPr>
+        <p:spPr>
+          <a:xfrm>
+            <a:off x="658368" y="3313501"/>
+            <a:ext cx="1043970" cy="18288"/>
+          </a:xfrm>
+          <a:prstGeom prst="rect">
+            <a:avLst/>
+          </a:prstGeom>
+          <a:solidFill>
+            <a:srgbClr val="4BC7D6"/>
+          </a:solidFill>
+          <a:ln>
+            <a:noFill/>
+          </a:ln>
+          <a:effectLst/>
+        </p:spPr>
+        <p:style>
+          <a:lnRef idx="1">
+            <a:schemeClr val="accent1"/>
+          </a:lnRef>
+          <a:fillRef idx="3">
+            <a:schemeClr val="accent1"/>
+          </a:fillRef>
+          <a:effectRef idx="2">
+            <a:schemeClr val="accent1"/>
+          </a:effectRef>
+          <a:fontRef idx="minor">
+            <a:schemeClr val="lt1"/>
+          </a:fontRef>
+        </p:style>
+        <p:txBody>
+          <a:bodyPr rtlCol="0" anchor="ctr"/>
+          <a:lstStyle/>
+          <a:p/>
+        </p:txBody>
+      </p:sp>
+      <p:sp>
+        <p:nvSpPr>
+          <p:cNvPr id="4" name="Rectangle 3"/>
+          <p:cNvSpPr/>
+          <p:nvPr/>
+        </p:nvSpPr>
+        <p:spPr>
+          <a:xfrm>
+            <a:off x="3454908" y="3313501"/>
+            <a:ext cx="1043970" cy="18288"/>
+          </a:xfrm>
+          <a:prstGeom prst="rect">
+            <a:avLst/>
+          </a:prstGeom>
+          <a:solidFill>
+            <a:srgbClr val="4BC7D6"/>
+          </a:solidFill>
+          <a:ln>
+            <a:noFill/>
+          </a:ln>
+          <a:effectLst/>
+        </p:spPr>
+        <p:style>
+          <a:lnRef idx="1">
+            <a:schemeClr val="accent1"/>
+          </a:lnRef>
+          <a:fillRef idx="3">
+            <a:schemeClr val="accent1"/>
+          </a:fillRef>
+          <a:effectRef idx="2">
+            <a:schemeClr val="accent1"/>
+          </a:effectRef>
+          <a:fontRef idx="minor">
+            <a:schemeClr val="lt1"/>
+          </a:fontRef>
+        </p:style>
+        <p:txBody>
+          <a:bodyPr rtlCol="0" anchor="ctr"/>
+          <a:lstStyle/>
+          <a:p/>
+        </p:txBody>
+      </p:sp>
+      <p:sp>
+        <p:nvSpPr>
+          <p:cNvPr id="5" name="Rectangle 4"/>
+          <p:cNvSpPr/>
+          <p:nvPr/>
+        </p:nvSpPr>
+        <p:spPr>
+          <a:xfrm>
+            <a:off x="6251448" y="3313501"/>
+            <a:ext cx="1043970" cy="18288"/>
+          </a:xfrm>
+          <a:prstGeom prst="rect">
+            <a:avLst/>
+          </a:prstGeom>
+          <a:solidFill>
+            <a:srgbClr val="4BC7D6"/>
+          </a:solidFill>
+          <a:ln>
+            <a:noFill/>
+          </a:ln>
+          <a:effectLst/>
+        </p:spPr>
+        <p:style>
+          <a:lnRef idx="1">
+            <a:schemeClr val="accent1"/>
+          </a:lnRef>
+          <a:fillRef idx="3">
+            <a:schemeClr val="accent1"/>
+          </a:fillRef>
+          <a:effectRef idx="2">
+            <a:schemeClr val="accent1"/>
+          </a:effectRef>
+          <a:fontRef idx="minor">
+            <a:schemeClr val="lt1"/>
+          </a:fontRef>
+        </p:style>
+        <p:txBody>
+          <a:bodyPr rtlCol="0" anchor="ctr"/>
+          <a:lstStyle/>
+          <a:p/>
+        </p:txBody>
+      </p:sp>
+      <p:sp>
+        <p:nvSpPr>
+          <p:cNvPr id="6" name="Rectangle 5"/>
+          <p:cNvSpPr/>
+          <p:nvPr/>
+        </p:nvSpPr>
+        <p:spPr>
+          <a:xfrm>
+            <a:off x="9047988" y="3313501"/>
+            <a:ext cx="1043970" cy="18288"/>
+          </a:xfrm>
+          <a:prstGeom prst="rect">
+            <a:avLst/>
+          </a:prstGeom>
+          <a:solidFill>
+            <a:srgbClr val="4BC7D6"/>
+          </a:solidFill>
+          <a:ln>
+            <a:noFill/>
+          </a:ln>
+          <a:effectLst/>
+        </p:spPr>
+        <p:style>
+          <a:lnRef idx="1">
+            <a:schemeClr val="accent1"/>
+          </a:lnRef>
+          <a:fillRef idx="3">
+            <a:schemeClr val="accent1"/>
+          </a:fillRef>
+          <a:effectRef idx="2">
+            <a:schemeClr val="accent1"/>
+          </a:effectRef>
+          <a:fontRef idx="minor">
+            <a:schemeClr val="lt1"/>
+          </a:fontRef>
+        </p:style>
+        <p:txBody>
+          <a:bodyPr rtlCol="0" anchor="ctr"/>
+          <a:lstStyle/>
+          <a:p/>
+        </p:txBody>
+      </p:sp>
+      <p:sp>
+        <p:nvSpPr>
+          <p:cNvPr id="7" name="TextBox 6"/>
+          <p:cNvSpPr txBox="1"/>
+          <p:nvPr/>
+        </p:nvSpPr>
+        <p:spPr>
+          <a:xfrm>
+            <a:off x="658368" y="342351"/>
+            <a:ext cx="5437632" cy="209929"/>
+          </a:xfrm>
+          <a:prstGeom prst="rect">
+            <a:avLst/>
+          </a:prstGeom>
+          <a:noFill/>
+        </p:spPr>
+        <p:txBody>
+          <a:bodyPr wrap="square" anchor="t" lIns="0" rIns="0" tIns="0" bIns="0">
+            <a:normAutofit/>
+          </a:bodyPr>
+          <a:lstStyle/>
+          <a:p>
+            <a:pPr algn="l">
+              <a:lnSpc>
+                <a:spcPct val="97445"/>
+              </a:lnSpc>
+            </a:pPr>
+            <a:r>
+              <a:rPr sz="1100" b="0" spc="70">
+                <a:solidFill>
+                  <a:srgbClr val="8DA0AE"/>
+                </a:solidFill>
+                <a:latin typeface="Inter SemiBold"/>
+                <a:cs typeface="Inter SemiBold"/>
+                <a:sym typeface="Inter SemiBold"/>
+              </a:rPr>
+              <a:t>TRISHULI-FLOOD-MAPPING</a:t>
+            </a:r>
+          </a:p>
+        </p:txBody>
+      </p:sp>
+      <p:sp>
+        <p:nvSpPr>
+          <p:cNvPr id="8" name="TextBox 7"/>
+          <p:cNvSpPr txBox="1"/>
+          <p:nvPr/>
+        </p:nvSpPr>
+        <p:spPr>
+          <a:xfrm>
+            <a:off x="10253472" y="342351"/>
+            <a:ext cx="1280160" cy="187924"/>
+          </a:xfrm>
+          <a:prstGeom prst="rect">
+            <a:avLst/>
+          </a:prstGeom>
+          <a:noFill/>
+        </p:spPr>
+        <p:txBody>
+          <a:bodyPr wrap="square" anchor="t" lIns="0" rIns="0" tIns="0" bIns="0">
+            <a:normAutofit/>
+          </a:bodyPr>
+          <a:lstStyle/>
+          <a:p>
+            <a:pPr algn="r">
+              <a:lnSpc>
+                <a:spcPct val="97445"/>
+              </a:lnSpc>
+            </a:pPr>
+            <a:r>
+              <a:rPr sz="1100" b="0" spc="70">
+                <a:solidFill>
+                  <a:srgbClr val="8DA0AE"/>
+                </a:solidFill>
+                <a:latin typeface="Inter SemiBold"/>
+                <a:cs typeface="Inter SemiBold"/>
+                <a:sym typeface="Inter SemiBold"/>
+              </a:rPr>
+              <a:t>02 / 13</a:t>
+            </a:r>
+          </a:p>
+        </p:txBody>
+      </p:sp>
+      <p:sp>
+        <p:nvSpPr>
+          <p:cNvPr id="9" name="TextBox 8"/>
+          <p:cNvSpPr txBox="1"/>
+          <p:nvPr/>
+        </p:nvSpPr>
+        <p:spPr>
+          <a:xfrm>
+            <a:off x="658368" y="1642547"/>
+            <a:ext cx="7830190" cy="1309266"/>
+          </a:xfrm>
+          <a:prstGeom prst="rect">
+            <a:avLst/>
+          </a:prstGeom>
+          <a:noFill/>
+        </p:spPr>
+        <p:txBody>
+          <a:bodyPr wrap="square" anchor="t" lIns="0" rIns="0" tIns="0" bIns="0">
+            <a:normAutofit/>
+          </a:bodyPr>
+          <a:lstStyle/>
+          <a:p>
+            <a:pPr algn="l">
+              <a:lnSpc>
+                <a:spcPct val="88496"/>
+              </a:lnSpc>
+            </a:pPr>
+            <a:r>
+              <a:rPr sz="4000" b="0">
+                <a:solidFill>
+                  <a:srgbClr val="DCE6EE"/>
+                </a:solidFill>
+                <a:latin typeface="Space Grotesk Bold"/>
+                <a:cs typeface="Space Grotesk Bold"/>
+                <a:sym typeface="Space Grotesk Bold"/>
+              </a:rPr>
+              <a:t>One command runs raw radar through to a sitrep</a:t>
+            </a:r>
+          </a:p>
+        </p:txBody>
+      </p:sp>
+      <p:sp>
+        <p:nvSpPr>
+          <p:cNvPr id="10" name="TextBox 9"/>
+          <p:cNvSpPr txBox="1"/>
+          <p:nvPr/>
+        </p:nvSpPr>
+        <p:spPr>
+          <a:xfrm>
+            <a:off x="658368" y="3047058"/>
+            <a:ext cx="2485644" cy="209929"/>
+          </a:xfrm>
+          <a:prstGeom prst="rect">
+            <a:avLst/>
+          </a:prstGeom>
+          <a:noFill/>
+        </p:spPr>
+        <p:txBody>
+          <a:bodyPr wrap="square" anchor="t" lIns="0" rIns="0" tIns="0" bIns="0">
+            <a:normAutofit/>
+          </a:bodyPr>
+          <a:lstStyle/>
+          <a:p>
+            <a:pPr algn="l">
+              <a:lnSpc>
+                <a:spcPct val="97445"/>
+              </a:lnSpc>
+            </a:pPr>
+            <a:r>
+              <a:rPr sz="1100" b="0" spc="70">
+                <a:solidFill>
+                  <a:srgbClr val="4BC7D6"/>
+                </a:solidFill>
+                <a:latin typeface="Inter SemiBold"/>
+                <a:cs typeface="Inter SemiBold"/>
+                <a:sym typeface="Inter SemiBold"/>
+              </a:rPr>
+              <a:t>CALIBRATE</a:t>
+            </a:r>
+          </a:p>
+        </p:txBody>
+      </p:sp>
+      <p:sp>
+        <p:nvSpPr>
+          <p:cNvPr id="11" name="TextBox 10"/>
+          <p:cNvSpPr txBox="1"/>
+          <p:nvPr/>
+        </p:nvSpPr>
+        <p:spPr>
+          <a:xfrm>
+            <a:off x="658368" y="3459805"/>
+            <a:ext cx="2485644" cy="1619105"/>
+          </a:xfrm>
+          <a:prstGeom prst="rect">
+            <a:avLst/>
+          </a:prstGeom>
+          <a:noFill/>
+        </p:spPr>
+        <p:txBody>
+          <a:bodyPr wrap="square" anchor="t" lIns="0" rIns="0" tIns="0" bIns="0">
+            <a:normAutofit/>
+          </a:bodyPr>
+          <a:lstStyle/>
+          <a:p>
+            <a:pPr algn="l">
+              <a:lnSpc>
+                <a:spcPct val="112734"/>
+              </a:lnSpc>
+            </a:pPr>
+            <a:r>
+              <a:rPr sz="1500" b="0">
+                <a:solidFill>
+                  <a:srgbClr val="DCE6EE"/>
+                </a:solidFill>
+                <a:latin typeface="Space Grotesk"/>
+                <a:cs typeface="Space Grotesk"/>
+                <a:sym typeface="Space Grotesk"/>
+              </a:rPr>
+              <a:t>SNAP: orbit file, noise removal, sigma0, terrain correction on a 30 m grid</a:t>
+            </a:r>
+          </a:p>
+        </p:txBody>
+      </p:sp>
+      <p:sp>
+        <p:nvSpPr>
+          <p:cNvPr id="12" name="TextBox 11"/>
+          <p:cNvSpPr txBox="1"/>
+          <p:nvPr/>
+        </p:nvSpPr>
+        <p:spPr>
+          <a:xfrm>
+            <a:off x="3454908" y="3047058"/>
+            <a:ext cx="2485644" cy="209929"/>
+          </a:xfrm>
+          <a:prstGeom prst="rect">
+            <a:avLst/>
+          </a:prstGeom>
+          <a:noFill/>
+        </p:spPr>
+        <p:txBody>
+          <a:bodyPr wrap="square" anchor="t" lIns="0" rIns="0" tIns="0" bIns="0">
+            <a:normAutofit/>
+          </a:bodyPr>
+          <a:lstStyle/>
+          <a:p>
+            <a:pPr algn="l">
+              <a:lnSpc>
+                <a:spcPct val="97445"/>
+              </a:lnSpc>
+            </a:pPr>
+            <a:r>
+              <a:rPr sz="1100" b="0" spc="70">
+                <a:solidFill>
+                  <a:srgbClr val="4BC7D6"/>
+                </a:solidFill>
+                <a:latin typeface="Inter SemiBold"/>
+                <a:cs typeface="Inter SemiBold"/>
+                <a:sym typeface="Inter SemiBold"/>
+              </a:rPr>
+              <a:t>DETECT</a:t>
+            </a:r>
+          </a:p>
+        </p:txBody>
+      </p:sp>
+      <p:sp>
+        <p:nvSpPr>
+          <p:cNvPr id="13" name="TextBox 12"/>
+          <p:cNvSpPr txBox="1"/>
+          <p:nvPr/>
+        </p:nvSpPr>
+        <p:spPr>
+          <a:xfrm>
+            <a:off x="3454908" y="3459805"/>
+            <a:ext cx="2485644" cy="2001439"/>
+          </a:xfrm>
+          <a:prstGeom prst="rect">
+            <a:avLst/>
+          </a:prstGeom>
+          <a:noFill/>
+        </p:spPr>
+        <p:txBody>
+          <a:bodyPr wrap="square" anchor="t" lIns="0" rIns="0" tIns="0" bIns="0">
+            <a:normAutofit/>
+          </a:bodyPr>
+          <a:lstStyle/>
+          <a:p>
+            <a:pPr algn="l">
+              <a:lnSpc>
+                <a:spcPct val="112734"/>
+              </a:lnSpc>
+            </a:pPr>
+            <a:r>
+              <a:rPr sz="1500" b="0">
+                <a:solidFill>
+                  <a:srgbClr val="DCE6EE"/>
+                </a:solidFill>
+                <a:latin typeface="Space Grotesk"/>
+                <a:cs typeface="Space Grotesk"/>
+                <a:sym typeface="Space Grotesk"/>
+              </a:rPr>
+              <a:t>Robust-z change against four same-track pre-event references. Gates come from pre-event null runs, never EMS</a:t>
+            </a:r>
+          </a:p>
+        </p:txBody>
+      </p:sp>
+      <p:sp>
+        <p:nvSpPr>
+          <p:cNvPr id="14" name="TextBox 13"/>
+          <p:cNvSpPr txBox="1"/>
+          <p:nvPr/>
+        </p:nvSpPr>
+        <p:spPr>
+          <a:xfrm>
+            <a:off x="6251448" y="3047058"/>
+            <a:ext cx="2485644" cy="209929"/>
+          </a:xfrm>
+          <a:prstGeom prst="rect">
+            <a:avLst/>
+          </a:prstGeom>
+          <a:noFill/>
+        </p:spPr>
+        <p:txBody>
+          <a:bodyPr wrap="square" anchor="t" lIns="0" rIns="0" tIns="0" bIns="0">
+            <a:normAutofit/>
+          </a:bodyPr>
+          <a:lstStyle/>
+          <a:p>
+            <a:pPr algn="l">
+              <a:lnSpc>
+                <a:spcPct val="97445"/>
+              </a:lnSpc>
+            </a:pPr>
+            <a:r>
+              <a:rPr sz="1100" b="0" spc="70">
+                <a:solidFill>
+                  <a:srgbClr val="4BC7D6"/>
+                </a:solidFill>
+                <a:latin typeface="Inter SemiBold"/>
+                <a:cs typeface="Inter SemiBold"/>
+                <a:sym typeface="Inter SemiBold"/>
+              </a:rPr>
+              <a:t>OVERLAY</a:t>
+            </a:r>
+          </a:p>
+        </p:txBody>
+      </p:sp>
+      <p:sp>
+        <p:nvSpPr>
+          <p:cNvPr id="15" name="TextBox 14"/>
+          <p:cNvSpPr txBox="1"/>
+          <p:nvPr/>
+        </p:nvSpPr>
+        <p:spPr>
+          <a:xfrm>
+            <a:off x="6251448" y="3459805"/>
+            <a:ext cx="2485644" cy="1619105"/>
+          </a:xfrm>
+          <a:prstGeom prst="rect">
+            <a:avLst/>
+          </a:prstGeom>
+          <a:noFill/>
+        </p:spPr>
+        <p:txBody>
+          <a:bodyPr wrap="square" anchor="t" lIns="0" rIns="0" tIns="0" bIns="0">
+            <a:normAutofit/>
+          </a:bodyPr>
+          <a:lstStyle/>
+          <a:p>
+            <a:pPr algn="l">
+              <a:lnSpc>
+                <a:spcPct val="112734"/>
+              </a:lnSpc>
+            </a:pPr>
+            <a:r>
+              <a:rPr sz="1500" b="0">
+                <a:solidFill>
+                  <a:srgbClr val="DCE6EE"/>
+                </a:solidFill>
+                <a:latin typeface="Space Grotesk"/>
+                <a:cs typeface="Space Grotesk"/>
+                <a:sym typeface="Space Grotesk"/>
+              </a:rPr>
+              <a:t>Pre-event OSM snapshot of 27 Jul 2026 for buildings, roads, bridges and hospitals</a:t>
+            </a:r>
+          </a:p>
+        </p:txBody>
+      </p:sp>
+      <p:sp>
+        <p:nvSpPr>
+          <p:cNvPr id="16" name="TextBox 15"/>
+          <p:cNvSpPr txBox="1"/>
+          <p:nvPr/>
+        </p:nvSpPr>
+        <p:spPr>
+          <a:xfrm>
+            <a:off x="9047988" y="3047058"/>
+            <a:ext cx="2485644" cy="209929"/>
+          </a:xfrm>
+          <a:prstGeom prst="rect">
+            <a:avLst/>
+          </a:prstGeom>
+          <a:noFill/>
+        </p:spPr>
+        <p:txBody>
+          <a:bodyPr wrap="square" anchor="t" lIns="0" rIns="0" tIns="0" bIns="0">
+            <a:normAutofit/>
+          </a:bodyPr>
+          <a:lstStyle/>
+          <a:p>
+            <a:pPr algn="l">
+              <a:lnSpc>
+                <a:spcPct val="97445"/>
+              </a:lnSpc>
+            </a:pPr>
+            <a:r>
+              <a:rPr sz="1100" b="0" spc="70">
+                <a:solidFill>
+                  <a:srgbClr val="4BC7D6"/>
+                </a:solidFill>
+                <a:latin typeface="Inter SemiBold"/>
+                <a:cs typeface="Inter SemiBold"/>
+                <a:sym typeface="Inter SemiBold"/>
+              </a:rPr>
+              <a:t>REPORT</a:t>
+            </a:r>
+          </a:p>
+        </p:txBody>
+      </p:sp>
+      <p:sp>
+        <p:nvSpPr>
+          <p:cNvPr id="17" name="TextBox 16"/>
+          <p:cNvSpPr txBox="1"/>
+          <p:nvPr/>
+        </p:nvSpPr>
+        <p:spPr>
+          <a:xfrm>
+            <a:off x="9047988" y="3459805"/>
+            <a:ext cx="2485644" cy="1295284"/>
+          </a:xfrm>
+          <a:prstGeom prst="rect">
+            <a:avLst/>
+          </a:prstGeom>
+          <a:noFill/>
+        </p:spPr>
+        <p:txBody>
+          <a:bodyPr wrap="square" anchor="t" lIns="0" rIns="0" tIns="0" bIns="0">
+            <a:normAutofit/>
+          </a:bodyPr>
+          <a:lstStyle/>
+          <a:p>
+            <a:pPr algn="l">
+              <a:lnSpc>
+                <a:spcPct val="112734"/>
+              </a:lnSpc>
+            </a:pPr>
+            <a:r>
+              <a:rPr sz="1500" b="0">
+                <a:solidFill>
+                  <a:srgbClr val="DCE6EE"/>
+                </a:solidFill>
+                <a:latin typeface="Space Grotesk"/>
+                <a:cs typeface="Space Grotesk"/>
+                <a:sym typeface="Space Grotesk"/>
+              </a:rPr>
+              <a:t>Offline dashboard plus one-page sitreps in English and Nepali</a:t>
             </a:r>
           </a:p>
         </p:txBody>
@@ -3247,6 +8103,14 @@
 <file path=ppt/slides/slide3.xml><?xml version="1.0" encoding="utf-8"?>
 <p:sld xmlns:a="http://schemas.openxmlformats.org/drawingml/2006/main" xmlns:p="http://schemas.openxmlformats.org/presentationml/2006/main" xmlns:r="http://schemas.openxmlformats.org/officeDocument/2006/relationships">
   <p:cSld>
+    <p:bg>
+      <p:bgPr>
+        <a:solidFill>
+          <a:srgbClr val="0C1620"/>
+        </a:solidFill>
+        <a:effectLst/>
+      </p:bgPr>
+    </p:bg>
     <p:spTree>
       <p:nvGrpSpPr>
         <p:cNvPr id="1" name=""/>
@@ -3256,69 +8120,247 @@
       <p:grpSpPr/>
       <p:sp>
         <p:nvSpPr>
-          <p:cNvPr id="2" name="Title 1"/>
-          <p:cNvSpPr>
-            <a:spLocks noGrp="1"/>
-          </p:cNvSpPr>
-          <p:nvPr>
-            <p:ph type="title"/>
-          </p:nvPr>
-        </p:nvSpPr>
-        <p:spPr/>
-        <p:txBody>
-          <a:bodyPr/>
-          <a:lstStyle/>
-          <a:p>
-            <a:r>
-              <a:t>Data</a:t>
-            </a:r>
-          </a:p>
-        </p:txBody>
-      </p:sp>
-      <p:sp>
-        <p:nvSpPr>
-          <p:cNvPr id="3" name="Content Placeholder 2"/>
-          <p:cNvSpPr>
-            <a:spLocks noGrp="1"/>
-          </p:cNvSpPr>
-          <p:nvPr>
-            <p:ph idx="1"/>
-          </p:nvPr>
-        </p:nvSpPr>
-        <p:spPr/>
-        <p:txBody>
-          <a:bodyPr/>
-          <a:lstStyle/>
-          <a:p>
-            <a:pPr>
-              <a:defRPr sz="2200"/>
-            </a:pPr>
-            <a:r>
-              <a:t>• Sentinel-1 GRD VV/VH, track asc85: references 2026-08-16, 2026-08-04, 2026-07-23, 2026-07-11; post 2026-08-28</a:t>
-            </a:r>
-          </a:p>
-          <a:p>
-            <a:pPr>
-              <a:defRPr sz="2200"/>
-            </a:pPr>
-            <a:r>
-              <a:t>• Copernicus GLO-30 DEM (HAND valley floor, radar layover / shadow mask)</a:t>
-            </a:r>
-          </a:p>
-          <a:p>
-            <a:pPr>
-              <a:defRPr sz="2200"/>
-            </a:pPr>
-            <a:r>
-              <a:t>• OpenStreetMap snapshot of 2026-07-27 (pre-event)</a:t>
-            </a:r>
-          </a:p>
-          <a:p>
-            <a:pPr>
-              <a:defRPr sz="2200"/>
-            </a:pPr>
-            <a:r>
-              <a:t>• EMS products used only for checking</a:t>
+          <p:cNvPr id="2" name="Rectangle 1"/>
+          <p:cNvSpPr/>
+          <p:nvPr/>
+        </p:nvSpPr>
+        <p:spPr>
+          <a:xfrm>
+            <a:off x="0" y="0"/>
+            <a:ext cx="276515" cy="6858000"/>
+          </a:xfrm>
+          <a:prstGeom prst="rect">
+            <a:avLst/>
+          </a:prstGeom>
+          <a:solidFill>
+            <a:srgbClr val="4BC7D6"/>
+          </a:solidFill>
+          <a:ln>
+            <a:noFill/>
+          </a:ln>
+          <a:effectLst/>
+        </p:spPr>
+        <p:style>
+          <a:lnRef idx="1">
+            <a:schemeClr val="accent1"/>
+          </a:lnRef>
+          <a:fillRef idx="3">
+            <a:schemeClr val="accent1"/>
+          </a:fillRef>
+          <a:effectRef idx="2">
+            <a:schemeClr val="accent1"/>
+          </a:effectRef>
+          <a:fontRef idx="minor">
+            <a:schemeClr val="lt1"/>
+          </a:fontRef>
+        </p:style>
+        <p:txBody>
+          <a:bodyPr rtlCol="0" anchor="ctr"/>
+          <a:lstStyle/>
+          <a:p/>
+        </p:txBody>
+      </p:sp>
+      <p:sp>
+        <p:nvSpPr>
+          <p:cNvPr id="3" name="TextBox 2"/>
+          <p:cNvSpPr txBox="1"/>
+          <p:nvPr/>
+        </p:nvSpPr>
+        <p:spPr>
+          <a:xfrm>
+            <a:off x="658368" y="342351"/>
+            <a:ext cx="5437632" cy="209929"/>
+          </a:xfrm>
+          <a:prstGeom prst="rect">
+            <a:avLst/>
+          </a:prstGeom>
+          <a:noFill/>
+        </p:spPr>
+        <p:txBody>
+          <a:bodyPr wrap="square" anchor="t" lIns="0" rIns="0" tIns="0" bIns="0">
+            <a:normAutofit/>
+          </a:bodyPr>
+          <a:lstStyle/>
+          <a:p>
+            <a:pPr algn="l">
+              <a:lnSpc>
+                <a:spcPct val="97445"/>
+              </a:lnSpc>
+            </a:pPr>
+            <a:r>
+              <a:rPr sz="1100" b="0" spc="70">
+                <a:solidFill>
+                  <a:srgbClr val="8DA0AE"/>
+                </a:solidFill>
+                <a:latin typeface="Inter SemiBold"/>
+                <a:cs typeface="Inter SemiBold"/>
+                <a:sym typeface="Inter SemiBold"/>
+              </a:rPr>
+              <a:t>TRISHULI-FLOOD-MAPPING</a:t>
+            </a:r>
+          </a:p>
+        </p:txBody>
+      </p:sp>
+      <p:sp>
+        <p:nvSpPr>
+          <p:cNvPr id="4" name="TextBox 3"/>
+          <p:cNvSpPr txBox="1"/>
+          <p:nvPr/>
+        </p:nvSpPr>
+        <p:spPr>
+          <a:xfrm>
+            <a:off x="10253472" y="342351"/>
+            <a:ext cx="1280160" cy="187924"/>
+          </a:xfrm>
+          <a:prstGeom prst="rect">
+            <a:avLst/>
+          </a:prstGeom>
+          <a:noFill/>
+        </p:spPr>
+        <p:txBody>
+          <a:bodyPr wrap="square" anchor="t" lIns="0" rIns="0" tIns="0" bIns="0">
+            <a:normAutofit/>
+          </a:bodyPr>
+          <a:lstStyle/>
+          <a:p>
+            <a:pPr algn="r">
+              <a:lnSpc>
+                <a:spcPct val="97445"/>
+              </a:lnSpc>
+            </a:pPr>
+            <a:r>
+              <a:rPr sz="1100" b="0" spc="70">
+                <a:solidFill>
+                  <a:srgbClr val="8DA0AE"/>
+                </a:solidFill>
+                <a:latin typeface="Inter SemiBold"/>
+                <a:cs typeface="Inter SemiBold"/>
+                <a:sym typeface="Inter SemiBold"/>
+              </a:rPr>
+              <a:t>03 / 13</a:t>
+            </a:r>
+          </a:p>
+        </p:txBody>
+      </p:sp>
+      <p:sp>
+        <p:nvSpPr>
+          <p:cNvPr id="5" name="TextBox 4"/>
+          <p:cNvSpPr txBox="1"/>
+          <p:nvPr/>
+        </p:nvSpPr>
+        <p:spPr>
+          <a:xfrm>
+            <a:off x="658368" y="1877446"/>
+            <a:ext cx="8700211" cy="894665"/>
+          </a:xfrm>
+          <a:prstGeom prst="rect">
+            <a:avLst/>
+          </a:prstGeom>
+          <a:noFill/>
+        </p:spPr>
+        <p:txBody>
+          <a:bodyPr wrap="square" anchor="t" lIns="0" rIns="0" tIns="0" bIns="0">
+            <a:normAutofit/>
+          </a:bodyPr>
+          <a:lstStyle/>
+          <a:p>
+            <a:pPr algn="l">
+              <a:lnSpc>
+                <a:spcPct val="88496"/>
+              </a:lnSpc>
+            </a:pPr>
+            <a:r>
+              <a:rPr sz="5400" b="0">
+                <a:solidFill>
+                  <a:srgbClr val="4BC7D6"/>
+                </a:solidFill>
+                <a:latin typeface="Space Grotesk Bold"/>
+                <a:cs typeface="Space Grotesk Bold"/>
+                <a:sym typeface="Space Grotesk Bold"/>
+              </a:rPr>
+              <a:t>01</a:t>
+            </a:r>
+          </a:p>
+        </p:txBody>
+      </p:sp>
+      <p:sp>
+        <p:nvSpPr>
+          <p:cNvPr id="6" name="TextBox 5"/>
+          <p:cNvSpPr txBox="1"/>
+          <p:nvPr/>
+        </p:nvSpPr>
+        <p:spPr>
+          <a:xfrm>
+            <a:off x="658368" y="2771968"/>
+            <a:ext cx="8700211" cy="1702046"/>
+          </a:xfrm>
+          <a:prstGeom prst="rect">
+            <a:avLst/>
+          </a:prstGeom>
+          <a:noFill/>
+        </p:spPr>
+        <p:txBody>
+          <a:bodyPr wrap="square" anchor="t" lIns="0" rIns="0" tIns="0" bIns="0">
+            <a:normAutofit/>
+          </a:bodyPr>
+          <a:lstStyle/>
+          <a:p>
+            <a:pPr algn="l">
+              <a:lnSpc>
+                <a:spcPct val="88496"/>
+              </a:lnSpc>
+            </a:pPr>
+            <a:r>
+              <a:rPr sz="5200" b="0">
+                <a:solidFill>
+                  <a:srgbClr val="DCE6EE"/>
+                </a:solidFill>
+                <a:latin typeface="Space Grotesk Bold"/>
+                <a:cs typeface="Space Grotesk Bold"/>
+                <a:sym typeface="Space Grotesk Bold"/>
+              </a:rPr>
+              <a:t>The radar change is real and not noise</a:t>
+            </a:r>
+          </a:p>
+        </p:txBody>
+      </p:sp>
+      <p:sp>
+        <p:nvSpPr>
+          <p:cNvPr id="7" name="TextBox 6"/>
+          <p:cNvSpPr txBox="1"/>
+          <p:nvPr/>
+        </p:nvSpPr>
+        <p:spPr>
+          <a:xfrm>
+            <a:off x="658368" y="4539311"/>
+            <a:ext cx="5981395" cy="776021"/>
+          </a:xfrm>
+          <a:prstGeom prst="rect">
+            <a:avLst/>
+          </a:prstGeom>
+          <a:noFill/>
+        </p:spPr>
+        <p:txBody>
+          <a:bodyPr wrap="square" anchor="t" lIns="0" rIns="0" tIns="0" bIns="0">
+            <a:normAutofit/>
+          </a:bodyPr>
+          <a:lstStyle/>
+          <a:p>
+            <a:pPr algn="l">
+              <a:lnSpc>
+                <a:spcPct val="104905"/>
+              </a:lnSpc>
+            </a:pPr>
+            <a:r>
+              <a:rPr sz="1900" b="0">
+                <a:solidFill>
+                  <a:srgbClr val="DCE6EE"/>
+                </a:solidFill>
+                <a:latin typeface="Space Grotesk"/>
+                <a:cs typeface="Space Grotesk"/>
+                <a:sym typeface="Space Grotesk"/>
+              </a:rPr>
+              <a:t>Each class is tested against four pre-event dates before it is reported.</a:t>
             </a:r>
           </a:p>
         </p:txBody>
@@ -3334,6 +8376,14 @@
 <file path=ppt/slides/slide4.xml><?xml version="1.0" encoding="utf-8"?>
 <p:sld xmlns:a="http://schemas.openxmlformats.org/drawingml/2006/main" xmlns:p="http://schemas.openxmlformats.org/presentationml/2006/main" xmlns:r="http://schemas.openxmlformats.org/officeDocument/2006/relationships">
   <p:cSld>
+    <p:bg>
+      <p:bgPr>
+        <a:solidFill>
+          <a:srgbClr val="0C1620"/>
+        </a:solidFill>
+        <a:effectLst/>
+      </p:bgPr>
+    </p:bg>
     <p:spTree>
       <p:nvGrpSpPr>
         <p:cNvPr id="1" name=""/>
@@ -3343,69 +8393,825 @@
       <p:grpSpPr/>
       <p:sp>
         <p:nvSpPr>
-          <p:cNvPr id="2" name="Title 1"/>
-          <p:cNvSpPr>
-            <a:spLocks noGrp="1"/>
-          </p:cNvSpPr>
-          <p:nvPr>
-            <p:ph type="title"/>
-          </p:nvPr>
-        </p:nvSpPr>
-        <p:spPr/>
-        <p:txBody>
-          <a:bodyPr/>
-          <a:lstStyle/>
-          <a:p>
-            <a:r>
-              <a:t>Method</a:t>
-            </a:r>
-          </a:p>
-        </p:txBody>
-      </p:sp>
-      <p:sp>
-        <p:nvSpPr>
-          <p:cNvPr id="3" name="Content Placeholder 2"/>
-          <p:cNvSpPr>
-            <a:spLocks noGrp="1"/>
-          </p:cNvSpPr>
-          <p:nvPr>
-            <p:ph idx="1"/>
-          </p:nvPr>
-        </p:nvSpPr>
-        <p:spPr/>
-        <p:txBody>
-          <a:bodyPr/>
-          <a:lstStyle/>
-          <a:p>
-            <a:pPr>
-              <a:defRPr sz="2200"/>
-            </a:pPr>
-            <a:r>
-              <a:t>1. SNAP: orbit file, noise removal, sigma0, terrain correction; 30 m grid</a:t>
-            </a:r>
-          </a:p>
-          <a:p>
-            <a:pPr>
-              <a:defRPr sz="2200"/>
-            </a:pPr>
-            <a:r>
-              <a:t>2. Robust-z change of the post scene against 4 pre-event references, valley floor only</a:t>
-            </a:r>
-          </a:p>
-          <a:p>
-            <a:pPr>
-              <a:defRPr sz="2200"/>
-            </a:pPr>
-            <a:r>
-              <a:t>3. Thresholds from leave-one-out null runs on pre-event dates (no EMS)</a:t>
-            </a:r>
-          </a:p>
-          <a:p>
-            <a:pPr>
-              <a:defRPr sz="2200"/>
-            </a:pPr>
-            <a:r>
-              <a:t>4. Overlay on pre-event OSM: exposure, bridges exposed, hospital access</a:t>
+          <p:cNvPr id="2" name="Rectangle 1"/>
+          <p:cNvSpPr/>
+          <p:nvPr/>
+        </p:nvSpPr>
+        <p:spPr>
+          <a:xfrm>
+            <a:off x="0" y="0"/>
+            <a:ext cx="276515" cy="6858000"/>
+          </a:xfrm>
+          <a:prstGeom prst="rect">
+            <a:avLst/>
+          </a:prstGeom>
+          <a:solidFill>
+            <a:srgbClr val="4BC7D6"/>
+          </a:solidFill>
+          <a:ln>
+            <a:noFill/>
+          </a:ln>
+          <a:effectLst/>
+        </p:spPr>
+        <p:style>
+          <a:lnRef idx="1">
+            <a:schemeClr val="accent1"/>
+          </a:lnRef>
+          <a:fillRef idx="3">
+            <a:schemeClr val="accent1"/>
+          </a:fillRef>
+          <a:effectRef idx="2">
+            <a:schemeClr val="accent1"/>
+          </a:effectRef>
+          <a:fontRef idx="minor">
+            <a:schemeClr val="lt1"/>
+          </a:fontRef>
+        </p:style>
+        <p:txBody>
+          <a:bodyPr rtlCol="0" anchor="ctr"/>
+          <a:lstStyle/>
+          <a:p/>
+        </p:txBody>
+      </p:sp>
+      <p:sp>
+        <p:nvSpPr>
+          <p:cNvPr id="3" name="Rectangle 2"/>
+          <p:cNvSpPr/>
+          <p:nvPr/>
+        </p:nvSpPr>
+        <p:spPr>
+          <a:xfrm>
+            <a:off x="658368" y="2274338"/>
+            <a:ext cx="2540508" cy="3632150"/>
+          </a:xfrm>
+          <a:prstGeom prst="rect">
+            <a:avLst/>
+          </a:prstGeom>
+          <a:solidFill>
+            <a:srgbClr val="17212B"/>
+          </a:solidFill>
+          <a:ln>
+            <a:noFill/>
+          </a:ln>
+          <a:effectLst/>
+        </p:spPr>
+        <p:style>
+          <a:lnRef idx="1">
+            <a:schemeClr val="accent1"/>
+          </a:lnRef>
+          <a:fillRef idx="3">
+            <a:schemeClr val="accent1"/>
+          </a:fillRef>
+          <a:effectRef idx="2">
+            <a:schemeClr val="accent1"/>
+          </a:effectRef>
+          <a:fontRef idx="minor">
+            <a:schemeClr val="lt1"/>
+          </a:fontRef>
+        </p:style>
+        <p:txBody>
+          <a:bodyPr rtlCol="0" anchor="ctr"/>
+          <a:lstStyle/>
+          <a:p/>
+        </p:txBody>
+      </p:sp>
+      <p:sp>
+        <p:nvSpPr>
+          <p:cNvPr id="4" name="Rectangle 3"/>
+          <p:cNvSpPr/>
+          <p:nvPr/>
+        </p:nvSpPr>
+        <p:spPr>
+          <a:xfrm>
+            <a:off x="3436620" y="2274338"/>
+            <a:ext cx="2540508" cy="3632150"/>
+          </a:xfrm>
+          <a:prstGeom prst="rect">
+            <a:avLst/>
+          </a:prstGeom>
+          <a:solidFill>
+            <a:srgbClr val="17212B"/>
+          </a:solidFill>
+          <a:ln>
+            <a:noFill/>
+          </a:ln>
+          <a:effectLst/>
+        </p:spPr>
+        <p:style>
+          <a:lnRef idx="1">
+            <a:schemeClr val="accent1"/>
+          </a:lnRef>
+          <a:fillRef idx="3">
+            <a:schemeClr val="accent1"/>
+          </a:fillRef>
+          <a:effectRef idx="2">
+            <a:schemeClr val="accent1"/>
+          </a:effectRef>
+          <a:fontRef idx="minor">
+            <a:schemeClr val="lt1"/>
+          </a:fontRef>
+        </p:style>
+        <p:txBody>
+          <a:bodyPr rtlCol="0" anchor="ctr"/>
+          <a:lstStyle/>
+          <a:p/>
+        </p:txBody>
+      </p:sp>
+      <p:sp>
+        <p:nvSpPr>
+          <p:cNvPr id="5" name="Rectangle 4"/>
+          <p:cNvSpPr/>
+          <p:nvPr/>
+        </p:nvSpPr>
+        <p:spPr>
+          <a:xfrm>
+            <a:off x="6214872" y="2274338"/>
+            <a:ext cx="2540508" cy="3632150"/>
+          </a:xfrm>
+          <a:prstGeom prst="rect">
+            <a:avLst/>
+          </a:prstGeom>
+          <a:solidFill>
+            <a:srgbClr val="17212B"/>
+          </a:solidFill>
+          <a:ln>
+            <a:noFill/>
+          </a:ln>
+          <a:effectLst/>
+        </p:spPr>
+        <p:style>
+          <a:lnRef idx="1">
+            <a:schemeClr val="accent1"/>
+          </a:lnRef>
+          <a:fillRef idx="3">
+            <a:schemeClr val="accent1"/>
+          </a:fillRef>
+          <a:effectRef idx="2">
+            <a:schemeClr val="accent1"/>
+          </a:effectRef>
+          <a:fontRef idx="minor">
+            <a:schemeClr val="lt1"/>
+          </a:fontRef>
+        </p:style>
+        <p:txBody>
+          <a:bodyPr rtlCol="0" anchor="ctr"/>
+          <a:lstStyle/>
+          <a:p/>
+        </p:txBody>
+      </p:sp>
+      <p:sp>
+        <p:nvSpPr>
+          <p:cNvPr id="6" name="Rectangle 5"/>
+          <p:cNvSpPr/>
+          <p:nvPr/>
+        </p:nvSpPr>
+        <p:spPr>
+          <a:xfrm>
+            <a:off x="8993124" y="2274338"/>
+            <a:ext cx="2540508" cy="3632150"/>
+          </a:xfrm>
+          <a:prstGeom prst="rect">
+            <a:avLst/>
+          </a:prstGeom>
+          <a:solidFill>
+            <a:srgbClr val="17212B"/>
+          </a:solidFill>
+          <a:ln>
+            <a:noFill/>
+          </a:ln>
+          <a:effectLst/>
+        </p:spPr>
+        <p:style>
+          <a:lnRef idx="1">
+            <a:schemeClr val="accent1"/>
+          </a:lnRef>
+          <a:fillRef idx="3">
+            <a:schemeClr val="accent1"/>
+          </a:fillRef>
+          <a:effectRef idx="2">
+            <a:schemeClr val="accent1"/>
+          </a:effectRef>
+          <a:fontRef idx="minor">
+            <a:schemeClr val="lt1"/>
+          </a:fontRef>
+        </p:style>
+        <p:txBody>
+          <a:bodyPr rtlCol="0" anchor="ctr"/>
+          <a:lstStyle/>
+          <a:p/>
+        </p:txBody>
+      </p:sp>
+      <p:sp>
+        <p:nvSpPr>
+          <p:cNvPr id="7" name="TextBox 6"/>
+          <p:cNvSpPr txBox="1"/>
+          <p:nvPr/>
+        </p:nvSpPr>
+        <p:spPr>
+          <a:xfrm>
+            <a:off x="658368" y="342351"/>
+            <a:ext cx="5437632" cy="209929"/>
+          </a:xfrm>
+          <a:prstGeom prst="rect">
+            <a:avLst/>
+          </a:prstGeom>
+          <a:noFill/>
+        </p:spPr>
+        <p:txBody>
+          <a:bodyPr wrap="square" anchor="t" lIns="0" rIns="0" tIns="0" bIns="0">
+            <a:normAutofit/>
+          </a:bodyPr>
+          <a:lstStyle/>
+          <a:p>
+            <a:pPr algn="l">
+              <a:lnSpc>
+                <a:spcPct val="97445"/>
+              </a:lnSpc>
+            </a:pPr>
+            <a:r>
+              <a:rPr sz="1100" b="0" spc="70">
+                <a:solidFill>
+                  <a:srgbClr val="8DA0AE"/>
+                </a:solidFill>
+                <a:latin typeface="Inter SemiBold"/>
+                <a:cs typeface="Inter SemiBold"/>
+                <a:sym typeface="Inter SemiBold"/>
+              </a:rPr>
+              <a:t>TRISHULI-FLOOD-MAPPING</a:t>
+            </a:r>
+          </a:p>
+        </p:txBody>
+      </p:sp>
+      <p:sp>
+        <p:nvSpPr>
+          <p:cNvPr id="8" name="TextBox 7"/>
+          <p:cNvSpPr txBox="1"/>
+          <p:nvPr/>
+        </p:nvSpPr>
+        <p:spPr>
+          <a:xfrm>
+            <a:off x="10253472" y="342351"/>
+            <a:ext cx="1280160" cy="187924"/>
+          </a:xfrm>
+          <a:prstGeom prst="rect">
+            <a:avLst/>
+          </a:prstGeom>
+          <a:noFill/>
+        </p:spPr>
+        <p:txBody>
+          <a:bodyPr wrap="square" anchor="t" lIns="0" rIns="0" tIns="0" bIns="0">
+            <a:normAutofit/>
+          </a:bodyPr>
+          <a:lstStyle/>
+          <a:p>
+            <a:pPr algn="r">
+              <a:lnSpc>
+                <a:spcPct val="97445"/>
+              </a:lnSpc>
+            </a:pPr>
+            <a:r>
+              <a:rPr sz="1100" b="0" spc="70">
+                <a:solidFill>
+                  <a:srgbClr val="8DA0AE"/>
+                </a:solidFill>
+                <a:latin typeface="Inter SemiBold"/>
+                <a:cs typeface="Inter SemiBold"/>
+                <a:sym typeface="Inter SemiBold"/>
+              </a:rPr>
+              <a:t>04 / 13</a:t>
+            </a:r>
+          </a:p>
+        </p:txBody>
+      </p:sp>
+      <p:sp>
+        <p:nvSpPr>
+          <p:cNvPr id="9" name="TextBox 8"/>
+          <p:cNvSpPr txBox="1"/>
+          <p:nvPr/>
+        </p:nvSpPr>
+        <p:spPr>
+          <a:xfrm>
+            <a:off x="658368" y="951512"/>
+            <a:ext cx="6742664" cy="1091055"/>
+          </a:xfrm>
+          <a:prstGeom prst="rect">
+            <a:avLst/>
+          </a:prstGeom>
+          <a:noFill/>
+        </p:spPr>
+        <p:txBody>
+          <a:bodyPr wrap="square" anchor="t" lIns="0" rIns="0" tIns="0" bIns="0">
+            <a:normAutofit/>
+          </a:bodyPr>
+          <a:lstStyle/>
+          <a:p>
+            <a:pPr algn="l">
+              <a:lnSpc>
+                <a:spcPct val="88496"/>
+              </a:lnSpc>
+            </a:pPr>
+            <a:r>
+              <a:rPr sz="3279" b="0">
+                <a:solidFill>
+                  <a:srgbClr val="DCE6EE"/>
+                </a:solidFill>
+                <a:latin typeface="Space Grotesk Bold"/>
+                <a:cs typeface="Space Grotesk Bold"/>
+                <a:sym typeface="Space Grotesk Bold"/>
+              </a:rPr>
+              <a:t>The detector flagged 3.14 km² of valley-floor change</a:t>
+            </a:r>
+          </a:p>
+        </p:txBody>
+      </p:sp>
+      <p:sp>
+        <p:nvSpPr>
+          <p:cNvPr id="10" name="TextBox 9"/>
+          <p:cNvSpPr txBox="1"/>
+          <p:nvPr/>
+        </p:nvSpPr>
+        <p:spPr>
+          <a:xfrm>
+            <a:off x="914400" y="2530370"/>
+            <a:ext cx="2028444" cy="1789330"/>
+          </a:xfrm>
+          <a:prstGeom prst="rect">
+            <a:avLst/>
+          </a:prstGeom>
+          <a:noFill/>
+        </p:spPr>
+        <p:txBody>
+          <a:bodyPr wrap="square" anchor="t" lIns="0" rIns="0" tIns="0" bIns="0">
+            <a:normAutofit/>
+          </a:bodyPr>
+          <a:lstStyle/>
+          <a:p>
+            <a:pPr algn="l">
+              <a:lnSpc>
+                <a:spcPct val="88496"/>
+              </a:lnSpc>
+            </a:pPr>
+            <a:r>
+              <a:rPr sz="3672" b="0">
+                <a:solidFill>
+                  <a:srgbClr val="DCE6EE"/>
+                </a:solidFill>
+                <a:latin typeface="Space Grotesk Bold"/>
+                <a:cs typeface="Space Grotesk Bold"/>
+                <a:sym typeface="Space Grotesk Bold"/>
+              </a:rPr>
+              <a:t>3.14 km²</a:t>
+            </a:r>
+          </a:p>
+        </p:txBody>
+      </p:sp>
+      <p:sp>
+        <p:nvSpPr>
+          <p:cNvPr id="11" name="TextBox 10"/>
+          <p:cNvSpPr txBox="1"/>
+          <p:nvPr/>
+        </p:nvSpPr>
+        <p:spPr>
+          <a:xfrm>
+            <a:off x="914400" y="4191398"/>
+            <a:ext cx="2028444" cy="284649"/>
+          </a:xfrm>
+          <a:prstGeom prst="rect">
+            <a:avLst/>
+          </a:prstGeom>
+          <a:noFill/>
+        </p:spPr>
+        <p:txBody>
+          <a:bodyPr wrap="square" anchor="t" lIns="0" rIns="0" tIns="0" bIns="0">
+            <a:normAutofit/>
+          </a:bodyPr>
+          <a:lstStyle/>
+          <a:p>
+            <a:pPr algn="l">
+              <a:lnSpc>
+                <a:spcPct val="99097"/>
+              </a:lnSpc>
+            </a:pPr>
+            <a:r>
+              <a:rPr sz="1600" b="0">
+                <a:solidFill>
+                  <a:srgbClr val="DCE6EE"/>
+                </a:solidFill>
+                <a:latin typeface="Inter SemiBold"/>
+                <a:cs typeface="Inter SemiBold"/>
+                <a:sym typeface="Inter SemiBold"/>
+              </a:rPr>
+              <a:t>Flagged in total</a:t>
+            </a:r>
+          </a:p>
+        </p:txBody>
+      </p:sp>
+      <p:sp>
+        <p:nvSpPr>
+          <p:cNvPr id="12" name="TextBox 11"/>
+          <p:cNvSpPr txBox="1"/>
+          <p:nvPr/>
+        </p:nvSpPr>
+        <p:spPr>
+          <a:xfrm>
+            <a:off x="914400" y="4514242"/>
+            <a:ext cx="2028444" cy="1000719"/>
+          </a:xfrm>
+          <a:prstGeom prst="rect">
+            <a:avLst/>
+          </a:prstGeom>
+          <a:noFill/>
+        </p:spPr>
+        <p:txBody>
+          <a:bodyPr wrap="square" anchor="t" lIns="0" rIns="0" tIns="0" bIns="0">
+            <a:normAutofit/>
+          </a:bodyPr>
+          <a:lstStyle/>
+          <a:p>
+            <a:pPr algn="l">
+              <a:lnSpc>
+                <a:spcPct val="112734"/>
+              </a:lnSpc>
+            </a:pPr>
+            <a:r>
+              <a:rPr sz="1500" b="0">
+                <a:solidFill>
+                  <a:srgbClr val="8DA0AE"/>
+                </a:solidFill>
+                <a:latin typeface="Space Grotesk"/>
+                <a:cs typeface="Space Grotesk"/>
+                <a:sym typeface="Space Grotesk"/>
+              </a:rPr>
+              <a:t>Status change_detected and calibrated</a:t>
+            </a:r>
+          </a:p>
+        </p:txBody>
+      </p:sp>
+      <p:sp>
+        <p:nvSpPr>
+          <p:cNvPr id="13" name="TextBox 12"/>
+          <p:cNvSpPr txBox="1"/>
+          <p:nvPr/>
+        </p:nvSpPr>
+        <p:spPr>
+          <a:xfrm>
+            <a:off x="3692652" y="2530370"/>
+            <a:ext cx="2028444" cy="1789330"/>
+          </a:xfrm>
+          <a:prstGeom prst="rect">
+            <a:avLst/>
+          </a:prstGeom>
+          <a:noFill/>
+        </p:spPr>
+        <p:txBody>
+          <a:bodyPr wrap="square" anchor="t" lIns="0" rIns="0" tIns="0" bIns="0">
+            <a:normAutofit/>
+          </a:bodyPr>
+          <a:lstStyle/>
+          <a:p>
+            <a:pPr algn="l">
+              <a:lnSpc>
+                <a:spcPct val="88496"/>
+              </a:lnSpc>
+            </a:pPr>
+            <a:r>
+              <a:rPr sz="3672" b="0">
+                <a:solidFill>
+                  <a:srgbClr val="DCE6EE"/>
+                </a:solidFill>
+                <a:latin typeface="Space Grotesk Bold"/>
+                <a:cs typeface="Space Grotesk Bold"/>
+                <a:sym typeface="Space Grotesk Bold"/>
+              </a:rPr>
+              <a:t>0.31 km²</a:t>
+            </a:r>
+          </a:p>
+        </p:txBody>
+      </p:sp>
+      <p:sp>
+        <p:nvSpPr>
+          <p:cNvPr id="14" name="TextBox 13"/>
+          <p:cNvSpPr txBox="1"/>
+          <p:nvPr/>
+        </p:nvSpPr>
+        <p:spPr>
+          <a:xfrm>
+            <a:off x="3692652" y="4191398"/>
+            <a:ext cx="2028444" cy="284649"/>
+          </a:xfrm>
+          <a:prstGeom prst="rect">
+            <a:avLst/>
+          </a:prstGeom>
+          <a:noFill/>
+        </p:spPr>
+        <p:txBody>
+          <a:bodyPr wrap="square" anchor="t" lIns="0" rIns="0" tIns="0" bIns="0">
+            <a:normAutofit/>
+          </a:bodyPr>
+          <a:lstStyle/>
+          <a:p>
+            <a:pPr algn="l">
+              <a:lnSpc>
+                <a:spcPct val="99097"/>
+              </a:lnSpc>
+            </a:pPr>
+            <a:r>
+              <a:rPr sz="1600" b="0">
+                <a:solidFill>
+                  <a:srgbClr val="DCE6EE"/>
+                </a:solidFill>
+                <a:latin typeface="Inter SemiBold"/>
+                <a:cs typeface="Inter SemiBold"/>
+                <a:sym typeface="Inter SemiBold"/>
+              </a:rPr>
+              <a:t>Water-like</a:t>
+            </a:r>
+          </a:p>
+        </p:txBody>
+      </p:sp>
+      <p:sp>
+        <p:nvSpPr>
+          <p:cNvPr id="15" name="TextBox 14"/>
+          <p:cNvSpPr txBox="1"/>
+          <p:nvPr/>
+        </p:nvSpPr>
+        <p:spPr>
+          <a:xfrm>
+            <a:off x="3692652" y="4514242"/>
+            <a:ext cx="2028444" cy="1000719"/>
+          </a:xfrm>
+          <a:prstGeom prst="rect">
+            <a:avLst/>
+          </a:prstGeom>
+          <a:noFill/>
+        </p:spPr>
+        <p:txBody>
+          <a:bodyPr wrap="square" anchor="t" lIns="0" rIns="0" tIns="0" bIns="0">
+            <a:normAutofit/>
+          </a:bodyPr>
+          <a:lstStyle/>
+          <a:p>
+            <a:pPr algn="l">
+              <a:lnSpc>
+                <a:spcPct val="112734"/>
+              </a:lnSpc>
+            </a:pPr>
+            <a:r>
+              <a:rPr sz="1500" b="0">
+                <a:solidFill>
+                  <a:srgbClr val="8DA0AE"/>
+                </a:solidFill>
+                <a:latin typeface="Space Grotesk"/>
+                <a:cs typeface="Space Grotesk"/>
+                <a:sym typeface="Space Grotesk"/>
+              </a:rPr>
+              <a:t>Backscatter drop consistent with open water</a:t>
+            </a:r>
+          </a:p>
+        </p:txBody>
+      </p:sp>
+      <p:sp>
+        <p:nvSpPr>
+          <p:cNvPr id="16" name="TextBox 15"/>
+          <p:cNvSpPr txBox="1"/>
+          <p:nvPr/>
+        </p:nvSpPr>
+        <p:spPr>
+          <a:xfrm>
+            <a:off x="6470904" y="2530370"/>
+            <a:ext cx="2028444" cy="1789330"/>
+          </a:xfrm>
+          <a:prstGeom prst="rect">
+            <a:avLst/>
+          </a:prstGeom>
+          <a:noFill/>
+        </p:spPr>
+        <p:txBody>
+          <a:bodyPr wrap="square" anchor="t" lIns="0" rIns="0" tIns="0" bIns="0">
+            <a:normAutofit/>
+          </a:bodyPr>
+          <a:lstStyle/>
+          <a:p>
+            <a:pPr algn="l">
+              <a:lnSpc>
+                <a:spcPct val="88496"/>
+              </a:lnSpc>
+            </a:pPr>
+            <a:r>
+              <a:rPr sz="3672" b="0">
+                <a:solidFill>
+                  <a:srgbClr val="DCE6EE"/>
+                </a:solidFill>
+                <a:latin typeface="Space Grotesk Bold"/>
+                <a:cs typeface="Space Grotesk Bold"/>
+                <a:sym typeface="Space Grotesk Bold"/>
+              </a:rPr>
+              <a:t>2.29 km²</a:t>
+            </a:r>
+          </a:p>
+        </p:txBody>
+      </p:sp>
+      <p:sp>
+        <p:nvSpPr>
+          <p:cNvPr id="17" name="TextBox 16"/>
+          <p:cNvSpPr txBox="1"/>
+          <p:nvPr/>
+        </p:nvSpPr>
+        <p:spPr>
+          <a:xfrm>
+            <a:off x="6470904" y="4191398"/>
+            <a:ext cx="2028444" cy="284649"/>
+          </a:xfrm>
+          <a:prstGeom prst="rect">
+            <a:avLst/>
+          </a:prstGeom>
+          <a:noFill/>
+        </p:spPr>
+        <p:txBody>
+          <a:bodyPr wrap="square" anchor="t" lIns="0" rIns="0" tIns="0" bIns="0">
+            <a:normAutofit/>
+          </a:bodyPr>
+          <a:lstStyle/>
+          <a:p>
+            <a:pPr algn="l">
+              <a:lnSpc>
+                <a:spcPct val="99097"/>
+              </a:lnSpc>
+            </a:pPr>
+            <a:r>
+              <a:rPr sz="1600" b="0">
+                <a:solidFill>
+                  <a:srgbClr val="DCE6EE"/>
+                </a:solidFill>
+                <a:latin typeface="Inter SemiBold"/>
+                <a:cs typeface="Inter SemiBold"/>
+                <a:sym typeface="Inter SemiBold"/>
+              </a:rPr>
+              <a:t>Dark change</a:t>
+            </a:r>
+          </a:p>
+        </p:txBody>
+      </p:sp>
+      <p:sp>
+        <p:nvSpPr>
+          <p:cNvPr id="18" name="TextBox 17"/>
+          <p:cNvSpPr txBox="1"/>
+          <p:nvPr/>
+        </p:nvSpPr>
+        <p:spPr>
+          <a:xfrm>
+            <a:off x="6470904" y="4514242"/>
+            <a:ext cx="2028444" cy="1295284"/>
+          </a:xfrm>
+          <a:prstGeom prst="rect">
+            <a:avLst/>
+          </a:prstGeom>
+          <a:noFill/>
+        </p:spPr>
+        <p:txBody>
+          <a:bodyPr wrap="square" anchor="t" lIns="0" rIns="0" tIns="0" bIns="0">
+            <a:normAutofit/>
+          </a:bodyPr>
+          <a:lstStyle/>
+          <a:p>
+            <a:pPr algn="l">
+              <a:lnSpc>
+                <a:spcPct val="112734"/>
+              </a:lnSpc>
+            </a:pPr>
+            <a:r>
+              <a:rPr sz="1500" b="0">
+                <a:solidFill>
+                  <a:srgbClr val="8DA0AE"/>
+                </a:solidFill>
+                <a:latin typeface="Space Grotesk"/>
+                <a:cs typeface="Space Grotesk"/>
+                <a:sym typeface="Space Grotesk"/>
+              </a:rPr>
+              <a:t>Surface darkening such as debris or wet sediment</a:t>
+            </a:r>
+          </a:p>
+        </p:txBody>
+      </p:sp>
+      <p:sp>
+        <p:nvSpPr>
+          <p:cNvPr id="19" name="TextBox 18"/>
+          <p:cNvSpPr txBox="1"/>
+          <p:nvPr/>
+        </p:nvSpPr>
+        <p:spPr>
+          <a:xfrm>
+            <a:off x="9249156" y="2530370"/>
+            <a:ext cx="2028444" cy="1789330"/>
+          </a:xfrm>
+          <a:prstGeom prst="rect">
+            <a:avLst/>
+          </a:prstGeom>
+          <a:noFill/>
+        </p:spPr>
+        <p:txBody>
+          <a:bodyPr wrap="square" anchor="t" lIns="0" rIns="0" tIns="0" bIns="0">
+            <a:normAutofit/>
+          </a:bodyPr>
+          <a:lstStyle/>
+          <a:p>
+            <a:pPr algn="l">
+              <a:lnSpc>
+                <a:spcPct val="88496"/>
+              </a:lnSpc>
+            </a:pPr>
+            <a:r>
+              <a:rPr sz="3672" b="0">
+                <a:solidFill>
+                  <a:srgbClr val="DCE6EE"/>
+                </a:solidFill>
+                <a:latin typeface="Space Grotesk Bold"/>
+                <a:cs typeface="Space Grotesk Bold"/>
+                <a:sym typeface="Space Grotesk Bold"/>
+              </a:rPr>
+              <a:t>0.54 km²</a:t>
+            </a:r>
+          </a:p>
+        </p:txBody>
+      </p:sp>
+      <p:sp>
+        <p:nvSpPr>
+          <p:cNvPr id="20" name="TextBox 19"/>
+          <p:cNvSpPr txBox="1"/>
+          <p:nvPr/>
+        </p:nvSpPr>
+        <p:spPr>
+          <a:xfrm>
+            <a:off x="9249156" y="4191398"/>
+            <a:ext cx="2028444" cy="284649"/>
+          </a:xfrm>
+          <a:prstGeom prst="rect">
+            <a:avLst/>
+          </a:prstGeom>
+          <a:noFill/>
+        </p:spPr>
+        <p:txBody>
+          <a:bodyPr wrap="square" anchor="t" lIns="0" rIns="0" tIns="0" bIns="0">
+            <a:normAutofit/>
+          </a:bodyPr>
+          <a:lstStyle/>
+          <a:p>
+            <a:pPr algn="l">
+              <a:lnSpc>
+                <a:spcPct val="99097"/>
+              </a:lnSpc>
+            </a:pPr>
+            <a:r>
+              <a:rPr sz="1600" b="0">
+                <a:solidFill>
+                  <a:srgbClr val="DCE6EE"/>
+                </a:solidFill>
+                <a:latin typeface="Inter SemiBold"/>
+                <a:cs typeface="Inter SemiBold"/>
+                <a:sym typeface="Inter SemiBold"/>
+              </a:rPr>
+              <a:t>Bright change</a:t>
+            </a:r>
+          </a:p>
+        </p:txBody>
+      </p:sp>
+      <p:sp>
+        <p:nvSpPr>
+          <p:cNvPr id="21" name="TextBox 20"/>
+          <p:cNvSpPr txBox="1"/>
+          <p:nvPr/>
+        </p:nvSpPr>
+        <p:spPr>
+          <a:xfrm>
+            <a:off x="9249156" y="4514242"/>
+            <a:ext cx="2028444" cy="1295284"/>
+          </a:xfrm>
+          <a:prstGeom prst="rect">
+            <a:avLst/>
+          </a:prstGeom>
+          <a:noFill/>
+        </p:spPr>
+        <p:txBody>
+          <a:bodyPr wrap="square" anchor="t" lIns="0" rIns="0" tIns="0" bIns="0">
+            <a:normAutofit/>
+          </a:bodyPr>
+          <a:lstStyle/>
+          <a:p>
+            <a:pPr algn="l">
+              <a:lnSpc>
+                <a:spcPct val="112734"/>
+              </a:lnSpc>
+            </a:pPr>
+            <a:r>
+              <a:rPr sz="1500" b="0">
+                <a:solidFill>
+                  <a:srgbClr val="8DA0AE"/>
+                </a:solidFill>
+                <a:latin typeface="Space Grotesk"/>
+                <a:cs typeface="Space Grotesk"/>
+                <a:sym typeface="Space Grotesk"/>
+              </a:rPr>
+              <a:t>Surface brightening such as boulders or rubble</a:t>
             </a:r>
           </a:p>
         </p:txBody>
@@ -3421,6 +9227,14 @@
 <file path=ppt/slides/slide5.xml><?xml version="1.0" encoding="utf-8"?>
 <p:sld xmlns:a="http://schemas.openxmlformats.org/drawingml/2006/main" xmlns:p="http://schemas.openxmlformats.org/presentationml/2006/main" xmlns:r="http://schemas.openxmlformats.org/officeDocument/2006/relationships">
   <p:cSld>
+    <p:bg>
+      <p:bgPr>
+        <a:solidFill>
+          <a:srgbClr val="0C1620"/>
+        </a:solidFill>
+        <a:effectLst/>
+      </p:bgPr>
+    </p:bg>
     <p:spTree>
       <p:nvGrpSpPr>
         <p:cNvPr id="1" name=""/>
@@ -3430,69 +9244,744 @@
       <p:grpSpPr/>
       <p:sp>
         <p:nvSpPr>
-          <p:cNvPr id="2" name="Title 1"/>
-          <p:cNvSpPr>
-            <a:spLocks noGrp="1"/>
-          </p:cNvSpPr>
-          <p:nvPr>
-            <p:ph type="title"/>
-          </p:nvPr>
-        </p:nvSpPr>
-        <p:spPr/>
-        <p:txBody>
-          <a:bodyPr/>
-          <a:lstStyle/>
-          <a:p>
-            <a:r>
-              <a:t>Key finding</a:t>
-            </a:r>
-          </a:p>
-        </p:txBody>
-      </p:sp>
-      <p:sp>
-        <p:nvSpPr>
-          <p:cNvPr id="3" name="Content Placeholder 2"/>
-          <p:cNvSpPr>
-            <a:spLocks noGrp="1"/>
-          </p:cNvSpPr>
-          <p:nvPr>
-            <p:ph idx="1"/>
-          </p:nvPr>
-        </p:nvSpPr>
-        <p:spPr/>
-        <p:txBody>
-          <a:bodyPr/>
-          <a:lstStyle/>
-          <a:p>
-            <a:pPr>
-              <a:defRPr sz="1600"/>
-            </a:pPr>
-            <a:r>
-              <a:t>• Detector status: change_detected (calibrated = True)</a:t>
-            </a:r>
-          </a:p>
-          <a:p>
-            <a:pPr>
-              <a:defRPr sz="1600"/>
-            </a:pPr>
-            <a:r>
-              <a:t>• Flagged: 0.31 km² flood-like (water-like backscatter change), 2.29 km² dark, 0.54 km² bright</a:t>
-            </a:r>
-          </a:p>
-          <a:p>
-            <a:pPr>
-              <a:defRPr sz="1600"/>
-            </a:pPr>
-            <a:r>
-              <a:t>• Flood-like change (0.31 km² of water-like backscatter change) and surface change (2.29 km² dark, 0.54 km² bright) are each separable from all four pre-event nulls. An independent single-date water model could not separate the event from pre-event dates, and Sentinel-2 does not confirm open water.</a:t>
-            </a:r>
-          </a:p>
-          <a:p>
-            <a:pPr>
-              <a:defRPr sz="1600"/>
-            </a:pPr>
-            <a:r>
-              <a:t>• Surface change on the valley floor, not a validated flood extent</a:t>
+          <p:cNvPr id="2" name="Rectangle 1"/>
+          <p:cNvSpPr/>
+          <p:nvPr/>
+        </p:nvSpPr>
+        <p:spPr>
+          <a:xfrm>
+            <a:off x="0" y="0"/>
+            <a:ext cx="276515" cy="6858000"/>
+          </a:xfrm>
+          <a:prstGeom prst="rect">
+            <a:avLst/>
+          </a:prstGeom>
+          <a:solidFill>
+            <a:srgbClr val="4BC7D6"/>
+          </a:solidFill>
+          <a:ln>
+            <a:noFill/>
+          </a:ln>
+          <a:effectLst/>
+        </p:spPr>
+        <p:style>
+          <a:lnRef idx="1">
+            <a:schemeClr val="accent1"/>
+          </a:lnRef>
+          <a:fillRef idx="3">
+            <a:schemeClr val="accent1"/>
+          </a:fillRef>
+          <a:effectRef idx="2">
+            <a:schemeClr val="accent1"/>
+          </a:effectRef>
+          <a:fontRef idx="minor">
+            <a:schemeClr val="lt1"/>
+          </a:fontRef>
+        </p:style>
+        <p:txBody>
+          <a:bodyPr rtlCol="0" anchor="ctr"/>
+          <a:lstStyle/>
+          <a:p/>
+        </p:txBody>
+      </p:sp>
+      <p:sp>
+        <p:nvSpPr>
+          <p:cNvPr id="3" name="Rectangle 2"/>
+          <p:cNvSpPr/>
+          <p:nvPr/>
+        </p:nvSpPr>
+        <p:spPr>
+          <a:xfrm>
+            <a:off x="3506175" y="2876077"/>
+            <a:ext cx="6611722" cy="409875"/>
+          </a:xfrm>
+          <a:prstGeom prst="rect">
+            <a:avLst/>
+          </a:prstGeom>
+          <a:solidFill>
+            <a:srgbClr val="4BC7D6"/>
+          </a:solidFill>
+          <a:ln>
+            <a:noFill/>
+          </a:ln>
+          <a:effectLst/>
+        </p:spPr>
+        <p:style>
+          <a:lnRef idx="1">
+            <a:schemeClr val="accent1"/>
+          </a:lnRef>
+          <a:fillRef idx="3">
+            <a:schemeClr val="accent1"/>
+          </a:fillRef>
+          <a:effectRef idx="2">
+            <a:schemeClr val="accent1"/>
+          </a:effectRef>
+          <a:fontRef idx="minor">
+            <a:schemeClr val="lt1"/>
+          </a:fontRef>
+        </p:style>
+        <p:txBody>
+          <a:bodyPr rtlCol="0" anchor="ctr"/>
+          <a:lstStyle/>
+          <a:p/>
+        </p:txBody>
+      </p:sp>
+      <p:sp>
+        <p:nvSpPr>
+          <p:cNvPr id="4" name="Rectangle 3"/>
+          <p:cNvSpPr/>
+          <p:nvPr/>
+        </p:nvSpPr>
+        <p:spPr>
+          <a:xfrm>
+            <a:off x="3506175" y="3767110"/>
+            <a:ext cx="2420872" cy="409875"/>
+          </a:xfrm>
+          <a:prstGeom prst="rect">
+            <a:avLst/>
+          </a:prstGeom>
+          <a:solidFill>
+            <a:srgbClr val="4BC7D6"/>
+          </a:solidFill>
+          <a:ln>
+            <a:noFill/>
+          </a:ln>
+          <a:effectLst/>
+        </p:spPr>
+        <p:style>
+          <a:lnRef idx="1">
+            <a:schemeClr val="accent1"/>
+          </a:lnRef>
+          <a:fillRef idx="3">
+            <a:schemeClr val="accent1"/>
+          </a:fillRef>
+          <a:effectRef idx="2">
+            <a:schemeClr val="accent1"/>
+          </a:effectRef>
+          <a:fontRef idx="minor">
+            <a:schemeClr val="lt1"/>
+          </a:fontRef>
+        </p:style>
+        <p:txBody>
+          <a:bodyPr rtlCol="0" anchor="ctr"/>
+          <a:lstStyle/>
+          <a:p/>
+        </p:txBody>
+      </p:sp>
+      <p:sp>
+        <p:nvSpPr>
+          <p:cNvPr id="5" name="Rectangle 4"/>
+          <p:cNvSpPr/>
+          <p:nvPr/>
+        </p:nvSpPr>
+        <p:spPr>
+          <a:xfrm>
+            <a:off x="3506175" y="4658144"/>
+            <a:ext cx="673733" cy="409875"/>
+          </a:xfrm>
+          <a:prstGeom prst="rect">
+            <a:avLst/>
+          </a:prstGeom>
+          <a:solidFill>
+            <a:srgbClr val="4BC7D6"/>
+          </a:solidFill>
+          <a:ln>
+            <a:noFill/>
+          </a:ln>
+          <a:effectLst/>
+        </p:spPr>
+        <p:style>
+          <a:lnRef idx="1">
+            <a:schemeClr val="accent1"/>
+          </a:lnRef>
+          <a:fillRef idx="3">
+            <a:schemeClr val="accent1"/>
+          </a:fillRef>
+          <a:effectRef idx="2">
+            <a:schemeClr val="accent1"/>
+          </a:effectRef>
+          <a:fontRef idx="minor">
+            <a:schemeClr val="lt1"/>
+          </a:fontRef>
+        </p:style>
+        <p:txBody>
+          <a:bodyPr rtlCol="0" anchor="ctr"/>
+          <a:lstStyle/>
+          <a:p/>
+        </p:txBody>
+      </p:sp>
+      <p:sp>
+        <p:nvSpPr>
+          <p:cNvPr id="6" name="Rectangle 5"/>
+          <p:cNvSpPr/>
+          <p:nvPr/>
+        </p:nvSpPr>
+        <p:spPr>
+          <a:xfrm>
+            <a:off x="3506175" y="5549178"/>
+            <a:ext cx="342576" cy="409875"/>
+          </a:xfrm>
+          <a:prstGeom prst="rect">
+            <a:avLst/>
+          </a:prstGeom>
+          <a:solidFill>
+            <a:srgbClr val="4BC7D6"/>
+          </a:solidFill>
+          <a:ln>
+            <a:noFill/>
+          </a:ln>
+          <a:effectLst/>
+        </p:spPr>
+        <p:style>
+          <a:lnRef idx="1">
+            <a:schemeClr val="accent1"/>
+          </a:lnRef>
+          <a:fillRef idx="3">
+            <a:schemeClr val="accent1"/>
+          </a:fillRef>
+          <a:effectRef idx="2">
+            <a:schemeClr val="accent1"/>
+          </a:effectRef>
+          <a:fontRef idx="minor">
+            <a:schemeClr val="lt1"/>
+          </a:fontRef>
+        </p:style>
+        <p:txBody>
+          <a:bodyPr rtlCol="0" anchor="ctr"/>
+          <a:lstStyle/>
+          <a:p/>
+        </p:txBody>
+      </p:sp>
+      <p:sp>
+        <p:nvSpPr>
+          <p:cNvPr id="7" name="Rectangle 6"/>
+          <p:cNvSpPr/>
+          <p:nvPr/>
+        </p:nvSpPr>
+        <p:spPr>
+          <a:xfrm>
+            <a:off x="3495203" y="2635498"/>
+            <a:ext cx="10973" cy="3564134"/>
+          </a:xfrm>
+          <a:prstGeom prst="rect">
+            <a:avLst/>
+          </a:prstGeom>
+          <a:solidFill>
+            <a:srgbClr val="8DA0AE"/>
+          </a:solidFill>
+          <a:ln>
+            <a:noFill/>
+          </a:ln>
+          <a:effectLst/>
+        </p:spPr>
+        <p:style>
+          <a:lnRef idx="1">
+            <a:schemeClr val="accent1"/>
+          </a:lnRef>
+          <a:fillRef idx="3">
+            <a:schemeClr val="accent1"/>
+          </a:fillRef>
+          <a:effectRef idx="2">
+            <a:schemeClr val="accent1"/>
+          </a:effectRef>
+          <a:fontRef idx="minor">
+            <a:schemeClr val="lt1"/>
+          </a:fontRef>
+        </p:style>
+        <p:txBody>
+          <a:bodyPr rtlCol="0" anchor="ctr"/>
+          <a:lstStyle/>
+          <a:p/>
+        </p:txBody>
+      </p:sp>
+      <p:sp>
+        <p:nvSpPr>
+          <p:cNvPr id="8" name="TextBox 7"/>
+          <p:cNvSpPr txBox="1"/>
+          <p:nvPr/>
+        </p:nvSpPr>
+        <p:spPr>
+          <a:xfrm>
+            <a:off x="658368" y="342351"/>
+            <a:ext cx="5437632" cy="209929"/>
+          </a:xfrm>
+          <a:prstGeom prst="rect">
+            <a:avLst/>
+          </a:prstGeom>
+          <a:noFill/>
+        </p:spPr>
+        <p:txBody>
+          <a:bodyPr wrap="square" anchor="t" lIns="0" rIns="0" tIns="0" bIns="0">
+            <a:normAutofit/>
+          </a:bodyPr>
+          <a:lstStyle/>
+          <a:p>
+            <a:pPr algn="l">
+              <a:lnSpc>
+                <a:spcPct val="97445"/>
+              </a:lnSpc>
+            </a:pPr>
+            <a:r>
+              <a:rPr sz="1100" b="0" spc="70">
+                <a:solidFill>
+                  <a:srgbClr val="8DA0AE"/>
+                </a:solidFill>
+                <a:latin typeface="Inter SemiBold"/>
+                <a:cs typeface="Inter SemiBold"/>
+                <a:sym typeface="Inter SemiBold"/>
+              </a:rPr>
+              <a:t>TRISHULI-FLOOD-MAPPING</a:t>
+            </a:r>
+          </a:p>
+        </p:txBody>
+      </p:sp>
+      <p:sp>
+        <p:nvSpPr>
+          <p:cNvPr id="9" name="TextBox 8"/>
+          <p:cNvSpPr txBox="1"/>
+          <p:nvPr/>
+        </p:nvSpPr>
+        <p:spPr>
+          <a:xfrm>
+            <a:off x="10253472" y="342351"/>
+            <a:ext cx="1280160" cy="187924"/>
+          </a:xfrm>
+          <a:prstGeom prst="rect">
+            <a:avLst/>
+          </a:prstGeom>
+          <a:noFill/>
+        </p:spPr>
+        <p:txBody>
+          <a:bodyPr wrap="square" anchor="t" lIns="0" rIns="0" tIns="0" bIns="0">
+            <a:normAutofit/>
+          </a:bodyPr>
+          <a:lstStyle/>
+          <a:p>
+            <a:pPr algn="r">
+              <a:lnSpc>
+                <a:spcPct val="97445"/>
+              </a:lnSpc>
+            </a:pPr>
+            <a:r>
+              <a:rPr sz="1100" b="0" spc="70">
+                <a:solidFill>
+                  <a:srgbClr val="8DA0AE"/>
+                </a:solidFill>
+                <a:latin typeface="Inter SemiBold"/>
+                <a:cs typeface="Inter SemiBold"/>
+                <a:sym typeface="Inter SemiBold"/>
+              </a:rPr>
+              <a:t>05 / 13</a:t>
+            </a:r>
+          </a:p>
+        </p:txBody>
+      </p:sp>
+      <p:sp>
+        <p:nvSpPr>
+          <p:cNvPr id="10" name="TextBox 9"/>
+          <p:cNvSpPr txBox="1"/>
+          <p:nvPr/>
+        </p:nvSpPr>
+        <p:spPr>
+          <a:xfrm>
+            <a:off x="658368" y="658368"/>
+            <a:ext cx="7177674" cy="1091055"/>
+          </a:xfrm>
+          <a:prstGeom prst="rect">
+            <a:avLst/>
+          </a:prstGeom>
+          <a:noFill/>
+        </p:spPr>
+        <p:txBody>
+          <a:bodyPr wrap="square" anchor="t" lIns="0" rIns="0" tIns="0" bIns="0">
+            <a:normAutofit/>
+          </a:bodyPr>
+          <a:lstStyle/>
+          <a:p>
+            <a:pPr algn="l">
+              <a:lnSpc>
+                <a:spcPct val="88496"/>
+              </a:lnSpc>
+            </a:pPr>
+            <a:r>
+              <a:rPr sz="3279" b="0">
+                <a:solidFill>
+                  <a:srgbClr val="DCE6EE"/>
+                </a:solidFill>
+                <a:latin typeface="Space Grotesk Bold"/>
+                <a:cs typeface="Space Grotesk Bold"/>
+                <a:sym typeface="Space Grotesk Bold"/>
+              </a:rPr>
+              <a:t>Every change class clears the three-times null rule</a:t>
+            </a:r>
+          </a:p>
+        </p:txBody>
+      </p:sp>
+      <p:sp>
+        <p:nvSpPr>
+          <p:cNvPr id="11" name="TextBox 10"/>
+          <p:cNvSpPr txBox="1"/>
+          <p:nvPr/>
+        </p:nvSpPr>
+        <p:spPr>
+          <a:xfrm>
+            <a:off x="658368" y="1725162"/>
+            <a:ext cx="6090148" cy="620817"/>
+          </a:xfrm>
+          <a:prstGeom prst="rect">
+            <a:avLst/>
+          </a:prstGeom>
+          <a:noFill/>
+        </p:spPr>
+        <p:txBody>
+          <a:bodyPr wrap="square" anchor="t" lIns="0" rIns="0" tIns="0" bIns="0">
+            <a:normAutofit/>
+          </a:bodyPr>
+          <a:lstStyle/>
+          <a:p>
+            <a:pPr algn="l">
+              <a:lnSpc>
+                <a:spcPct val="104905"/>
+              </a:lnSpc>
+            </a:pPr>
+            <a:r>
+              <a:rPr sz="1557" b="0">
+                <a:solidFill>
+                  <a:srgbClr val="8DA0AE"/>
+                </a:solidFill>
+                <a:latin typeface="Space Grotesk"/>
+                <a:cs typeface="Space Grotesk"/>
+                <a:sym typeface="Space Grotesk"/>
+              </a:rPr>
+              <a:t>Event area divided by the largest of four pre-event null areas. A class counts only above 3x.</a:t>
+            </a:r>
+          </a:p>
+        </p:txBody>
+      </p:sp>
+      <p:sp>
+        <p:nvSpPr>
+          <p:cNvPr id="12" name="TextBox 11"/>
+          <p:cNvSpPr txBox="1"/>
+          <p:nvPr/>
+        </p:nvSpPr>
+        <p:spPr>
+          <a:xfrm>
+            <a:off x="658368" y="2956169"/>
+            <a:ext cx="2610063" cy="284649"/>
+          </a:xfrm>
+          <a:prstGeom prst="rect">
+            <a:avLst/>
+          </a:prstGeom>
+          <a:noFill/>
+        </p:spPr>
+        <p:txBody>
+          <a:bodyPr wrap="square" anchor="t" lIns="0" rIns="0" tIns="0" bIns="0">
+            <a:normAutofit/>
+          </a:bodyPr>
+          <a:lstStyle/>
+          <a:p>
+            <a:pPr algn="l">
+              <a:lnSpc>
+                <a:spcPct val="99097"/>
+              </a:lnSpc>
+            </a:pPr>
+            <a:r>
+              <a:rPr sz="1600" b="0">
+                <a:solidFill>
+                  <a:srgbClr val="DCE6EE"/>
+                </a:solidFill>
+                <a:latin typeface="Inter SemiBold"/>
+                <a:cs typeface="Inter SemiBold"/>
+                <a:sym typeface="Inter SemiBold"/>
+              </a:rPr>
+              <a:t>Dark change</a:t>
+            </a:r>
+          </a:p>
+        </p:txBody>
+      </p:sp>
+      <p:sp>
+        <p:nvSpPr>
+          <p:cNvPr id="13" name="TextBox 12"/>
+          <p:cNvSpPr txBox="1"/>
+          <p:nvPr/>
+        </p:nvSpPr>
+        <p:spPr>
+          <a:xfrm>
+            <a:off x="10337353" y="2956169"/>
+            <a:ext cx="1196279" cy="284649"/>
+          </a:xfrm>
+          <a:prstGeom prst="rect">
+            <a:avLst/>
+          </a:prstGeom>
+          <a:noFill/>
+        </p:spPr>
+        <p:txBody>
+          <a:bodyPr wrap="square" anchor="t" lIns="0" rIns="0" tIns="0" bIns="0">
+            <a:normAutofit/>
+          </a:bodyPr>
+          <a:lstStyle/>
+          <a:p>
+            <a:pPr algn="r">
+              <a:lnSpc>
+                <a:spcPct val="99097"/>
+              </a:lnSpc>
+            </a:pPr>
+            <a:r>
+              <a:rPr sz="1600" b="0">
+                <a:solidFill>
+                  <a:srgbClr val="DCE6EE"/>
+                </a:solidFill>
+                <a:latin typeface="Inter SemiBold"/>
+                <a:cs typeface="Inter SemiBold"/>
+                <a:sym typeface="Inter SemiBold"/>
+              </a:rPr>
+              <a:t>57.9x</a:t>
+            </a:r>
+          </a:p>
+        </p:txBody>
+      </p:sp>
+      <p:sp>
+        <p:nvSpPr>
+          <p:cNvPr id="14" name="TextBox 13"/>
+          <p:cNvSpPr txBox="1"/>
+          <p:nvPr/>
+        </p:nvSpPr>
+        <p:spPr>
+          <a:xfrm>
+            <a:off x="658368" y="3847202"/>
+            <a:ext cx="2610063" cy="284649"/>
+          </a:xfrm>
+          <a:prstGeom prst="rect">
+            <a:avLst/>
+          </a:prstGeom>
+          <a:noFill/>
+        </p:spPr>
+        <p:txBody>
+          <a:bodyPr wrap="square" anchor="t" lIns="0" rIns="0" tIns="0" bIns="0">
+            <a:normAutofit/>
+          </a:bodyPr>
+          <a:lstStyle/>
+          <a:p>
+            <a:pPr algn="l">
+              <a:lnSpc>
+                <a:spcPct val="99097"/>
+              </a:lnSpc>
+            </a:pPr>
+            <a:r>
+              <a:rPr sz="1600" b="0">
+                <a:solidFill>
+                  <a:srgbClr val="DCE6EE"/>
+                </a:solidFill>
+                <a:latin typeface="Inter SemiBold"/>
+                <a:cs typeface="Inter SemiBold"/>
+                <a:sym typeface="Inter SemiBold"/>
+              </a:rPr>
+              <a:t>Water-like</a:t>
+            </a:r>
+          </a:p>
+        </p:txBody>
+      </p:sp>
+      <p:sp>
+        <p:nvSpPr>
+          <p:cNvPr id="15" name="TextBox 14"/>
+          <p:cNvSpPr txBox="1"/>
+          <p:nvPr/>
+        </p:nvSpPr>
+        <p:spPr>
+          <a:xfrm>
+            <a:off x="10337353" y="3847202"/>
+            <a:ext cx="1196279" cy="284649"/>
+          </a:xfrm>
+          <a:prstGeom prst="rect">
+            <a:avLst/>
+          </a:prstGeom>
+          <a:noFill/>
+        </p:spPr>
+        <p:txBody>
+          <a:bodyPr wrap="square" anchor="t" lIns="0" rIns="0" tIns="0" bIns="0">
+            <a:normAutofit/>
+          </a:bodyPr>
+          <a:lstStyle/>
+          <a:p>
+            <a:pPr algn="r">
+              <a:lnSpc>
+                <a:spcPct val="99097"/>
+              </a:lnSpc>
+            </a:pPr>
+            <a:r>
+              <a:rPr sz="1600" b="0">
+                <a:solidFill>
+                  <a:srgbClr val="DCE6EE"/>
+                </a:solidFill>
+                <a:latin typeface="Inter SemiBold"/>
+                <a:cs typeface="Inter SemiBold"/>
+                <a:sym typeface="Inter SemiBold"/>
+              </a:rPr>
+              <a:t>21.2x</a:t>
+            </a:r>
+          </a:p>
+        </p:txBody>
+      </p:sp>
+      <p:sp>
+        <p:nvSpPr>
+          <p:cNvPr id="16" name="TextBox 15"/>
+          <p:cNvSpPr txBox="1"/>
+          <p:nvPr/>
+        </p:nvSpPr>
+        <p:spPr>
+          <a:xfrm>
+            <a:off x="658368" y="4738236"/>
+            <a:ext cx="2610063" cy="284649"/>
+          </a:xfrm>
+          <a:prstGeom prst="rect">
+            <a:avLst/>
+          </a:prstGeom>
+          <a:noFill/>
+        </p:spPr>
+        <p:txBody>
+          <a:bodyPr wrap="square" anchor="t" lIns="0" rIns="0" tIns="0" bIns="0">
+            <a:normAutofit/>
+          </a:bodyPr>
+          <a:lstStyle/>
+          <a:p>
+            <a:pPr algn="l">
+              <a:lnSpc>
+                <a:spcPct val="99097"/>
+              </a:lnSpc>
+            </a:pPr>
+            <a:r>
+              <a:rPr sz="1600" b="0">
+                <a:solidFill>
+                  <a:srgbClr val="DCE6EE"/>
+                </a:solidFill>
+                <a:latin typeface="Inter SemiBold"/>
+                <a:cs typeface="Inter SemiBold"/>
+                <a:sym typeface="Inter SemiBold"/>
+              </a:rPr>
+              <a:t>Bright change</a:t>
+            </a:r>
+          </a:p>
+        </p:txBody>
+      </p:sp>
+      <p:sp>
+        <p:nvSpPr>
+          <p:cNvPr id="17" name="TextBox 16"/>
+          <p:cNvSpPr txBox="1"/>
+          <p:nvPr/>
+        </p:nvSpPr>
+        <p:spPr>
+          <a:xfrm>
+            <a:off x="10337353" y="4738236"/>
+            <a:ext cx="1196279" cy="284649"/>
+          </a:xfrm>
+          <a:prstGeom prst="rect">
+            <a:avLst/>
+          </a:prstGeom>
+          <a:noFill/>
+        </p:spPr>
+        <p:txBody>
+          <a:bodyPr wrap="square" anchor="t" lIns="0" rIns="0" tIns="0" bIns="0">
+            <a:normAutofit/>
+          </a:bodyPr>
+          <a:lstStyle/>
+          <a:p>
+            <a:pPr algn="r">
+              <a:lnSpc>
+                <a:spcPct val="99097"/>
+              </a:lnSpc>
+            </a:pPr>
+            <a:r>
+              <a:rPr sz="1600" b="0">
+                <a:solidFill>
+                  <a:srgbClr val="DCE6EE"/>
+                </a:solidFill>
+                <a:latin typeface="Inter SemiBold"/>
+                <a:cs typeface="Inter SemiBold"/>
+                <a:sym typeface="Inter SemiBold"/>
+              </a:rPr>
+              <a:t>5.9x</a:t>
+            </a:r>
+          </a:p>
+        </p:txBody>
+      </p:sp>
+      <p:sp>
+        <p:nvSpPr>
+          <p:cNvPr id="18" name="TextBox 17"/>
+          <p:cNvSpPr txBox="1"/>
+          <p:nvPr/>
+        </p:nvSpPr>
+        <p:spPr>
+          <a:xfrm>
+            <a:off x="658368" y="5629269"/>
+            <a:ext cx="2610063" cy="284649"/>
+          </a:xfrm>
+          <a:prstGeom prst="rect">
+            <a:avLst/>
+          </a:prstGeom>
+          <a:noFill/>
+        </p:spPr>
+        <p:txBody>
+          <a:bodyPr wrap="square" anchor="t" lIns="0" rIns="0" tIns="0" bIns="0">
+            <a:normAutofit/>
+          </a:bodyPr>
+          <a:lstStyle/>
+          <a:p>
+            <a:pPr algn="l">
+              <a:lnSpc>
+                <a:spcPct val="99097"/>
+              </a:lnSpc>
+            </a:pPr>
+            <a:r>
+              <a:rPr sz="1600" b="0">
+                <a:solidFill>
+                  <a:srgbClr val="DCE6EE"/>
+                </a:solidFill>
+                <a:latin typeface="Inter SemiBold"/>
+                <a:cs typeface="Inter SemiBold"/>
+                <a:sym typeface="Inter SemiBold"/>
+              </a:rPr>
+              <a:t>Rule</a:t>
+            </a:r>
+          </a:p>
+        </p:txBody>
+      </p:sp>
+      <p:sp>
+        <p:nvSpPr>
+          <p:cNvPr id="19" name="TextBox 18"/>
+          <p:cNvSpPr txBox="1"/>
+          <p:nvPr/>
+        </p:nvSpPr>
+        <p:spPr>
+          <a:xfrm>
+            <a:off x="10337353" y="5629269"/>
+            <a:ext cx="1196279" cy="284649"/>
+          </a:xfrm>
+          <a:prstGeom prst="rect">
+            <a:avLst/>
+          </a:prstGeom>
+          <a:noFill/>
+        </p:spPr>
+        <p:txBody>
+          <a:bodyPr wrap="square" anchor="t" lIns="0" rIns="0" tIns="0" bIns="0">
+            <a:normAutofit/>
+          </a:bodyPr>
+          <a:lstStyle/>
+          <a:p>
+            <a:pPr algn="r">
+              <a:lnSpc>
+                <a:spcPct val="99097"/>
+              </a:lnSpc>
+            </a:pPr>
+            <a:r>
+              <a:rPr sz="1600" b="0">
+                <a:solidFill>
+                  <a:srgbClr val="DCE6EE"/>
+                </a:solidFill>
+                <a:latin typeface="Inter SemiBold"/>
+                <a:cs typeface="Inter SemiBold"/>
+                <a:sym typeface="Inter SemiBold"/>
+              </a:rPr>
+              <a:t>3x</a:t>
             </a:r>
           </a:p>
         </p:txBody>
@@ -3508,6 +9997,14 @@
 <file path=ppt/slides/slide6.xml><?xml version="1.0" encoding="utf-8"?>
 <p:sld xmlns:a="http://schemas.openxmlformats.org/drawingml/2006/main" xmlns:p="http://schemas.openxmlformats.org/presentationml/2006/main" xmlns:r="http://schemas.openxmlformats.org/officeDocument/2006/relationships">
   <p:cSld>
+    <p:bg>
+      <p:bgPr>
+        <a:solidFill>
+          <a:srgbClr val="0C1620"/>
+        </a:solidFill>
+        <a:effectLst/>
+      </p:bgPr>
+    </p:bg>
     <p:spTree>
       <p:nvGrpSpPr>
         <p:cNvPr id="1" name=""/>
@@ -3517,69 +10014,537 @@
       <p:grpSpPr/>
       <p:sp>
         <p:nvSpPr>
-          <p:cNvPr id="2" name="Title 1"/>
-          <p:cNvSpPr>
-            <a:spLocks noGrp="1"/>
-          </p:cNvSpPr>
-          <p:nvPr>
-            <p:ph type="title"/>
-          </p:nvPr>
-        </p:nvSpPr>
-        <p:spPr/>
-        <p:txBody>
-          <a:bodyPr/>
-          <a:lstStyle/>
-          <a:p>
-            <a:r>
-              <a:t>Exposure to the mask (not damage)</a:t>
-            </a:r>
-          </a:p>
-        </p:txBody>
-      </p:sp>
-      <p:sp>
-        <p:nvSpPr>
-          <p:cNvPr id="3" name="Content Placeholder 2"/>
-          <p:cNvSpPr>
-            <a:spLocks noGrp="1"/>
-          </p:cNvSpPr>
-          <p:nvPr>
-            <p:ph idx="1"/>
-          </p:nvPr>
-        </p:nvSpPr>
-        <p:spPr/>
-        <p:txBody>
-          <a:bodyPr/>
-          <a:lstStyle/>
-          <a:p>
-            <a:pPr>
-              <a:defRPr sz="1800"/>
-            </a:pPr>
-            <a:r>
-              <a:t>• Buildings overlapping the mask: 556 (range 244-1,078) of 189,503; 92% unknown status</a:t>
-            </a:r>
-          </a:p>
-          <a:p>
-            <a:pPr>
-              <a:defRPr sz="1800"/>
-            </a:pPr>
-            <a:r>
-              <a:t>• Motorable road in mask: 11.8 km (range 6.4-22.0)</a:t>
-            </a:r>
-          </a:p>
-          <a:p>
-            <a:pPr>
-              <a:defRPr sz="1800"/>
-            </a:pPr>
-            <a:r>
-              <a:t>• Bridges exposed (not failed): 20 (range 12-30)</a:t>
-            </a:r>
-          </a:p>
-          <a:p>
-            <a:pPr>
-              <a:defRPr sz="1800"/>
-            </a:pPr>
-            <a:r>
-              <a:t>• Settlements with no road path to a hospital: 4 (range 2-12) of 446</a:t>
+          <p:cNvPr id="2" name="Rectangle 1"/>
+          <p:cNvSpPr/>
+          <p:nvPr/>
+        </p:nvSpPr>
+        <p:spPr>
+          <a:xfrm>
+            <a:off x="0" y="0"/>
+            <a:ext cx="276515" cy="6858000"/>
+          </a:xfrm>
+          <a:prstGeom prst="rect">
+            <a:avLst/>
+          </a:prstGeom>
+          <a:solidFill>
+            <a:srgbClr val="4BC7D6"/>
+          </a:solidFill>
+          <a:ln>
+            <a:noFill/>
+          </a:ln>
+          <a:effectLst/>
+        </p:spPr>
+        <p:style>
+          <a:lnRef idx="1">
+            <a:schemeClr val="accent1"/>
+          </a:lnRef>
+          <a:fillRef idx="3">
+            <a:schemeClr val="accent1"/>
+          </a:fillRef>
+          <a:effectRef idx="2">
+            <a:schemeClr val="accent1"/>
+          </a:effectRef>
+          <a:fontRef idx="minor">
+            <a:schemeClr val="lt1"/>
+          </a:fontRef>
+        </p:style>
+        <p:txBody>
+          <a:bodyPr rtlCol="0" anchor="ctr"/>
+          <a:lstStyle/>
+          <a:p/>
+        </p:txBody>
+      </p:sp>
+      <p:sp>
+        <p:nvSpPr>
+          <p:cNvPr id="3" name="Rectangle 2"/>
+          <p:cNvSpPr/>
+          <p:nvPr/>
+        </p:nvSpPr>
+        <p:spPr>
+          <a:xfrm>
+            <a:off x="658368" y="3104852"/>
+            <a:ext cx="3466592" cy="1971122"/>
+          </a:xfrm>
+          <a:prstGeom prst="rect">
+            <a:avLst/>
+          </a:prstGeom>
+          <a:solidFill>
+            <a:srgbClr val="17212B"/>
+          </a:solidFill>
+          <a:ln>
+            <a:noFill/>
+          </a:ln>
+          <a:effectLst/>
+        </p:spPr>
+        <p:style>
+          <a:lnRef idx="1">
+            <a:schemeClr val="accent1"/>
+          </a:lnRef>
+          <a:fillRef idx="3">
+            <a:schemeClr val="accent1"/>
+          </a:fillRef>
+          <a:effectRef idx="2">
+            <a:schemeClr val="accent1"/>
+          </a:effectRef>
+          <a:fontRef idx="minor">
+            <a:schemeClr val="lt1"/>
+          </a:fontRef>
+        </p:style>
+        <p:txBody>
+          <a:bodyPr rtlCol="0" anchor="ctr"/>
+          <a:lstStyle/>
+          <a:p/>
+        </p:txBody>
+      </p:sp>
+      <p:sp>
+        <p:nvSpPr>
+          <p:cNvPr id="4" name="Rectangle 3"/>
+          <p:cNvSpPr/>
+          <p:nvPr/>
+        </p:nvSpPr>
+        <p:spPr>
+          <a:xfrm>
+            <a:off x="4362704" y="3104852"/>
+            <a:ext cx="3466592" cy="1971122"/>
+          </a:xfrm>
+          <a:prstGeom prst="rect">
+            <a:avLst/>
+          </a:prstGeom>
+          <a:solidFill>
+            <a:srgbClr val="17212B"/>
+          </a:solidFill>
+          <a:ln>
+            <a:noFill/>
+          </a:ln>
+          <a:effectLst/>
+        </p:spPr>
+        <p:style>
+          <a:lnRef idx="1">
+            <a:schemeClr val="accent1"/>
+          </a:lnRef>
+          <a:fillRef idx="3">
+            <a:schemeClr val="accent1"/>
+          </a:fillRef>
+          <a:effectRef idx="2">
+            <a:schemeClr val="accent1"/>
+          </a:effectRef>
+          <a:fontRef idx="minor">
+            <a:schemeClr val="lt1"/>
+          </a:fontRef>
+        </p:style>
+        <p:txBody>
+          <a:bodyPr rtlCol="0" anchor="ctr"/>
+          <a:lstStyle/>
+          <a:p/>
+        </p:txBody>
+      </p:sp>
+      <p:sp>
+        <p:nvSpPr>
+          <p:cNvPr id="5" name="Rectangle 4"/>
+          <p:cNvSpPr/>
+          <p:nvPr/>
+        </p:nvSpPr>
+        <p:spPr>
+          <a:xfrm>
+            <a:off x="8067040" y="3104852"/>
+            <a:ext cx="3466592" cy="1971122"/>
+          </a:xfrm>
+          <a:prstGeom prst="rect">
+            <a:avLst/>
+          </a:prstGeom>
+          <a:solidFill>
+            <a:srgbClr val="17212B"/>
+          </a:solidFill>
+          <a:ln>
+            <a:noFill/>
+          </a:ln>
+          <a:effectLst/>
+        </p:spPr>
+        <p:style>
+          <a:lnRef idx="1">
+            <a:schemeClr val="accent1"/>
+          </a:lnRef>
+          <a:fillRef idx="3">
+            <a:schemeClr val="accent1"/>
+          </a:fillRef>
+          <a:effectRef idx="2">
+            <a:schemeClr val="accent1"/>
+          </a:effectRef>
+          <a:fontRef idx="minor">
+            <a:schemeClr val="lt1"/>
+          </a:fontRef>
+        </p:style>
+        <p:txBody>
+          <a:bodyPr rtlCol="0" anchor="ctr"/>
+          <a:lstStyle/>
+          <a:p/>
+        </p:txBody>
+      </p:sp>
+      <p:sp>
+        <p:nvSpPr>
+          <p:cNvPr id="6" name="TextBox 5"/>
+          <p:cNvSpPr txBox="1"/>
+          <p:nvPr/>
+        </p:nvSpPr>
+        <p:spPr>
+          <a:xfrm>
+            <a:off x="658368" y="342351"/>
+            <a:ext cx="5437632" cy="209929"/>
+          </a:xfrm>
+          <a:prstGeom prst="rect">
+            <a:avLst/>
+          </a:prstGeom>
+          <a:noFill/>
+        </p:spPr>
+        <p:txBody>
+          <a:bodyPr wrap="square" anchor="t" lIns="0" rIns="0" tIns="0" bIns="0">
+            <a:normAutofit/>
+          </a:bodyPr>
+          <a:lstStyle/>
+          <a:p>
+            <a:pPr algn="l">
+              <a:lnSpc>
+                <a:spcPct val="97445"/>
+              </a:lnSpc>
+            </a:pPr>
+            <a:r>
+              <a:rPr sz="1100" b="0" spc="70">
+                <a:solidFill>
+                  <a:srgbClr val="8DA0AE"/>
+                </a:solidFill>
+                <a:latin typeface="Inter SemiBold"/>
+                <a:cs typeface="Inter SemiBold"/>
+                <a:sym typeface="Inter SemiBold"/>
+              </a:rPr>
+              <a:t>TRISHULI-FLOOD-MAPPING</a:t>
+            </a:r>
+          </a:p>
+        </p:txBody>
+      </p:sp>
+      <p:sp>
+        <p:nvSpPr>
+          <p:cNvPr id="7" name="TextBox 6"/>
+          <p:cNvSpPr txBox="1"/>
+          <p:nvPr/>
+        </p:nvSpPr>
+        <p:spPr>
+          <a:xfrm>
+            <a:off x="10253472" y="342351"/>
+            <a:ext cx="1280160" cy="187924"/>
+          </a:xfrm>
+          <a:prstGeom prst="rect">
+            <a:avLst/>
+          </a:prstGeom>
+          <a:noFill/>
+        </p:spPr>
+        <p:txBody>
+          <a:bodyPr wrap="square" anchor="t" lIns="0" rIns="0" tIns="0" bIns="0">
+            <a:normAutofit/>
+          </a:bodyPr>
+          <a:lstStyle/>
+          <a:p>
+            <a:pPr algn="r">
+              <a:lnSpc>
+                <a:spcPct val="97445"/>
+              </a:lnSpc>
+            </a:pPr>
+            <a:r>
+              <a:rPr sz="1100" b="0" spc="70">
+                <a:solidFill>
+                  <a:srgbClr val="8DA0AE"/>
+                </a:solidFill>
+                <a:latin typeface="Inter SemiBold"/>
+                <a:cs typeface="Inter SemiBold"/>
+                <a:sym typeface="Inter SemiBold"/>
+              </a:rPr>
+              <a:t>06 / 13</a:t>
+            </a:r>
+          </a:p>
+        </p:txBody>
+      </p:sp>
+      <p:sp>
+        <p:nvSpPr>
+          <p:cNvPr id="8" name="TextBox 7"/>
+          <p:cNvSpPr txBox="1"/>
+          <p:nvPr/>
+        </p:nvSpPr>
+        <p:spPr>
+          <a:xfrm>
+            <a:off x="658368" y="1782026"/>
+            <a:ext cx="6742664" cy="1091055"/>
+          </a:xfrm>
+          <a:prstGeom prst="rect">
+            <a:avLst/>
+          </a:prstGeom>
+          <a:noFill/>
+        </p:spPr>
+        <p:txBody>
+          <a:bodyPr wrap="square" anchor="t" lIns="0" rIns="0" tIns="0" bIns="0">
+            <a:normAutofit/>
+          </a:bodyPr>
+          <a:lstStyle/>
+          <a:p>
+            <a:pPr algn="l">
+              <a:lnSpc>
+                <a:spcPct val="88496"/>
+              </a:lnSpc>
+            </a:pPr>
+            <a:r>
+              <a:rPr sz="3279" b="0">
+                <a:solidFill>
+                  <a:srgbClr val="DCE6EE"/>
+                </a:solidFill>
+                <a:latin typeface="Space Grotesk Bold"/>
+                <a:cs typeface="Space Grotesk Bold"/>
+                <a:sym typeface="Space Grotesk Bold"/>
+              </a:rPr>
+              <a:t>The detector stays silent where nothing happened</a:t>
+            </a:r>
+          </a:p>
+        </p:txBody>
+      </p:sp>
+      <p:sp>
+        <p:nvSpPr>
+          <p:cNvPr id="9" name="TextBox 8"/>
+          <p:cNvSpPr txBox="1"/>
+          <p:nvPr/>
+        </p:nvSpPr>
+        <p:spPr>
+          <a:xfrm>
+            <a:off x="914400" y="3360884"/>
+            <a:ext cx="2954528" cy="284649"/>
+          </a:xfrm>
+          <a:prstGeom prst="rect">
+            <a:avLst/>
+          </a:prstGeom>
+          <a:noFill/>
+        </p:spPr>
+        <p:txBody>
+          <a:bodyPr wrap="square" anchor="t" lIns="0" rIns="0" tIns="0" bIns="0">
+            <a:normAutofit/>
+          </a:bodyPr>
+          <a:lstStyle/>
+          <a:p>
+            <a:pPr algn="l">
+              <a:lnSpc>
+                <a:spcPct val="99097"/>
+              </a:lnSpc>
+            </a:pPr>
+            <a:r>
+              <a:rPr sz="1600" b="0">
+                <a:solidFill>
+                  <a:srgbClr val="DCE6EE"/>
+                </a:solidFill>
+                <a:latin typeface="Inter SemiBold"/>
+                <a:cs typeface="Inter SemiBold"/>
+                <a:sym typeface="Inter SemiBold"/>
+              </a:rPr>
+              <a:t>Case study</a:t>
+            </a:r>
+          </a:p>
+        </p:txBody>
+      </p:sp>
+      <p:sp>
+        <p:nvSpPr>
+          <p:cNvPr id="10" name="TextBox 9"/>
+          <p:cNvSpPr txBox="1"/>
+          <p:nvPr/>
+        </p:nvSpPr>
+        <p:spPr>
+          <a:xfrm>
+            <a:off x="914400" y="3683728"/>
+            <a:ext cx="2954528" cy="1295284"/>
+          </a:xfrm>
+          <a:prstGeom prst="rect">
+            <a:avLst/>
+          </a:prstGeom>
+          <a:noFill/>
+        </p:spPr>
+        <p:txBody>
+          <a:bodyPr wrap="square" anchor="t" lIns="0" rIns="0" tIns="0" bIns="0">
+            <a:normAutofit/>
+          </a:bodyPr>
+          <a:lstStyle/>
+          <a:p>
+            <a:pPr algn="l">
+              <a:lnSpc>
+                <a:spcPct val="112734"/>
+              </a:lnSpc>
+            </a:pPr>
+            <a:r>
+              <a:rPr sz="1500" b="0">
+                <a:solidFill>
+                  <a:srgbClr val="8DA0AE"/>
+                </a:solidFill>
+                <a:latin typeface="Space Grotesk"/>
+                <a:cs typeface="Space Grotesk"/>
+                <a:sym typeface="Space Grotesk"/>
+              </a:rPr>
+              <a:t>change_detected with 3.14 km² flagged and a 0.211 km² minimum detectable area</a:t>
+            </a:r>
+          </a:p>
+        </p:txBody>
+      </p:sp>
+      <p:sp>
+        <p:nvSpPr>
+          <p:cNvPr id="11" name="TextBox 10"/>
+          <p:cNvSpPr txBox="1"/>
+          <p:nvPr/>
+        </p:nvSpPr>
+        <p:spPr>
+          <a:xfrm>
+            <a:off x="4618736" y="3360884"/>
+            <a:ext cx="2954528" cy="284649"/>
+          </a:xfrm>
+          <a:prstGeom prst="rect">
+            <a:avLst/>
+          </a:prstGeom>
+          <a:noFill/>
+        </p:spPr>
+        <p:txBody>
+          <a:bodyPr wrap="square" anchor="t" lIns="0" rIns="0" tIns="0" bIns="0">
+            <a:normAutofit/>
+          </a:bodyPr>
+          <a:lstStyle/>
+          <a:p>
+            <a:pPr algn="l">
+              <a:lnSpc>
+                <a:spcPct val="99097"/>
+              </a:lnSpc>
+            </a:pPr>
+            <a:r>
+              <a:rPr sz="1600" b="0">
+                <a:solidFill>
+                  <a:srgbClr val="DCE6EE"/>
+                </a:solidFill>
+                <a:latin typeface="Inter SemiBold"/>
+                <a:cs typeface="Inter SemiBold"/>
+                <a:sym typeface="Inter SemiBold"/>
+              </a:rPr>
+              <a:t>Negative control</a:t>
+            </a:r>
+          </a:p>
+        </p:txBody>
+      </p:sp>
+      <p:sp>
+        <p:nvSpPr>
+          <p:cNvPr id="12" name="TextBox 11"/>
+          <p:cNvSpPr txBox="1"/>
+          <p:nvPr/>
+        </p:nvSpPr>
+        <p:spPr>
+          <a:xfrm>
+            <a:off x="4618736" y="3683728"/>
+            <a:ext cx="2954528" cy="1295284"/>
+          </a:xfrm>
+          <a:prstGeom prst="rect">
+            <a:avLst/>
+          </a:prstGeom>
+          <a:noFill/>
+        </p:spPr>
+        <p:txBody>
+          <a:bodyPr wrap="square" anchor="t" lIns="0" rIns="0" tIns="0" bIns="0">
+            <a:normAutofit/>
+          </a:bodyPr>
+          <a:lstStyle/>
+          <a:p>
+            <a:pPr algn="l">
+              <a:lnSpc>
+                <a:spcPct val="112734"/>
+              </a:lnSpc>
+            </a:pPr>
+            <a:r>
+              <a:rPr sz="1500" b="0">
+                <a:solidFill>
+                  <a:srgbClr val="8DA0AE"/>
+                </a:solidFill>
+                <a:latin typeface="Space Grotesk"/>
+                <a:cs typeface="Space Grotesk"/>
+                <a:sym typeface="Space Grotesk"/>
+              </a:rPr>
+              <a:t>A pre-event scene returns no_significant_change and zero area</a:t>
+            </a:r>
+          </a:p>
+        </p:txBody>
+      </p:sp>
+      <p:sp>
+        <p:nvSpPr>
+          <p:cNvPr id="13" name="TextBox 12"/>
+          <p:cNvSpPr txBox="1"/>
+          <p:nvPr/>
+        </p:nvSpPr>
+        <p:spPr>
+          <a:xfrm>
+            <a:off x="8323072" y="3360884"/>
+            <a:ext cx="2954528" cy="284649"/>
+          </a:xfrm>
+          <a:prstGeom prst="rect">
+            <a:avLst/>
+          </a:prstGeom>
+          <a:noFill/>
+        </p:spPr>
+        <p:txBody>
+          <a:bodyPr wrap="square" anchor="t" lIns="0" rIns="0" tIns="0" bIns="0">
+            <a:normAutofit/>
+          </a:bodyPr>
+          <a:lstStyle/>
+          <a:p>
+            <a:pPr algn="l">
+              <a:lnSpc>
+                <a:spcPct val="99097"/>
+              </a:lnSpc>
+            </a:pPr>
+            <a:r>
+              <a:rPr sz="1600" b="0">
+                <a:solidFill>
+                  <a:srgbClr val="DCE6EE"/>
+                </a:solidFill>
+                <a:latin typeface="Inter SemiBold"/>
+                <a:cs typeface="Inter SemiBold"/>
+                <a:sym typeface="Inter SemiBold"/>
+              </a:rPr>
+              <a:t>Terai test</a:t>
+            </a:r>
+          </a:p>
+        </p:txBody>
+      </p:sp>
+      <p:sp>
+        <p:nvSpPr>
+          <p:cNvPr id="14" name="TextBox 13"/>
+          <p:cNvSpPr txBox="1"/>
+          <p:nvPr/>
+        </p:nvSpPr>
+        <p:spPr>
+          <a:xfrm>
+            <a:off x="8323072" y="3683728"/>
+            <a:ext cx="2954528" cy="1295284"/>
+          </a:xfrm>
+          <a:prstGeom prst="rect">
+            <a:avLst/>
+          </a:prstGeom>
+          <a:noFill/>
+        </p:spPr>
+        <p:txBody>
+          <a:bodyPr wrap="square" anchor="t" lIns="0" rIns="0" tIns="0" bIns="0">
+            <a:normAutofit/>
+          </a:bodyPr>
+          <a:lstStyle/>
+          <a:p>
+            <a:pPr algn="l">
+              <a:lnSpc>
+                <a:spcPct val="112734"/>
+              </a:lnSpc>
+            </a:pPr>
+            <a:r>
+              <a:rPr sz="1500" b="0">
+                <a:solidFill>
+                  <a:srgbClr val="8DA0AE"/>
+                </a:solidFill>
+                <a:latin typeface="Space Grotesk"/>
+                <a:cs typeface="Space Grotesk"/>
+                <a:sym typeface="Space Grotesk"/>
+              </a:rPr>
+              <a:t>Uncalibrated so it reports a 17.37 km² minimum detectable area instead of guessing</a:t>
             </a:r>
           </a:p>
         </p:txBody>
@@ -3595,6 +10560,14 @@
 <file path=ppt/slides/slide7.xml><?xml version="1.0" encoding="utf-8"?>
 <p:sld xmlns:a="http://schemas.openxmlformats.org/drawingml/2006/main" xmlns:p="http://schemas.openxmlformats.org/presentationml/2006/main" xmlns:r="http://schemas.openxmlformats.org/officeDocument/2006/relationships">
   <p:cSld>
+    <p:bg>
+      <p:bgPr>
+        <a:solidFill>
+          <a:srgbClr val="0C1620"/>
+        </a:solidFill>
+        <a:effectLst/>
+      </p:bgPr>
+    </p:bg>
     <p:spTree>
       <p:nvGrpSpPr>
         <p:cNvPr id="1" name=""/>
@@ -3604,77 +10577,247 @@
       <p:grpSpPr/>
       <p:sp>
         <p:nvSpPr>
-          <p:cNvPr id="2" name="Title 1"/>
-          <p:cNvSpPr>
-            <a:spLocks noGrp="1"/>
-          </p:cNvSpPr>
-          <p:nvPr>
-            <p:ph type="title"/>
-          </p:nvPr>
-        </p:nvSpPr>
-        <p:spPr/>
-        <p:txBody>
-          <a:bodyPr/>
-          <a:lstStyle/>
-          <a:p>
-            <a:r>
-              <a:t>Validation</a:t>
-            </a:r>
-          </a:p>
-        </p:txBody>
-      </p:sp>
-      <p:sp>
-        <p:nvSpPr>
-          <p:cNvPr id="3" name="Content Placeholder 2"/>
-          <p:cNvSpPr>
-            <a:spLocks noGrp="1"/>
-          </p:cNvSpPr>
-          <p:nvPr>
-            <p:ph idx="1"/>
-          </p:nvPr>
-        </p:nvSpPr>
-        <p:spPr/>
-        <p:txBody>
-          <a:bodyPr/>
-          <a:lstStyle/>
-          <a:p>
-            <a:pPr>
-              <a:defRPr sz="1800"/>
-            </a:pPr>
-            <a:r>
-              <a:t>• Check-only reference: EMSR927 landslide polygons and damage points (GRA products)</a:t>
-            </a:r>
-          </a:p>
-          <a:p>
-            <a:pPr>
-              <a:defRPr sz="1800"/>
-            </a:pPr>
-            <a:r>
-              <a:t>• Hold-out AOI03 vs landslide polygons: precision 0.93, recall 0.17, IoU 0.17</a:t>
-            </a:r>
-          </a:p>
-          <a:p>
-            <a:pPr>
-              <a:defRPr sz="1800"/>
-            </a:pPr>
-            <a:r>
-              <a:t>• Damage-point recall at 0 m: 23% [11%-33%], indistinguishable from chance</a:t>
-            </a:r>
-          </a:p>
-          <a:p>
-            <a:pPr>
-              <a:defRPr sz="1800"/>
-            </a:pPr>
-            <a:r>
-              <a:t>• No flood-extent layer: the flood class is not validated against EMS</a:t>
-            </a:r>
-          </a:p>
-          <a:p>
-            <a:pPr>
-              <a:defRPr sz="1800"/>
-            </a:pPr>
-            <a:r>
-              <a:t>• Water model on the corridor (prediction-only): not separable from the nulls, so it is not independent evidence</a:t>
+          <p:cNvPr id="2" name="Rectangle 1"/>
+          <p:cNvSpPr/>
+          <p:nvPr/>
+        </p:nvSpPr>
+        <p:spPr>
+          <a:xfrm>
+            <a:off x="0" y="0"/>
+            <a:ext cx="276515" cy="6858000"/>
+          </a:xfrm>
+          <a:prstGeom prst="rect">
+            <a:avLst/>
+          </a:prstGeom>
+          <a:solidFill>
+            <a:srgbClr val="4BC7D6"/>
+          </a:solidFill>
+          <a:ln>
+            <a:noFill/>
+          </a:ln>
+          <a:effectLst/>
+        </p:spPr>
+        <p:style>
+          <a:lnRef idx="1">
+            <a:schemeClr val="accent1"/>
+          </a:lnRef>
+          <a:fillRef idx="3">
+            <a:schemeClr val="accent1"/>
+          </a:fillRef>
+          <a:effectRef idx="2">
+            <a:schemeClr val="accent1"/>
+          </a:effectRef>
+          <a:fontRef idx="minor">
+            <a:schemeClr val="lt1"/>
+          </a:fontRef>
+        </p:style>
+        <p:txBody>
+          <a:bodyPr rtlCol="0" anchor="ctr"/>
+          <a:lstStyle/>
+          <a:p/>
+        </p:txBody>
+      </p:sp>
+      <p:sp>
+        <p:nvSpPr>
+          <p:cNvPr id="3" name="TextBox 2"/>
+          <p:cNvSpPr txBox="1"/>
+          <p:nvPr/>
+        </p:nvSpPr>
+        <p:spPr>
+          <a:xfrm>
+            <a:off x="658368" y="342351"/>
+            <a:ext cx="5437632" cy="209929"/>
+          </a:xfrm>
+          <a:prstGeom prst="rect">
+            <a:avLst/>
+          </a:prstGeom>
+          <a:noFill/>
+        </p:spPr>
+        <p:txBody>
+          <a:bodyPr wrap="square" anchor="t" lIns="0" rIns="0" tIns="0" bIns="0">
+            <a:normAutofit/>
+          </a:bodyPr>
+          <a:lstStyle/>
+          <a:p>
+            <a:pPr algn="l">
+              <a:lnSpc>
+                <a:spcPct val="97445"/>
+              </a:lnSpc>
+            </a:pPr>
+            <a:r>
+              <a:rPr sz="1100" b="0" spc="70">
+                <a:solidFill>
+                  <a:srgbClr val="8DA0AE"/>
+                </a:solidFill>
+                <a:latin typeface="Inter SemiBold"/>
+                <a:cs typeface="Inter SemiBold"/>
+                <a:sym typeface="Inter SemiBold"/>
+              </a:rPr>
+              <a:t>TRISHULI-FLOOD-MAPPING</a:t>
+            </a:r>
+          </a:p>
+        </p:txBody>
+      </p:sp>
+      <p:sp>
+        <p:nvSpPr>
+          <p:cNvPr id="4" name="TextBox 3"/>
+          <p:cNvSpPr txBox="1"/>
+          <p:nvPr/>
+        </p:nvSpPr>
+        <p:spPr>
+          <a:xfrm>
+            <a:off x="10253472" y="342351"/>
+            <a:ext cx="1280160" cy="187924"/>
+          </a:xfrm>
+          <a:prstGeom prst="rect">
+            <a:avLst/>
+          </a:prstGeom>
+          <a:noFill/>
+        </p:spPr>
+        <p:txBody>
+          <a:bodyPr wrap="square" anchor="t" lIns="0" rIns="0" tIns="0" bIns="0">
+            <a:normAutofit/>
+          </a:bodyPr>
+          <a:lstStyle/>
+          <a:p>
+            <a:pPr algn="r">
+              <a:lnSpc>
+                <a:spcPct val="97445"/>
+              </a:lnSpc>
+            </a:pPr>
+            <a:r>
+              <a:rPr sz="1100" b="0" spc="70">
+                <a:solidFill>
+                  <a:srgbClr val="8DA0AE"/>
+                </a:solidFill>
+                <a:latin typeface="Inter SemiBold"/>
+                <a:cs typeface="Inter SemiBold"/>
+                <a:sym typeface="Inter SemiBold"/>
+              </a:rPr>
+              <a:t>07 / 13</a:t>
+            </a:r>
+          </a:p>
+        </p:txBody>
+      </p:sp>
+      <p:sp>
+        <p:nvSpPr>
+          <p:cNvPr id="5" name="TextBox 4"/>
+          <p:cNvSpPr txBox="1"/>
+          <p:nvPr/>
+        </p:nvSpPr>
+        <p:spPr>
+          <a:xfrm>
+            <a:off x="658368" y="2002522"/>
+            <a:ext cx="8700211" cy="894665"/>
+          </a:xfrm>
+          <a:prstGeom prst="rect">
+            <a:avLst/>
+          </a:prstGeom>
+          <a:noFill/>
+        </p:spPr>
+        <p:txBody>
+          <a:bodyPr wrap="square" anchor="t" lIns="0" rIns="0" tIns="0" bIns="0">
+            <a:normAutofit/>
+          </a:bodyPr>
+          <a:lstStyle/>
+          <a:p>
+            <a:pPr algn="l">
+              <a:lnSpc>
+                <a:spcPct val="88496"/>
+              </a:lnSpc>
+            </a:pPr>
+            <a:r>
+              <a:rPr sz="5400" b="0">
+                <a:solidFill>
+                  <a:srgbClr val="4BC7D6"/>
+                </a:solidFill>
+                <a:latin typeface="Space Grotesk Bold"/>
+                <a:cs typeface="Space Grotesk Bold"/>
+                <a:sym typeface="Space Grotesk Bold"/>
+              </a:rPr>
+              <a:t>02</a:t>
+            </a:r>
+          </a:p>
+        </p:txBody>
+      </p:sp>
+      <p:sp>
+        <p:nvSpPr>
+          <p:cNvPr id="6" name="TextBox 5"/>
+          <p:cNvSpPr txBox="1"/>
+          <p:nvPr/>
+        </p:nvSpPr>
+        <p:spPr>
+          <a:xfrm>
+            <a:off x="658368" y="2897044"/>
+            <a:ext cx="8700211" cy="1396550"/>
+          </a:xfrm>
+          <a:prstGeom prst="rect">
+            <a:avLst/>
+          </a:prstGeom>
+          <a:noFill/>
+        </p:spPr>
+        <p:txBody>
+          <a:bodyPr wrap="square" anchor="t" lIns="0" rIns="0" tIns="0" bIns="0">
+            <a:normAutofit/>
+          </a:bodyPr>
+          <a:lstStyle/>
+          <a:p>
+            <a:pPr algn="l">
+              <a:lnSpc>
+                <a:spcPct val="88496"/>
+              </a:lnSpc>
+            </a:pPr>
+            <a:r>
+              <a:rPr sz="4264" b="0">
+                <a:solidFill>
+                  <a:srgbClr val="DCE6EE"/>
+                </a:solidFill>
+                <a:latin typeface="Space Grotesk Bold"/>
+                <a:cs typeface="Space Grotesk Bold"/>
+                <a:sym typeface="Space Grotesk Bold"/>
+              </a:rPr>
+              <a:t>Exposure is counted and never declared damage</a:t>
+            </a:r>
+          </a:p>
+        </p:txBody>
+      </p:sp>
+      <p:sp>
+        <p:nvSpPr>
+          <p:cNvPr id="7" name="TextBox 6"/>
+          <p:cNvSpPr txBox="1"/>
+          <p:nvPr/>
+        </p:nvSpPr>
+        <p:spPr>
+          <a:xfrm>
+            <a:off x="658368" y="4396408"/>
+            <a:ext cx="5981395" cy="776021"/>
+          </a:xfrm>
+          <a:prstGeom prst="rect">
+            <a:avLst/>
+          </a:prstGeom>
+          <a:noFill/>
+        </p:spPr>
+        <p:txBody>
+          <a:bodyPr wrap="square" anchor="t" lIns="0" rIns="0" tIns="0" bIns="0">
+            <a:normAutofit/>
+          </a:bodyPr>
+          <a:lstStyle/>
+          <a:p>
+            <a:pPr algn="l">
+              <a:lnSpc>
+                <a:spcPct val="104905"/>
+              </a:lnSpc>
+            </a:pPr>
+            <a:r>
+              <a:rPr sz="1900" b="0">
+                <a:solidFill>
+                  <a:srgbClr val="DCE6EE"/>
+                </a:solidFill>
+                <a:latin typeface="Space Grotesk"/>
+                <a:cs typeface="Space Grotesk"/>
+                <a:sym typeface="Space Grotesk"/>
+              </a:rPr>
+              <a:t>Bridges are exposed not failed. Ground the radar cannot see stays unknown.</a:t>
             </a:r>
           </a:p>
         </p:txBody>
@@ -3690,6 +10833,14 @@
 <file path=ppt/slides/slide8.xml><?xml version="1.0" encoding="utf-8"?>
 <p:sld xmlns:a="http://schemas.openxmlformats.org/drawingml/2006/main" xmlns:p="http://schemas.openxmlformats.org/presentationml/2006/main" xmlns:r="http://schemas.openxmlformats.org/officeDocument/2006/relationships">
   <p:cSld>
+    <p:bg>
+      <p:bgPr>
+        <a:solidFill>
+          <a:srgbClr val="0C1620"/>
+        </a:solidFill>
+        <a:effectLst/>
+      </p:bgPr>
+    </p:bg>
     <p:spTree>
       <p:nvGrpSpPr>
         <p:cNvPr id="1" name=""/>
@@ -3699,69 +10850,825 @@
       <p:grpSpPr/>
       <p:sp>
         <p:nvSpPr>
-          <p:cNvPr id="2" name="Title 1"/>
-          <p:cNvSpPr>
-            <a:spLocks noGrp="1"/>
-          </p:cNvSpPr>
-          <p:nvPr>
-            <p:ph type="title"/>
-          </p:nvPr>
-        </p:nvSpPr>
-        <p:spPr/>
-        <p:txBody>
-          <a:bodyPr/>
-          <a:lstStyle/>
-          <a:p>
-            <a:r>
-              <a:t>Deliverables</a:t>
-            </a:r>
-          </a:p>
-        </p:txBody>
-      </p:sp>
-      <p:sp>
-        <p:nvSpPr>
-          <p:cNvPr id="3" name="Content Placeholder 2"/>
-          <p:cNvSpPr>
-            <a:spLocks noGrp="1"/>
-          </p:cNvSpPr>
-          <p:nvPr>
-            <p:ph idx="1"/>
-          </p:nvPr>
-        </p:nvSpPr>
-        <p:spPr/>
-        <p:txBody>
-          <a:bodyPr/>
-          <a:lstStyle/>
-          <a:p>
-            <a:pPr>
-              <a:defRPr sz="2200"/>
-            </a:pPr>
-            <a:r>
-              <a:t>• Interactive dashboard (outputs/dashboard/index.html, works offline)</a:t>
-            </a:r>
-          </a:p>
-          <a:p>
-            <a:pPr>
-              <a:defRPr sz="2200"/>
-            </a:pPr>
-            <a:r>
-              <a:t>• Situation reports (EN, NE, one page) and docs/REPORT.pdf</a:t>
-            </a:r>
-          </a:p>
-          <a:p>
-            <a:pPr>
-              <a:defRPr sz="2200"/>
-            </a:pPr>
-            <a:r>
-              <a:t>• Reproducible pipeline: python -m src.run (SNAP route; --s1-source pc cross-check)</a:t>
-            </a:r>
-          </a:p>
-          <a:p>
-            <a:pPr>
-              <a:defRPr sz="2200"/>
-            </a:pPr>
-            <a:r>
-              <a:t>• Water-model weights (models/)</a:t>
+          <p:cNvPr id="2" name="Rectangle 1"/>
+          <p:cNvSpPr/>
+          <p:nvPr/>
+        </p:nvSpPr>
+        <p:spPr>
+          <a:xfrm>
+            <a:off x="0" y="0"/>
+            <a:ext cx="276515" cy="6858000"/>
+          </a:xfrm>
+          <a:prstGeom prst="rect">
+            <a:avLst/>
+          </a:prstGeom>
+          <a:solidFill>
+            <a:srgbClr val="4BC7D6"/>
+          </a:solidFill>
+          <a:ln>
+            <a:noFill/>
+          </a:ln>
+          <a:effectLst/>
+        </p:spPr>
+        <p:style>
+          <a:lnRef idx="1">
+            <a:schemeClr val="accent1"/>
+          </a:lnRef>
+          <a:fillRef idx="3">
+            <a:schemeClr val="accent1"/>
+          </a:fillRef>
+          <a:effectRef idx="2">
+            <a:schemeClr val="accent1"/>
+          </a:effectRef>
+          <a:fontRef idx="minor">
+            <a:schemeClr val="lt1"/>
+          </a:fontRef>
+        </p:style>
+        <p:txBody>
+          <a:bodyPr rtlCol="0" anchor="ctr"/>
+          <a:lstStyle/>
+          <a:p/>
+        </p:txBody>
+      </p:sp>
+      <p:sp>
+        <p:nvSpPr>
+          <p:cNvPr id="3" name="Rectangle 2"/>
+          <p:cNvSpPr/>
+          <p:nvPr/>
+        </p:nvSpPr>
+        <p:spPr>
+          <a:xfrm>
+            <a:off x="658368" y="2416365"/>
+            <a:ext cx="2540508" cy="3348097"/>
+          </a:xfrm>
+          <a:prstGeom prst="rect">
+            <a:avLst/>
+          </a:prstGeom>
+          <a:solidFill>
+            <a:srgbClr val="17212B"/>
+          </a:solidFill>
+          <a:ln>
+            <a:noFill/>
+          </a:ln>
+          <a:effectLst/>
+        </p:spPr>
+        <p:style>
+          <a:lnRef idx="1">
+            <a:schemeClr val="accent1"/>
+          </a:lnRef>
+          <a:fillRef idx="3">
+            <a:schemeClr val="accent1"/>
+          </a:fillRef>
+          <a:effectRef idx="2">
+            <a:schemeClr val="accent1"/>
+          </a:effectRef>
+          <a:fontRef idx="minor">
+            <a:schemeClr val="lt1"/>
+          </a:fontRef>
+        </p:style>
+        <p:txBody>
+          <a:bodyPr rtlCol="0" anchor="ctr"/>
+          <a:lstStyle/>
+          <a:p/>
+        </p:txBody>
+      </p:sp>
+      <p:sp>
+        <p:nvSpPr>
+          <p:cNvPr id="4" name="Rectangle 3"/>
+          <p:cNvSpPr/>
+          <p:nvPr/>
+        </p:nvSpPr>
+        <p:spPr>
+          <a:xfrm>
+            <a:off x="3436620" y="2416365"/>
+            <a:ext cx="2540508" cy="3348097"/>
+          </a:xfrm>
+          <a:prstGeom prst="rect">
+            <a:avLst/>
+          </a:prstGeom>
+          <a:solidFill>
+            <a:srgbClr val="17212B"/>
+          </a:solidFill>
+          <a:ln>
+            <a:noFill/>
+          </a:ln>
+          <a:effectLst/>
+        </p:spPr>
+        <p:style>
+          <a:lnRef idx="1">
+            <a:schemeClr val="accent1"/>
+          </a:lnRef>
+          <a:fillRef idx="3">
+            <a:schemeClr val="accent1"/>
+          </a:fillRef>
+          <a:effectRef idx="2">
+            <a:schemeClr val="accent1"/>
+          </a:effectRef>
+          <a:fontRef idx="minor">
+            <a:schemeClr val="lt1"/>
+          </a:fontRef>
+        </p:style>
+        <p:txBody>
+          <a:bodyPr rtlCol="0" anchor="ctr"/>
+          <a:lstStyle/>
+          <a:p/>
+        </p:txBody>
+      </p:sp>
+      <p:sp>
+        <p:nvSpPr>
+          <p:cNvPr id="5" name="Rectangle 4"/>
+          <p:cNvSpPr/>
+          <p:nvPr/>
+        </p:nvSpPr>
+        <p:spPr>
+          <a:xfrm>
+            <a:off x="6214872" y="2416365"/>
+            <a:ext cx="2540508" cy="3348097"/>
+          </a:xfrm>
+          <a:prstGeom prst="rect">
+            <a:avLst/>
+          </a:prstGeom>
+          <a:solidFill>
+            <a:srgbClr val="17212B"/>
+          </a:solidFill>
+          <a:ln>
+            <a:noFill/>
+          </a:ln>
+          <a:effectLst/>
+        </p:spPr>
+        <p:style>
+          <a:lnRef idx="1">
+            <a:schemeClr val="accent1"/>
+          </a:lnRef>
+          <a:fillRef idx="3">
+            <a:schemeClr val="accent1"/>
+          </a:fillRef>
+          <a:effectRef idx="2">
+            <a:schemeClr val="accent1"/>
+          </a:effectRef>
+          <a:fontRef idx="minor">
+            <a:schemeClr val="lt1"/>
+          </a:fontRef>
+        </p:style>
+        <p:txBody>
+          <a:bodyPr rtlCol="0" anchor="ctr"/>
+          <a:lstStyle/>
+          <a:p/>
+        </p:txBody>
+      </p:sp>
+      <p:sp>
+        <p:nvSpPr>
+          <p:cNvPr id="6" name="Rectangle 5"/>
+          <p:cNvSpPr/>
+          <p:nvPr/>
+        </p:nvSpPr>
+        <p:spPr>
+          <a:xfrm>
+            <a:off x="8993124" y="2416365"/>
+            <a:ext cx="2540508" cy="3348097"/>
+          </a:xfrm>
+          <a:prstGeom prst="rect">
+            <a:avLst/>
+          </a:prstGeom>
+          <a:solidFill>
+            <a:srgbClr val="17212B"/>
+          </a:solidFill>
+          <a:ln>
+            <a:noFill/>
+          </a:ln>
+          <a:effectLst/>
+        </p:spPr>
+        <p:style>
+          <a:lnRef idx="1">
+            <a:schemeClr val="accent1"/>
+          </a:lnRef>
+          <a:fillRef idx="3">
+            <a:schemeClr val="accent1"/>
+          </a:fillRef>
+          <a:effectRef idx="2">
+            <a:schemeClr val="accent1"/>
+          </a:effectRef>
+          <a:fontRef idx="minor">
+            <a:schemeClr val="lt1"/>
+          </a:fontRef>
+        </p:style>
+        <p:txBody>
+          <a:bodyPr rtlCol="0" anchor="ctr"/>
+          <a:lstStyle/>
+          <a:p/>
+        </p:txBody>
+      </p:sp>
+      <p:sp>
+        <p:nvSpPr>
+          <p:cNvPr id="7" name="TextBox 6"/>
+          <p:cNvSpPr txBox="1"/>
+          <p:nvPr/>
+        </p:nvSpPr>
+        <p:spPr>
+          <a:xfrm>
+            <a:off x="658368" y="342351"/>
+            <a:ext cx="5437632" cy="209929"/>
+          </a:xfrm>
+          <a:prstGeom prst="rect">
+            <a:avLst/>
+          </a:prstGeom>
+          <a:noFill/>
+        </p:spPr>
+        <p:txBody>
+          <a:bodyPr wrap="square" anchor="t" lIns="0" rIns="0" tIns="0" bIns="0">
+            <a:normAutofit/>
+          </a:bodyPr>
+          <a:lstStyle/>
+          <a:p>
+            <a:pPr algn="l">
+              <a:lnSpc>
+                <a:spcPct val="97445"/>
+              </a:lnSpc>
+            </a:pPr>
+            <a:r>
+              <a:rPr sz="1100" b="0" spc="70">
+                <a:solidFill>
+                  <a:srgbClr val="8DA0AE"/>
+                </a:solidFill>
+                <a:latin typeface="Inter SemiBold"/>
+                <a:cs typeface="Inter SemiBold"/>
+                <a:sym typeface="Inter SemiBold"/>
+              </a:rPr>
+              <a:t>TRISHULI-FLOOD-MAPPING</a:t>
+            </a:r>
+          </a:p>
+        </p:txBody>
+      </p:sp>
+      <p:sp>
+        <p:nvSpPr>
+          <p:cNvPr id="8" name="TextBox 7"/>
+          <p:cNvSpPr txBox="1"/>
+          <p:nvPr/>
+        </p:nvSpPr>
+        <p:spPr>
+          <a:xfrm>
+            <a:off x="10253472" y="342351"/>
+            <a:ext cx="1280160" cy="187924"/>
+          </a:xfrm>
+          <a:prstGeom prst="rect">
+            <a:avLst/>
+          </a:prstGeom>
+          <a:noFill/>
+        </p:spPr>
+        <p:txBody>
+          <a:bodyPr wrap="square" anchor="t" lIns="0" rIns="0" tIns="0" bIns="0">
+            <a:normAutofit/>
+          </a:bodyPr>
+          <a:lstStyle/>
+          <a:p>
+            <a:pPr algn="r">
+              <a:lnSpc>
+                <a:spcPct val="97445"/>
+              </a:lnSpc>
+            </a:pPr>
+            <a:r>
+              <a:rPr sz="1100" b="0" spc="70">
+                <a:solidFill>
+                  <a:srgbClr val="8DA0AE"/>
+                </a:solidFill>
+                <a:latin typeface="Inter SemiBold"/>
+                <a:cs typeface="Inter SemiBold"/>
+                <a:sym typeface="Inter SemiBold"/>
+              </a:rPr>
+              <a:t>08 / 13</a:t>
+            </a:r>
+          </a:p>
+        </p:txBody>
+      </p:sp>
+      <p:sp>
+        <p:nvSpPr>
+          <p:cNvPr id="9" name="TextBox 8"/>
+          <p:cNvSpPr txBox="1"/>
+          <p:nvPr/>
+        </p:nvSpPr>
+        <p:spPr>
+          <a:xfrm>
+            <a:off x="658368" y="1093539"/>
+            <a:ext cx="6742664" cy="1091055"/>
+          </a:xfrm>
+          <a:prstGeom prst="rect">
+            <a:avLst/>
+          </a:prstGeom>
+          <a:noFill/>
+        </p:spPr>
+        <p:txBody>
+          <a:bodyPr wrap="square" anchor="t" lIns="0" rIns="0" tIns="0" bIns="0">
+            <a:normAutofit/>
+          </a:bodyPr>
+          <a:lstStyle/>
+          <a:p>
+            <a:pPr algn="l">
+              <a:lnSpc>
+                <a:spcPct val="88496"/>
+              </a:lnSpc>
+            </a:pPr>
+            <a:r>
+              <a:rPr sz="3279" b="0">
+                <a:solidFill>
+                  <a:srgbClr val="DCE6EE"/>
+                </a:solidFill>
+                <a:latin typeface="Space Grotesk Bold"/>
+                <a:cs typeface="Space Grotesk Bold"/>
+                <a:sym typeface="Space Grotesk Bold"/>
+              </a:rPr>
+              <a:t>Four settlements lost every road route to a hospital</a:t>
+            </a:r>
+          </a:p>
+        </p:txBody>
+      </p:sp>
+      <p:sp>
+        <p:nvSpPr>
+          <p:cNvPr id="10" name="TextBox 9"/>
+          <p:cNvSpPr txBox="1"/>
+          <p:nvPr/>
+        </p:nvSpPr>
+        <p:spPr>
+          <a:xfrm>
+            <a:off x="914400" y="2672397"/>
+            <a:ext cx="2028444" cy="894665"/>
+          </a:xfrm>
+          <a:prstGeom prst="rect">
+            <a:avLst/>
+          </a:prstGeom>
+          <a:noFill/>
+        </p:spPr>
+        <p:txBody>
+          <a:bodyPr wrap="square" anchor="t" lIns="0" rIns="0" tIns="0" bIns="0">
+            <a:normAutofit/>
+          </a:bodyPr>
+          <a:lstStyle/>
+          <a:p>
+            <a:pPr algn="l">
+              <a:lnSpc>
+                <a:spcPct val="88496"/>
+              </a:lnSpc>
+            </a:pPr>
+            <a:r>
+              <a:rPr sz="5400" b="0">
+                <a:solidFill>
+                  <a:srgbClr val="DCE6EE"/>
+                </a:solidFill>
+                <a:latin typeface="Space Grotesk Bold"/>
+                <a:cs typeface="Space Grotesk Bold"/>
+                <a:sym typeface="Space Grotesk Bold"/>
+              </a:rPr>
+              <a:t>556</a:t>
+            </a:r>
+          </a:p>
+        </p:txBody>
+      </p:sp>
+      <p:sp>
+        <p:nvSpPr>
+          <p:cNvPr id="11" name="TextBox 10"/>
+          <p:cNvSpPr txBox="1"/>
+          <p:nvPr/>
+        </p:nvSpPr>
+        <p:spPr>
+          <a:xfrm>
+            <a:off x="914400" y="3548631"/>
+            <a:ext cx="2028444" cy="569298"/>
+          </a:xfrm>
+          <a:prstGeom prst="rect">
+            <a:avLst/>
+          </a:prstGeom>
+          <a:noFill/>
+        </p:spPr>
+        <p:txBody>
+          <a:bodyPr wrap="square" anchor="t" lIns="0" rIns="0" tIns="0" bIns="0">
+            <a:normAutofit/>
+          </a:bodyPr>
+          <a:lstStyle/>
+          <a:p>
+            <a:pPr algn="l">
+              <a:lnSpc>
+                <a:spcPct val="99097"/>
+              </a:lnSpc>
+            </a:pPr>
+            <a:r>
+              <a:rPr sz="1600" b="0">
+                <a:solidFill>
+                  <a:srgbClr val="DCE6EE"/>
+                </a:solidFill>
+                <a:latin typeface="Inter SemiBold"/>
+                <a:cs typeface="Inter SemiBold"/>
+                <a:sym typeface="Inter SemiBold"/>
+              </a:rPr>
+              <a:t>Buildings in the mask</a:t>
+            </a:r>
+          </a:p>
+        </p:txBody>
+      </p:sp>
+      <p:sp>
+        <p:nvSpPr>
+          <p:cNvPr id="12" name="TextBox 11"/>
+          <p:cNvSpPr txBox="1"/>
+          <p:nvPr/>
+        </p:nvSpPr>
+        <p:spPr>
+          <a:xfrm>
+            <a:off x="914400" y="4121167"/>
+            <a:ext cx="2028444" cy="971463"/>
+          </a:xfrm>
+          <a:prstGeom prst="rect">
+            <a:avLst/>
+          </a:prstGeom>
+          <a:noFill/>
+        </p:spPr>
+        <p:txBody>
+          <a:bodyPr wrap="square" anchor="t" lIns="0" rIns="0" tIns="0" bIns="0">
+            <a:normAutofit/>
+          </a:bodyPr>
+          <a:lstStyle/>
+          <a:p>
+            <a:pPr algn="l">
+              <a:lnSpc>
+                <a:spcPct val="112734"/>
+              </a:lnSpc>
+            </a:pPr>
+            <a:r>
+              <a:rPr sz="1500" b="0">
+                <a:solidFill>
+                  <a:srgbClr val="8DA0AE"/>
+                </a:solidFill>
+                <a:latin typeface="Space Grotesk"/>
+                <a:cs typeface="Space Grotesk"/>
+                <a:sym typeface="Space Grotesk"/>
+              </a:rPr>
+              <a:t>Range 244 to 1,078 of 189,503 mapped</a:t>
+            </a:r>
+          </a:p>
+        </p:txBody>
+      </p:sp>
+      <p:sp>
+        <p:nvSpPr>
+          <p:cNvPr id="13" name="TextBox 12"/>
+          <p:cNvSpPr txBox="1"/>
+          <p:nvPr/>
+        </p:nvSpPr>
+        <p:spPr>
+          <a:xfrm>
+            <a:off x="3692652" y="2672397"/>
+            <a:ext cx="2028444" cy="1789330"/>
+          </a:xfrm>
+          <a:prstGeom prst="rect">
+            <a:avLst/>
+          </a:prstGeom>
+          <a:noFill/>
+        </p:spPr>
+        <p:txBody>
+          <a:bodyPr wrap="square" anchor="t" lIns="0" rIns="0" tIns="0" bIns="0">
+            <a:normAutofit/>
+          </a:bodyPr>
+          <a:lstStyle/>
+          <a:p>
+            <a:pPr algn="l">
+              <a:lnSpc>
+                <a:spcPct val="88496"/>
+              </a:lnSpc>
+            </a:pPr>
+            <a:r>
+              <a:rPr sz="4427" b="0">
+                <a:solidFill>
+                  <a:srgbClr val="DCE6EE"/>
+                </a:solidFill>
+                <a:latin typeface="Space Grotesk Bold"/>
+                <a:cs typeface="Space Grotesk Bold"/>
+                <a:sym typeface="Space Grotesk Bold"/>
+              </a:rPr>
+              <a:t>11.8 km</a:t>
+            </a:r>
+          </a:p>
+        </p:txBody>
+      </p:sp>
+      <p:sp>
+        <p:nvSpPr>
+          <p:cNvPr id="14" name="TextBox 13"/>
+          <p:cNvSpPr txBox="1"/>
+          <p:nvPr/>
+        </p:nvSpPr>
+        <p:spPr>
+          <a:xfrm>
+            <a:off x="3692652" y="4333425"/>
+            <a:ext cx="2028444" cy="284649"/>
+          </a:xfrm>
+          <a:prstGeom prst="rect">
+            <a:avLst/>
+          </a:prstGeom>
+          <a:noFill/>
+        </p:spPr>
+        <p:txBody>
+          <a:bodyPr wrap="square" anchor="t" lIns="0" rIns="0" tIns="0" bIns="0">
+            <a:normAutofit/>
+          </a:bodyPr>
+          <a:lstStyle/>
+          <a:p>
+            <a:pPr algn="l">
+              <a:lnSpc>
+                <a:spcPct val="99097"/>
+              </a:lnSpc>
+            </a:pPr>
+            <a:r>
+              <a:rPr sz="1600" b="0">
+                <a:solidFill>
+                  <a:srgbClr val="DCE6EE"/>
+                </a:solidFill>
+                <a:latin typeface="Inter SemiBold"/>
+                <a:cs typeface="Inter SemiBold"/>
+                <a:sym typeface="Inter SemiBold"/>
+              </a:rPr>
+              <a:t>Motorable road</a:t>
+            </a:r>
+          </a:p>
+        </p:txBody>
+      </p:sp>
+      <p:sp>
+        <p:nvSpPr>
+          <p:cNvPr id="15" name="TextBox 14"/>
+          <p:cNvSpPr txBox="1"/>
+          <p:nvPr/>
+        </p:nvSpPr>
+        <p:spPr>
+          <a:xfrm>
+            <a:off x="3692652" y="4656269"/>
+            <a:ext cx="2028444" cy="971463"/>
+          </a:xfrm>
+          <a:prstGeom prst="rect">
+            <a:avLst/>
+          </a:prstGeom>
+          <a:noFill/>
+        </p:spPr>
+        <p:txBody>
+          <a:bodyPr wrap="square" anchor="t" lIns="0" rIns="0" tIns="0" bIns="0">
+            <a:normAutofit/>
+          </a:bodyPr>
+          <a:lstStyle/>
+          <a:p>
+            <a:pPr algn="l">
+              <a:lnSpc>
+                <a:spcPct val="112734"/>
+              </a:lnSpc>
+            </a:pPr>
+            <a:r>
+              <a:rPr sz="1500" b="0">
+                <a:solidFill>
+                  <a:srgbClr val="8DA0AE"/>
+                </a:solidFill>
+                <a:latin typeface="Space Grotesk"/>
+                <a:cs typeface="Space Grotesk"/>
+                <a:sym typeface="Space Grotesk"/>
+              </a:rPr>
+              <a:t>Range 6.4 to 22.0 km inside the mask</a:t>
+            </a:r>
+          </a:p>
+        </p:txBody>
+      </p:sp>
+      <p:sp>
+        <p:nvSpPr>
+          <p:cNvPr id="16" name="TextBox 15"/>
+          <p:cNvSpPr txBox="1"/>
+          <p:nvPr/>
+        </p:nvSpPr>
+        <p:spPr>
+          <a:xfrm>
+            <a:off x="6470904" y="2672397"/>
+            <a:ext cx="2028444" cy="894665"/>
+          </a:xfrm>
+          <a:prstGeom prst="rect">
+            <a:avLst/>
+          </a:prstGeom>
+          <a:noFill/>
+        </p:spPr>
+        <p:txBody>
+          <a:bodyPr wrap="square" anchor="t" lIns="0" rIns="0" tIns="0" bIns="0">
+            <a:normAutofit/>
+          </a:bodyPr>
+          <a:lstStyle/>
+          <a:p>
+            <a:pPr algn="l">
+              <a:lnSpc>
+                <a:spcPct val="88496"/>
+              </a:lnSpc>
+            </a:pPr>
+            <a:r>
+              <a:rPr sz="5400" b="0">
+                <a:solidFill>
+                  <a:srgbClr val="DCE6EE"/>
+                </a:solidFill>
+                <a:latin typeface="Space Grotesk Bold"/>
+                <a:cs typeface="Space Grotesk Bold"/>
+                <a:sym typeface="Space Grotesk Bold"/>
+              </a:rPr>
+              <a:t>20</a:t>
+            </a:r>
+          </a:p>
+        </p:txBody>
+      </p:sp>
+      <p:sp>
+        <p:nvSpPr>
+          <p:cNvPr id="17" name="TextBox 16"/>
+          <p:cNvSpPr txBox="1"/>
+          <p:nvPr/>
+        </p:nvSpPr>
+        <p:spPr>
+          <a:xfrm>
+            <a:off x="6470904" y="3548631"/>
+            <a:ext cx="2028444" cy="284649"/>
+          </a:xfrm>
+          <a:prstGeom prst="rect">
+            <a:avLst/>
+          </a:prstGeom>
+          <a:noFill/>
+        </p:spPr>
+        <p:txBody>
+          <a:bodyPr wrap="square" anchor="t" lIns="0" rIns="0" tIns="0" bIns="0">
+            <a:normAutofit/>
+          </a:bodyPr>
+          <a:lstStyle/>
+          <a:p>
+            <a:pPr algn="l">
+              <a:lnSpc>
+                <a:spcPct val="99097"/>
+              </a:lnSpc>
+            </a:pPr>
+            <a:r>
+              <a:rPr sz="1600" b="0">
+                <a:solidFill>
+                  <a:srgbClr val="DCE6EE"/>
+                </a:solidFill>
+                <a:latin typeface="Inter SemiBold"/>
+                <a:cs typeface="Inter SemiBold"/>
+                <a:sym typeface="Inter SemiBold"/>
+              </a:rPr>
+              <a:t>Bridges exposed</a:t>
+            </a:r>
+          </a:p>
+        </p:txBody>
+      </p:sp>
+      <p:sp>
+        <p:nvSpPr>
+          <p:cNvPr id="18" name="TextBox 17"/>
+          <p:cNvSpPr txBox="1"/>
+          <p:nvPr/>
+        </p:nvSpPr>
+        <p:spPr>
+          <a:xfrm>
+            <a:off x="6470904" y="3871475"/>
+            <a:ext cx="2028444" cy="667146"/>
+          </a:xfrm>
+          <a:prstGeom prst="rect">
+            <a:avLst/>
+          </a:prstGeom>
+          <a:noFill/>
+        </p:spPr>
+        <p:txBody>
+          <a:bodyPr wrap="square" anchor="t" lIns="0" rIns="0" tIns="0" bIns="0">
+            <a:normAutofit/>
+          </a:bodyPr>
+          <a:lstStyle/>
+          <a:p>
+            <a:pPr algn="l">
+              <a:lnSpc>
+                <a:spcPct val="112734"/>
+              </a:lnSpc>
+            </a:pPr>
+            <a:r>
+              <a:rPr sz="1500" b="0">
+                <a:solidFill>
+                  <a:srgbClr val="8DA0AE"/>
+                </a:solidFill>
+                <a:latin typeface="Space Grotesk"/>
+                <a:cs typeface="Space Grotesk"/>
+                <a:sym typeface="Space Grotesk"/>
+              </a:rPr>
+              <a:t>Of 385 mapped. Range 12 to 30</a:t>
+            </a:r>
+          </a:p>
+        </p:txBody>
+      </p:sp>
+      <p:sp>
+        <p:nvSpPr>
+          <p:cNvPr id="19" name="TextBox 18"/>
+          <p:cNvSpPr txBox="1"/>
+          <p:nvPr/>
+        </p:nvSpPr>
+        <p:spPr>
+          <a:xfrm>
+            <a:off x="9249156" y="2672397"/>
+            <a:ext cx="2028444" cy="894665"/>
+          </a:xfrm>
+          <a:prstGeom prst="rect">
+            <a:avLst/>
+          </a:prstGeom>
+          <a:noFill/>
+        </p:spPr>
+        <p:txBody>
+          <a:bodyPr wrap="square" anchor="t" lIns="0" rIns="0" tIns="0" bIns="0">
+            <a:normAutofit/>
+          </a:bodyPr>
+          <a:lstStyle/>
+          <a:p>
+            <a:pPr algn="l">
+              <a:lnSpc>
+                <a:spcPct val="88496"/>
+              </a:lnSpc>
+            </a:pPr>
+            <a:r>
+              <a:rPr sz="5400" b="0">
+                <a:solidFill>
+                  <a:srgbClr val="DCE6EE"/>
+                </a:solidFill>
+                <a:latin typeface="Space Grotesk Bold"/>
+                <a:cs typeface="Space Grotesk Bold"/>
+                <a:sym typeface="Space Grotesk Bold"/>
+              </a:rPr>
+              <a:t>4</a:t>
+            </a:r>
+          </a:p>
+        </p:txBody>
+      </p:sp>
+      <p:sp>
+        <p:nvSpPr>
+          <p:cNvPr id="20" name="TextBox 19"/>
+          <p:cNvSpPr txBox="1"/>
+          <p:nvPr/>
+        </p:nvSpPr>
+        <p:spPr>
+          <a:xfrm>
+            <a:off x="9249156" y="3548631"/>
+            <a:ext cx="2028444" cy="569298"/>
+          </a:xfrm>
+          <a:prstGeom prst="rect">
+            <a:avLst/>
+          </a:prstGeom>
+          <a:noFill/>
+        </p:spPr>
+        <p:txBody>
+          <a:bodyPr wrap="square" anchor="t" lIns="0" rIns="0" tIns="0" bIns="0">
+            <a:normAutofit/>
+          </a:bodyPr>
+          <a:lstStyle/>
+          <a:p>
+            <a:pPr algn="l">
+              <a:lnSpc>
+                <a:spcPct val="99097"/>
+              </a:lnSpc>
+            </a:pPr>
+            <a:r>
+              <a:rPr sz="1600" b="0">
+                <a:solidFill>
+                  <a:srgbClr val="DCE6EE"/>
+                </a:solidFill>
+                <a:latin typeface="Inter SemiBold"/>
+                <a:cs typeface="Inter SemiBold"/>
+                <a:sym typeface="Inter SemiBold"/>
+              </a:rPr>
+              <a:t>Settlements cut off</a:t>
+            </a:r>
+          </a:p>
+        </p:txBody>
+      </p:sp>
+      <p:sp>
+        <p:nvSpPr>
+          <p:cNvPr id="21" name="TextBox 20"/>
+          <p:cNvSpPr txBox="1"/>
+          <p:nvPr/>
+        </p:nvSpPr>
+        <p:spPr>
+          <a:xfrm>
+            <a:off x="9249156" y="4121167"/>
+            <a:ext cx="2028444" cy="971463"/>
+          </a:xfrm>
+          <a:prstGeom prst="rect">
+            <a:avLst/>
+          </a:prstGeom>
+          <a:noFill/>
+        </p:spPr>
+        <p:txBody>
+          <a:bodyPr wrap="square" anchor="t" lIns="0" rIns="0" tIns="0" bIns="0">
+            <a:normAutofit/>
+          </a:bodyPr>
+          <a:lstStyle/>
+          <a:p>
+            <a:pPr algn="l">
+              <a:lnSpc>
+                <a:spcPct val="112734"/>
+              </a:lnSpc>
+            </a:pPr>
+            <a:r>
+              <a:rPr sz="1500" b="0">
+                <a:solidFill>
+                  <a:srgbClr val="8DA0AE"/>
+                </a:solidFill>
+                <a:latin typeface="Space Grotesk"/>
+                <a:cs typeface="Space Grotesk"/>
+                <a:sym typeface="Space Grotesk"/>
+              </a:rPr>
+              <a:t>Of 305 assessable. Range 2 to 12</a:t>
             </a:r>
           </a:p>
         </p:txBody>
@@ -3777,6 +11684,14 @@
 <file path=ppt/slides/slide9.xml><?xml version="1.0" encoding="utf-8"?>
 <p:sld xmlns:a="http://schemas.openxmlformats.org/drawingml/2006/main" xmlns:p="http://schemas.openxmlformats.org/presentationml/2006/main" xmlns:r="http://schemas.openxmlformats.org/officeDocument/2006/relationships">
   <p:cSld>
+    <p:bg>
+      <p:bgPr>
+        <a:solidFill>
+          <a:srgbClr val="0C1620"/>
+        </a:solidFill>
+        <a:effectLst/>
+      </p:bgPr>
+    </p:bg>
     <p:spTree>
       <p:nvGrpSpPr>
         <p:cNvPr id="1" name=""/>
@@ -3786,61 +11701,230 @@
       <p:grpSpPr/>
       <p:sp>
         <p:nvSpPr>
-          <p:cNvPr id="2" name="Title 1"/>
-          <p:cNvSpPr>
-            <a:spLocks noGrp="1"/>
-          </p:cNvSpPr>
-          <p:nvPr>
-            <p:ph type="title"/>
-          </p:nvPr>
-        </p:nvSpPr>
-        <p:spPr/>
-        <p:txBody>
-          <a:bodyPr/>
-          <a:lstStyle/>
-          <a:p>
-            <a:r>
-              <a:t>Limitations and next steps</a:t>
-            </a:r>
-          </a:p>
-        </p:txBody>
-      </p:sp>
-      <p:sp>
-        <p:nvSpPr>
-          <p:cNvPr id="3" name="Content Placeholder 2"/>
-          <p:cNvSpPr>
-            <a:spLocks noGrp="1"/>
-          </p:cNvSpPr>
-          <p:nvPr>
-            <p:ph idx="1"/>
-          </p:nvPr>
-        </p:nvSpPr>
-        <p:spPr/>
-        <p:txBody>
-          <a:bodyPr/>
-          <a:lstStyle/>
-          <a:p>
-            <a:pPr>
-              <a:defRPr sz="2200"/>
-            </a:pPr>
-            <a:r>
-              <a:t>• One track; post scene 2026-08-28</a:t>
-            </a:r>
-          </a:p>
-          <a:p>
-            <a:pPr>
-              <a:defRPr sz="2200"/>
-            </a:pPr>
-            <a:r>
-              <a:t>• 30 m pixels, steep terrain masked, OSM incomplete in rural areas</a:t>
-            </a:r>
-          </a:p>
-          <a:p>
-            <a:pPr>
-              <a:defRPr sz="2200"/>
-            </a:pPr>
-            <a:r>
-              <a:t>• Next: a second track or a closer post scene, post-event OSM for cut-off checks</a:t>
+          <p:cNvPr id="2" name="Rectangle 1"/>
+          <p:cNvSpPr/>
+          <p:nvPr/>
+        </p:nvSpPr>
+        <p:spPr>
+          <a:xfrm>
+            <a:off x="0" y="0"/>
+            <a:ext cx="276515" cy="6858000"/>
+          </a:xfrm>
+          <a:prstGeom prst="rect">
+            <a:avLst/>
+          </a:prstGeom>
+          <a:solidFill>
+            <a:srgbClr val="4BC7D6"/>
+          </a:solidFill>
+          <a:ln>
+            <a:noFill/>
+          </a:ln>
+          <a:effectLst/>
+        </p:spPr>
+        <p:style>
+          <a:lnRef idx="1">
+            <a:schemeClr val="accent1"/>
+          </a:lnRef>
+          <a:fillRef idx="3">
+            <a:schemeClr val="accent1"/>
+          </a:fillRef>
+          <a:effectRef idx="2">
+            <a:schemeClr val="accent1"/>
+          </a:effectRef>
+          <a:fontRef idx="minor">
+            <a:schemeClr val="lt1"/>
+          </a:fontRef>
+        </p:style>
+        <p:txBody>
+          <a:bodyPr rtlCol="0" anchor="ctr"/>
+          <a:lstStyle/>
+          <a:p/>
+        </p:txBody>
+      </p:sp>
+      <p:pic>
+        <p:nvPicPr>
+          <p:cNvPr id="3" name="Picture 2" descr="deckimg-gwre4blu.png"/>
+          <p:cNvPicPr>
+            <a:picLocks noChangeAspect="1"/>
+          </p:cNvPicPr>
+          <p:nvPr/>
+        </p:nvPicPr>
+        <p:blipFill>
+          <a:blip r:embed="rId2"/>
+          <a:stretch>
+            <a:fillRect/>
+          </a:stretch>
+        </p:blipFill>
+        <p:spPr>
+          <a:xfrm>
+            <a:off x="6313505" y="2541578"/>
+            <a:ext cx="5220127" cy="1774843"/>
+          </a:xfrm>
+          <a:prstGeom prst="rect">
+            <a:avLst/>
+          </a:prstGeom>
+        </p:spPr>
+      </p:pic>
+      <p:sp>
+        <p:nvSpPr>
+          <p:cNvPr id="4" name="TextBox 3"/>
+          <p:cNvSpPr txBox="1"/>
+          <p:nvPr/>
+        </p:nvSpPr>
+        <p:spPr>
+          <a:xfrm>
+            <a:off x="658368" y="342351"/>
+            <a:ext cx="5437632" cy="209929"/>
+          </a:xfrm>
+          <a:prstGeom prst="rect">
+            <a:avLst/>
+          </a:prstGeom>
+          <a:noFill/>
+        </p:spPr>
+        <p:txBody>
+          <a:bodyPr wrap="square" anchor="t" lIns="0" rIns="0" tIns="0" bIns="0">
+            <a:normAutofit/>
+          </a:bodyPr>
+          <a:lstStyle/>
+          <a:p>
+            <a:pPr algn="l">
+              <a:lnSpc>
+                <a:spcPct val="97445"/>
+              </a:lnSpc>
+            </a:pPr>
+            <a:r>
+              <a:rPr sz="1100" b="0" spc="70">
+                <a:solidFill>
+                  <a:srgbClr val="8DA0AE"/>
+                </a:solidFill>
+                <a:latin typeface="Inter SemiBold"/>
+                <a:cs typeface="Inter SemiBold"/>
+                <a:sym typeface="Inter SemiBold"/>
+              </a:rPr>
+              <a:t>TRISHULI-FLOOD-MAPPING</a:t>
+            </a:r>
+          </a:p>
+        </p:txBody>
+      </p:sp>
+      <p:sp>
+        <p:nvSpPr>
+          <p:cNvPr id="5" name="TextBox 4"/>
+          <p:cNvSpPr txBox="1"/>
+          <p:nvPr/>
+        </p:nvSpPr>
+        <p:spPr>
+          <a:xfrm>
+            <a:off x="10253472" y="342351"/>
+            <a:ext cx="1280160" cy="187924"/>
+          </a:xfrm>
+          <a:prstGeom prst="rect">
+            <a:avLst/>
+          </a:prstGeom>
+          <a:noFill/>
+        </p:spPr>
+        <p:txBody>
+          <a:bodyPr wrap="square" anchor="t" lIns="0" rIns="0" tIns="0" bIns="0">
+            <a:normAutofit/>
+          </a:bodyPr>
+          <a:lstStyle/>
+          <a:p>
+            <a:pPr algn="r">
+              <a:lnSpc>
+                <a:spcPct val="97445"/>
+              </a:lnSpc>
+            </a:pPr>
+            <a:r>
+              <a:rPr sz="1100" b="0" spc="70">
+                <a:solidFill>
+                  <a:srgbClr val="8DA0AE"/>
+                </a:solidFill>
+                <a:latin typeface="Inter SemiBold"/>
+                <a:cs typeface="Inter SemiBold"/>
+                <a:sym typeface="Inter SemiBold"/>
+              </a:rPr>
+              <a:t>09 / 13</a:t>
+            </a:r>
+          </a:p>
+        </p:txBody>
+      </p:sp>
+      <p:sp>
+        <p:nvSpPr>
+          <p:cNvPr id="6" name="TextBox 5"/>
+          <p:cNvSpPr txBox="1"/>
+          <p:nvPr/>
+        </p:nvSpPr>
+        <p:spPr>
+          <a:xfrm>
+            <a:off x="658368" y="822960"/>
+            <a:ext cx="4785116" cy="1374729"/>
+          </a:xfrm>
+          <a:prstGeom prst="rect">
+            <a:avLst/>
+          </a:prstGeom>
+          <a:noFill/>
+        </p:spPr>
+        <p:txBody>
+          <a:bodyPr wrap="square" anchor="t" lIns="0" rIns="0" tIns="0" bIns="0">
+            <a:normAutofit/>
+          </a:bodyPr>
+          <a:lstStyle/>
+          <a:p>
+            <a:pPr algn="l">
+              <a:lnSpc>
+                <a:spcPct val="88496"/>
+              </a:lnSpc>
+            </a:pPr>
+            <a:r>
+              <a:rPr sz="2720" b="0">
+                <a:solidFill>
+                  <a:srgbClr val="DCE6EE"/>
+                </a:solidFill>
+                <a:latin typeface="Space Grotesk Bold"/>
+                <a:cs typeface="Space Grotesk Bold"/>
+                <a:sym typeface="Space Grotesk Bold"/>
+              </a:rPr>
+              <a:t>The cut-off count holds between 2 and 12 across 18 scenarios</a:t>
+            </a:r>
+          </a:p>
+        </p:txBody>
+      </p:sp>
+      <p:sp>
+        <p:nvSpPr>
+          <p:cNvPr id="7" name="TextBox 6"/>
+          <p:cNvSpPr txBox="1"/>
+          <p:nvPr/>
+        </p:nvSpPr>
+        <p:spPr>
+          <a:xfrm>
+            <a:off x="658368" y="2138591"/>
+            <a:ext cx="4785116" cy="1000719"/>
+          </a:xfrm>
+          <a:prstGeom prst="rect">
+            <a:avLst/>
+          </a:prstGeom>
+          <a:noFill/>
+        </p:spPr>
+        <p:txBody>
+          <a:bodyPr wrap="square" anchor="t" lIns="0" rIns="0" tIns="0" bIns="0">
+            <a:normAutofit/>
+          </a:bodyPr>
+          <a:lstStyle/>
+          <a:p>
+            <a:pPr algn="l">
+              <a:lnSpc>
+                <a:spcPct val="112734"/>
+              </a:lnSpc>
+            </a:pPr>
+            <a:r>
+              <a:rPr sz="1500" b="0">
+                <a:solidFill>
+                  <a:srgbClr val="8DA0AE"/>
+                </a:solidFill>
+                <a:latin typeface="Space Grotesk"/>
+                <a:cs typeface="Space Grotesk"/>
+                <a:sym typeface="Space Grotesk"/>
+              </a:rPr>
+              <a:t>Three thresholds times mask plus or minus one pixel times bridges failing or surviving. Dark bar is the headline.</a:t>
             </a:r>
           </a:p>
         </p:txBody>
@@ -4171,4 +12255,324 @@
   </a:objectDefaults>
   <a:extraClrSchemeLst/>
 </a:theme>
+</file>
+
+<file path=ppt/theme/theme2.xml><?xml version="1.0" encoding="utf-8"?>
+<a:theme xmlns:a="http://schemas.openxmlformats.org/drawingml/2006/main" name="Office Theme">
+  <a:themeElements>
+    <a:clrScheme name="Office">
+      <a:dk1>
+        <a:sysClr val="windowText" lastClr="000000"/>
+      </a:dk1>
+      <a:lt1>
+        <a:sysClr val="window" lastClr="FFFFFF"/>
+      </a:lt1>
+      <a:dk2>
+        <a:srgbClr val="1F497D"/>
+      </a:dk2>
+      <a:lt2>
+        <a:srgbClr val="EEECE1"/>
+      </a:lt2>
+      <a:accent1>
+        <a:srgbClr val="4F81BD"/>
+      </a:accent1>
+      <a:accent2>
+        <a:srgbClr val="C0504D"/>
+      </a:accent2>
+      <a:accent3>
+        <a:srgbClr val="9BBB59"/>
+      </a:accent3>
+      <a:accent4>
+        <a:srgbClr val="8064A2"/>
+      </a:accent4>
+      <a:accent5>
+        <a:srgbClr val="4BACC6"/>
+      </a:accent5>
+      <a:accent6>
+        <a:srgbClr val="F79646"/>
+      </a:accent6>
+      <a:hlink>
+        <a:srgbClr val="0000FF"/>
+      </a:hlink>
+      <a:folHlink>
+        <a:srgbClr val="800080"/>
+      </a:folHlink>
+    </a:clrScheme>
+    <a:fontScheme name="Office">
+      <a:majorFont>
+        <a:latin typeface="Calibri"/>
+        <a:ea typeface=""/>
+        <a:cs typeface=""/>
+        <a:font script="Jpan" typeface="ＭＳ Ｐゴシック"/>
+        <a:font script="Hang" typeface="맑은 고딕"/>
+        <a:font script="Hans" typeface="宋体"/>
+        <a:font script="Hant" typeface="新細明體"/>
+        <a:font script="Arab" typeface="Times New Roman"/>
+        <a:font script="Hebr" typeface="Times New Roman"/>
+        <a:font script="Thai" typeface="Angsana New"/>
+        <a:font script="Ethi" typeface="Nyala"/>
+        <a:font script="Beng" typeface="Vrinda"/>
+        <a:font script="Gujr" typeface="Shruti"/>
+        <a:font script="Khmr" typeface="MoolBoran"/>
+        <a:font script="Knda" typeface="Tunga"/>
+        <a:font script="Guru" typeface="Raavi"/>
+        <a:font script="Cans" typeface="Euphemia"/>
+        <a:font script="Cher" typeface="Plantagenet Cherokee"/>
+        <a:font script="Yiii" typeface="Microsoft Yi Baiti"/>
+        <a:font script="Tibt" typeface="Microsoft Himalaya"/>
+        <a:font script="Thaa" typeface="MV Boli"/>
+        <a:font script="Deva" typeface="Mangal"/>
+        <a:font script="Telu" typeface="Gautami"/>
+        <a:font script="Taml" typeface="Latha"/>
+        <a:font script="Syrc" typeface="Estrangelo Edessa"/>
+        <a:font script="Orya" typeface="Kalinga"/>
+        <a:font script="Mlym" typeface="Kartika"/>
+        <a:font script="Laoo" typeface="DokChampa"/>
+        <a:font script="Sinh" typeface="Iskoola Pota"/>
+        <a:font script="Mong" typeface="Mongolian Baiti"/>
+        <a:font script="Viet" typeface="Times New Roman"/>
+        <a:font script="Uigh" typeface="Microsoft Uighur"/>
+        <a:font script="Geor" typeface="Sylfaen"/>
+      </a:majorFont>
+      <a:minorFont>
+        <a:latin typeface="Calibri"/>
+        <a:ea typeface=""/>
+        <a:cs typeface=""/>
+        <a:font script="Jpan" typeface="ＭＳ Ｐゴシック"/>
+        <a:font script="Hang" typeface="맑은 고딕"/>
+        <a:font script="Hans" typeface="宋体"/>
+        <a:font script="Hant" typeface="新細明體"/>
+        <a:font script="Arab" typeface="Arial"/>
+        <a:font script="Hebr" typeface="Arial"/>
+        <a:font script="Thai" typeface="Cordia New"/>
+        <a:font script="Ethi" typeface="Nyala"/>
+        <a:font script="Beng" typeface="Vrinda"/>
+        <a:font script="Gujr" typeface="Shruti"/>
+        <a:font script="Khmr" typeface="DaunPenh"/>
+        <a:font script="Knda" typeface="Tunga"/>
+        <a:font script="Guru" typeface="Raavi"/>
+        <a:font script="Cans" typeface="Euphemia"/>
+        <a:font script="Cher" typeface="Plantagenet Cherokee"/>
+        <a:font script="Yiii" typeface="Microsoft Yi Baiti"/>
+        <a:font script="Tibt" typeface="Microsoft Himalaya"/>
+        <a:font script="Thaa" typeface="MV Boli"/>
+        <a:font script="Deva" typeface="Mangal"/>
+        <a:font script="Telu" typeface="Gautami"/>
+        <a:font script="Taml" typeface="Latha"/>
+        <a:font script="Syrc" typeface="Estrangelo Edessa"/>
+        <a:font script="Orya" typeface="Kalinga"/>
+        <a:font script="Mlym" typeface="Kartika"/>
+        <a:font script="Laoo" typeface="DokChampa"/>
+        <a:font script="Sinh" typeface="Iskoola Pota"/>
+        <a:font script="Mong" typeface="Mongolian Baiti"/>
+        <a:font script="Viet" typeface="Arial"/>
+        <a:font script="Uigh" typeface="Microsoft Uighur"/>
+        <a:font script="Geor" typeface="Sylfaen"/>
+      </a:minorFont>
+    </a:fontScheme>
+    <a:fmtScheme name="Office">
+      <a:fillStyleLst>
+        <a:solidFill>
+          <a:schemeClr val="phClr"/>
+        </a:solidFill>
+        <a:gradFill rotWithShape="1">
+          <a:gsLst>
+            <a:gs pos="0">
+              <a:schemeClr val="phClr">
+                <a:tint val="50000"/>
+                <a:satMod val="300000"/>
+              </a:schemeClr>
+            </a:gs>
+            <a:gs pos="35000">
+              <a:schemeClr val="phClr">
+                <a:tint val="37000"/>
+                <a:satMod val="300000"/>
+              </a:schemeClr>
+            </a:gs>
+            <a:gs pos="100000">
+              <a:schemeClr val="phClr">
+                <a:tint val="15000"/>
+                <a:satMod val="350000"/>
+              </a:schemeClr>
+            </a:gs>
+          </a:gsLst>
+          <a:lin ang="16200000" scaled="1"/>
+        </a:gradFill>
+        <a:gradFill rotWithShape="1">
+          <a:gsLst>
+            <a:gs pos="0">
+              <a:schemeClr val="phClr">
+                <a:tint val="100000"/>
+                <a:shade val="100000"/>
+                <a:satMod val="130000"/>
+              </a:schemeClr>
+            </a:gs>
+            <a:gs pos="100000">
+              <a:schemeClr val="phClr">
+                <a:tint val="50000"/>
+                <a:shade val="100000"/>
+                <a:satMod val="350000"/>
+              </a:schemeClr>
+            </a:gs>
+          </a:gsLst>
+          <a:lin ang="16200000" scaled="0"/>
+        </a:gradFill>
+      </a:fillStyleLst>
+      <a:lnStyleLst>
+        <a:ln w="9525" cap="flat" cmpd="sng" algn="ctr">
+          <a:solidFill>
+            <a:schemeClr val="phClr">
+              <a:shade val="95000"/>
+              <a:satMod val="105000"/>
+            </a:schemeClr>
+          </a:solidFill>
+          <a:prstDash val="solid"/>
+        </a:ln>
+        <a:ln w="25400" cap="flat" cmpd="sng" algn="ctr">
+          <a:solidFill>
+            <a:schemeClr val="phClr"/>
+          </a:solidFill>
+          <a:prstDash val="solid"/>
+        </a:ln>
+        <a:ln w="38100" cap="flat" cmpd="sng" algn="ctr">
+          <a:solidFill>
+            <a:schemeClr val="phClr"/>
+          </a:solidFill>
+          <a:prstDash val="solid"/>
+        </a:ln>
+      </a:lnStyleLst>
+      <a:effectStyleLst>
+        <a:effectStyle>
+          <a:effectLst>
+            <a:outerShdw blurRad="40000" dist="20000" dir="5400000" rotWithShape="0">
+              <a:srgbClr val="000000">
+                <a:alpha val="38000"/>
+              </a:srgbClr>
+            </a:outerShdw>
+          </a:effectLst>
+        </a:effectStyle>
+        <a:effectStyle>
+          <a:effectLst>
+            <a:outerShdw blurRad="40000" dist="23000" dir="5400000" rotWithShape="0">
+              <a:srgbClr val="000000">
+                <a:alpha val="35000"/>
+              </a:srgbClr>
+            </a:outerShdw>
+          </a:effectLst>
+        </a:effectStyle>
+        <a:effectStyle>
+          <a:effectLst>
+            <a:outerShdw blurRad="40000" dist="23000" dir="5400000" rotWithShape="0">
+              <a:srgbClr val="000000">
+                <a:alpha val="35000"/>
+              </a:srgbClr>
+            </a:outerShdw>
+          </a:effectLst>
+          <a:scene3d>
+            <a:camera prst="orthographicFront">
+              <a:rot lat="0" lon="0" rev="0"/>
+            </a:camera>
+            <a:lightRig rig="threePt" dir="t">
+              <a:rot lat="0" lon="0" rev="1200000"/>
+            </a:lightRig>
+          </a:scene3d>
+          <a:sp3d>
+            <a:bevelT w="63500" h="25400"/>
+          </a:sp3d>
+        </a:effectStyle>
+      </a:effectStyleLst>
+      <a:bgFillStyleLst>
+        <a:solidFill>
+          <a:schemeClr val="phClr"/>
+        </a:solidFill>
+        <a:gradFill rotWithShape="1">
+          <a:gsLst>
+            <a:gs pos="0">
+              <a:schemeClr val="phClr">
+                <a:tint val="40000"/>
+                <a:satMod val="350000"/>
+              </a:schemeClr>
+            </a:gs>
+            <a:gs pos="40000">
+              <a:schemeClr val="phClr">
+                <a:tint val="45000"/>
+                <a:shade val="99000"/>
+                <a:satMod val="350000"/>
+              </a:schemeClr>
+            </a:gs>
+            <a:gs pos="100000">
+              <a:schemeClr val="phClr">
+                <a:shade val="20000"/>
+                <a:satMod val="255000"/>
+              </a:schemeClr>
+            </a:gs>
+          </a:gsLst>
+          <a:path path="circle">
+            <a:fillToRect l="50000" t="-80000" r="50000" b="180000"/>
+          </a:path>
+        </a:gradFill>
+        <a:gradFill rotWithShape="1">
+          <a:gsLst>
+            <a:gs pos="0">
+              <a:schemeClr val="phClr">
+                <a:tint val="80000"/>
+                <a:satMod val="300000"/>
+              </a:schemeClr>
+            </a:gs>
+            <a:gs pos="100000">
+              <a:schemeClr val="phClr">
+                <a:shade val="30000"/>
+                <a:satMod val="200000"/>
+              </a:schemeClr>
+            </a:gs>
+          </a:gsLst>
+          <a:path path="circle">
+            <a:fillToRect l="50000" t="50000" r="50000" b="50000"/>
+          </a:path>
+        </a:gradFill>
+      </a:bgFillStyleLst>
+    </a:fmtScheme>
+  </a:themeElements>
+  <a:objectDefaults>
+    <a:spDef>
+      <a:spPr/>
+      <a:bodyPr/>
+      <a:lstStyle/>
+      <a:style>
+        <a:lnRef idx="1">
+          <a:schemeClr val="accent1"/>
+        </a:lnRef>
+        <a:fillRef idx="3">
+          <a:schemeClr val="accent1"/>
+        </a:fillRef>
+        <a:effectRef idx="2">
+          <a:schemeClr val="accent1"/>
+        </a:effectRef>
+        <a:fontRef idx="minor">
+          <a:schemeClr val="lt1"/>
+        </a:fontRef>
+      </a:style>
+    </a:spDef>
+    <a:lnDef>
+      <a:spPr/>
+      <a:bodyPr/>
+      <a:lstStyle/>
+      <a:style>
+        <a:lnRef idx="2">
+          <a:schemeClr val="accent1"/>
+        </a:lnRef>
+        <a:fillRef idx="0">
+          <a:schemeClr val="accent1"/>
+        </a:fillRef>
+        <a:effectRef idx="1">
+          <a:schemeClr val="accent1"/>
+        </a:effectRef>
+        <a:fontRef idx="minor">
+          <a:schemeClr val="tx1"/>
+        </a:fontRef>
+      </a:style>
+    </a:lnDef>
+  </a:objectDefaults>
+  <a:extraClrSchemeLst/>
+</a:theme>
 </file>